--- a/slides/deck.pptx
+++ b/slides/deck.pptx
@@ -1657,7 +1657,7 @@
                 <a:ea typeface="DM Serif Display" pitchFamily="34" charset="-122"/>
                 <a:cs typeface="DM Serif Display" pitchFamily="34" charset="-120"/>
               </a:rPr>
-              <a:t>Vibecoding Lessons from My First Project</a:t>
+              <a:t>Vibecoding in Practice</a:t>
             </a:r>
             <a:endParaRPr lang="en-US" sz="4600" dirty="0"/>
           </a:p>
@@ -1693,7 +1693,7 @@
                   <a:srgbClr val="595959"/>
                 </a:solidFill>
               </a:rPr>
-              <a:t>Building a MERN app in minutes, production in days</a:t>
+              <a:t>Faster software creation, higher governance stakes</a:t>
             </a:r>
             <a:endParaRPr lang="en-US" sz="2000" dirty="0"/>
           </a:p>
@@ -1890,7 +1890,7 @@
                 <a:ea typeface="Georgia" pitchFamily="34" charset="-122"/>
                 <a:cs typeface="Georgia" pitchFamily="34" charset="-120"/>
               </a:rPr>
-              <a:t>Vibecoding: What I Learned in My First Project</a:t>
+              <a:t>Vibecoding Changed What I Can Build</a:t>
             </a:r>
             <a:endParaRPr lang="en-US" sz="3000" dirty="0"/>
           </a:p>
@@ -1958,7 +1958,7 @@
                 <a:ea typeface="Arial" pitchFamily="34" charset="-122"/>
                 <a:cs typeface="Arial" pitchFamily="34" charset="-120"/>
               </a:rPr>
-              <a:t>Built a full MERN app in &lt;10 minutes after a 5+ year gap</a:t>
+              <a:t>Vibecoding turned a structured logic problem into working software, fast</a:t>
             </a:r>
             <a:endParaRPr lang="en-US" sz="1800" dirty="0"/>
           </a:p>
@@ -1979,7 +1979,7 @@
                 <a:ea typeface="Arial" pitchFamily="34" charset="-122"/>
                 <a:cs typeface="Arial" pitchFamily="34" charset="-120"/>
               </a:rPr>
-              <a:t>Context: Enterprise OpenAI Codex licenses just rolled out</a:t>
+              <a:t>This is materially different from brainstorming in ChatGPT</a:t>
             </a:r>
             <a:endParaRPr lang="en-US" sz="1800" dirty="0"/>
           </a:p>
@@ -2000,7 +2000,7 @@
                 <a:ea typeface="Arial" pitchFamily="34" charset="-122"/>
                 <a:cs typeface="Arial" pitchFamily="34" charset="-120"/>
               </a:rPr>
-              <a:t>Goal: solve a real wallet problem fast, then harden it</a:t>
+              <a:t>Extrapolation: many software ideas that were too slow to build are now viable</a:t>
             </a:r>
             <a:endParaRPr lang="en-US" sz="1800" dirty="0"/>
           </a:p>
@@ -2064,7 +2064,7 @@
                 <a:ea typeface="Arial" pitchFamily="34" charset="-122"/>
                 <a:cs typeface="Arial" pitchFamily="34" charset="-120"/>
               </a:rPr>
-              <a:t>Vibecoding compresses the first 10% of delivery to minutes.</a:t>
+              <a:t>Vibecoding lowers the activation energy of software creation.</a:t>
             </a:r>
             <a:endParaRPr lang="en-US" sz="1400" dirty="0"/>
           </a:p>
@@ -2236,7 +2236,7 @@
                 <a:ea typeface="Georgia" pitchFamily="34" charset="-122"/>
                 <a:cs typeface="Georgia" pitchFamily="34" charset="-120"/>
               </a:rPr>
-              <a:t>The Problem + The Demo</a:t>
+              <a:t>The Problem and the Product</a:t>
             </a:r>
             <a:endParaRPr lang="en-US" sz="3000" dirty="0"/>
           </a:p>
@@ -2287,6 +2287,69 @@
         <p:txBody>
           <a:bodyPr wrap="square" rtlCol="0" anchor="t"/>
           <a:lstStyle/>
+          <a:p>
+            <a:pPr marL="228600" indent="-228600">
+              <a:spcAft>
+                <a:spcPts val="600"/>
+              </a:spcAft>
+              <a:buSzPct val="100000"/>
+              <a:buChar char="•"/>
+            </a:pPr>
+            <a:r>
+              <a:rPr lang="en-US" sz="1800" dirty="0">
+                <a:solidFill>
+                  <a:srgbClr val="0C0C0C"/>
+                </a:solidFill>
+                <a:latin typeface="Arial" pitchFamily="34" charset="0"/>
+                <a:ea typeface="Arial" pitchFamily="34" charset="-122"/>
+                <a:cs typeface="Arial" pitchFamily="34" charset="-120"/>
+              </a:rPr>
+              <a:t>Rewards program changes made my wallet strategy obsolete</a:t>
+            </a:r>
+            <a:endParaRPr lang="en-US" sz="1800" dirty="0"/>
+          </a:p>
+          <a:p>
+            <a:pPr marL="228600" indent="-228600">
+              <a:spcAft>
+                <a:spcPts val="600"/>
+              </a:spcAft>
+              <a:buSzPct val="100000"/>
+              <a:buChar char="•"/>
+            </a:pPr>
+            <a:r>
+              <a:rPr lang="en-US" sz="1800" dirty="0">
+                <a:solidFill>
+                  <a:srgbClr val="0C0C0C"/>
+                </a:solidFill>
+                <a:latin typeface="Arial" pitchFamily="34" charset="0"/>
+                <a:ea typeface="Arial" pitchFamily="34" charset="-122"/>
+                <a:cs typeface="Arial" pitchFamily="34" charset="-120"/>
+              </a:rPr>
+              <a:t>I built a tool to test card portfolio setups and spend-routing scenarios</a:t>
+            </a:r>
+            <a:endParaRPr lang="en-US" sz="1800" dirty="0"/>
+          </a:p>
+          <a:p>
+            <a:pPr marL="228600" indent="-228600">
+              <a:spcAft>
+                <a:spcPts val="600"/>
+              </a:spcAft>
+              <a:buSzPct val="100000"/>
+              <a:buChar char="•"/>
+            </a:pPr>
+            <a:r>
+              <a:rPr lang="en-US" sz="1800" dirty="0">
+                <a:solidFill>
+                  <a:srgbClr val="0C0C0C"/>
+                </a:solidFill>
+                <a:latin typeface="Arial" pitchFamily="34" charset="0"/>
+                <a:ea typeface="Arial" pitchFamily="34" charset="-122"/>
+                <a:cs typeface="Arial" pitchFamily="34" charset="-120"/>
+              </a:rPr>
+              <a:t>The app stores inputs locally so users can iterate and compare over time</a:t>
+            </a:r>
+            <a:endParaRPr lang="en-US" sz="1800" dirty="0"/>
+          </a:p>
           <a:p>
             <a:pPr marL="228600" indent="-228600">
               <a:spcAft>
@@ -2438,7 +2501,7 @@
                 <a:ea typeface="Arial" pitchFamily="34" charset="-122"/>
                 <a:cs typeface="Arial" pitchFamily="34" charset="-120"/>
               </a:rPr>
-              <a:t>Real pain + real demo = instant buy‑in.</a:t>
+              <a:t>Real user pain can now be translated into software in a single session.</a:t>
             </a:r>
             <a:endParaRPr lang="en-US" sz="1400" dirty="0"/>
           </a:p>
@@ -2610,7 +2673,7 @@
                 <a:ea typeface="Georgia" pitchFamily="34" charset="-122"/>
                 <a:cs typeface="Georgia" pitchFamily="34" charset="-120"/>
               </a:rPr>
-              <a:t>Timeline: Speed vs. Production Reality</a:t>
+              <a:t>Proof That This Is Real</a:t>
             </a:r>
             <a:endParaRPr lang="en-US" sz="3000" dirty="0"/>
           </a:p>
@@ -2678,7 +2741,7 @@
                 <a:ea typeface="Arial" pitchFamily="34" charset="-122"/>
                 <a:cs typeface="Arial" pitchFamily="34" charset="-120"/>
               </a:rPr>
-              <a:t>10 minutes: working MVP</a:t>
+              <a:t>First working application: 10 minutes</a:t>
             </a:r>
             <a:endParaRPr lang="en-US" sz="1800" dirty="0"/>
           </a:p>
@@ -2699,7 +2762,7 @@
                 <a:ea typeface="Arial" pitchFamily="34" charset="-122"/>
                 <a:cs typeface="Arial" pitchFamily="34" charset="-120"/>
               </a:rPr>
-              <a:t>1 day (intermittent): refine UX and logic</a:t>
+              <a:t>Prior build estimate for similar outcome: 40+ hours</a:t>
             </a:r>
             <a:endParaRPr lang="en-US" sz="1800" dirty="0"/>
           </a:p>
@@ -2720,7 +2783,28 @@
                 <a:ea typeface="Arial" pitchFamily="34" charset="-122"/>
                 <a:cs typeface="Arial" pitchFamily="34" charset="-120"/>
               </a:rPr>
-              <a:t>A few days (intermittent): production hardening</a:t>
+              <a:t>Actual total to solid state: ~8 hours with intermittent refinement</a:t>
+            </a:r>
+            <a:endParaRPr lang="en-US" sz="1800" dirty="0"/>
+          </a:p>
+          <a:p>
+            <a:pPr marL="228600" indent="-228600">
+              <a:spcAft>
+                <a:spcPts val="600"/>
+              </a:spcAft>
+              <a:buSzPct val="100000"/>
+              <a:buChar char="•"/>
+            </a:pPr>
+            <a:r>
+              <a:rPr lang="en-US" sz="1800" dirty="0">
+                <a:solidFill>
+                  <a:srgbClr val="0C0C0C"/>
+                </a:solidFill>
+                <a:latin typeface="Arial" pitchFamily="34" charset="0"/>
+                <a:ea typeface="Arial" pitchFamily="34" charset="-122"/>
+                <a:cs typeface="Arial" pitchFamily="34" charset="-120"/>
+              </a:rPr>
+              <a:t>Business outcome from using the app: $300+ annual wallet upside</a:t>
             </a:r>
             <a:endParaRPr lang="en-US" sz="1800" dirty="0"/>
           </a:p>
@@ -2784,7 +2868,7 @@
                 <a:ea typeface="Arial" pitchFamily="34" charset="-122"/>
                 <a:cs typeface="Arial" pitchFamily="34" charset="-120"/>
               </a:rPr>
-              <a:t>Minutes to build, days to make it durable.</a:t>
+              <a:t>Time-to-value compression is real for both builders and end users.</a:t>
             </a:r>
             <a:endParaRPr lang="en-US" sz="1400" dirty="0"/>
           </a:p>
@@ -2956,7 +3040,7 @@
                 <a:ea typeface="Georgia" pitchFamily="34" charset="-122"/>
                 <a:cs typeface="Georgia" pitchFamily="34" charset="-120"/>
               </a:rPr>
-              <a:t>What Worked (and Why It Worked)</a:t>
+              <a:t>Where Vibecoding Breaks Down</a:t>
             </a:r>
             <a:endParaRPr lang="en-US" sz="3000" dirty="0"/>
           </a:p>
@@ -3024,7 +3108,7 @@
                 <a:ea typeface="Arial" pitchFamily="34" charset="-122"/>
                 <a:cs typeface="Arial" pitchFamily="34" charset="-120"/>
               </a:rPr>
-              <a:t>Clear technical language kept Codex on track</a:t>
+              <a:t>Dead code and legacy artifacts accumulate quickly (e.g., vestigial Mongo code)</a:t>
             </a:r>
             <a:endParaRPr lang="en-US" sz="1800" dirty="0"/>
           </a:p>
@@ -3045,7 +3129,7 @@
                 <a:ea typeface="Arial" pitchFamily="34" charset="-122"/>
                 <a:cs typeface="Arial" pitchFamily="34" charset="-120"/>
               </a:rPr>
-              <a:t>Fundamentals still mattered: CSS, Express.js, NoSQL, deployment</a:t>
+              <a:t>Complex implementation paths often need to be blocked or rewritten</a:t>
             </a:r>
             <a:endParaRPr lang="en-US" sz="1800" dirty="0"/>
           </a:p>
@@ -3066,7 +3150,7 @@
                 <a:ea typeface="Arial" pitchFamily="34" charset="-122"/>
                 <a:cs typeface="Arial" pitchFamily="34" charset="-120"/>
               </a:rPr>
-              <a:t>Treat Codex like an SDE1: fast, helpful, needs direction and review</a:t>
+              <a:t>Debug loops can waste time and increase technical debt</a:t>
             </a:r>
             <a:endParaRPr lang="en-US" sz="1800" dirty="0"/>
           </a:p>
@@ -3087,7 +3171,7 @@
                 <a:ea typeface="Arial" pitchFamily="34" charset="-122"/>
                 <a:cs typeface="Arial" pitchFamily="34" charset="-120"/>
               </a:rPr>
-              <a:t>Architecture decisions still drive extensibility (Codex makes many of them)</a:t>
+              <a:t>Front-end responsiveness and visualization quality still required manual takeover</a:t>
             </a:r>
             <a:endParaRPr lang="en-US" sz="1800" dirty="0"/>
           </a:p>
@@ -3151,7 +3235,7 @@
                 <a:ea typeface="Arial" pitchFamily="34" charset="-122"/>
                 <a:cs typeface="Arial" pitchFamily="34" charset="-120"/>
               </a:rPr>
-              <a:t>Fundamentals + clear prompts compound speed.</a:t>
+              <a:t>AI-generated code is fast code, not automatically good code.</a:t>
             </a:r>
             <a:endParaRPr lang="en-US" sz="1400" dirty="0"/>
           </a:p>
@@ -3323,7 +3407,7 @@
                 <a:ea typeface="Georgia" pitchFamily="34" charset="-122"/>
                 <a:cs typeface="Georgia" pitchFamily="34" charset="-120"/>
               </a:rPr>
-              <a:t>Why Vibecoding Alone Isn’t Production-Safe</a:t>
+              <a:t>Production Guardrails Are Non-Negotiable</a:t>
             </a:r>
             <a:endParaRPr lang="en-US" sz="3000" dirty="0"/>
           </a:p>
@@ -3391,7 +3475,7 @@
                 <a:ea typeface="Arial" pitchFamily="34" charset="-122"/>
                 <a:cs typeface="Arial" pitchFamily="34" charset="-120"/>
               </a:rPr>
-              <a:t>No `.gitignore` by default → easy to commit `.env` secrets</a:t>
+              <a:t>Secrets and repository hygiene</a:t>
             </a:r>
             <a:endParaRPr lang="en-US" sz="1800" dirty="0"/>
           </a:p>
@@ -3412,7 +3496,7 @@
                 <a:ea typeface="Arial" pitchFamily="34" charset="-122"/>
                 <a:cs typeface="Arial" pitchFamily="34" charset="-120"/>
               </a:rPr>
-              <a:t>Codex suggested a complex deploy path; a local session was simpler</a:t>
+              <a:t>Security and API hardening</a:t>
             </a:r>
             <a:endParaRPr lang="en-US" sz="1800" dirty="0"/>
           </a:p>
@@ -3433,7 +3517,7 @@
                 <a:ea typeface="Arial" pitchFamily="34" charset="-122"/>
                 <a:cs typeface="Arial" pitchFamily="34" charset="-120"/>
               </a:rPr>
-              <a:t>Dead code + legacy artifacts (e.g., vestigial Mongo) accumulate</a:t>
+              <a:t>High availability and reliability controls</a:t>
             </a:r>
             <a:endParaRPr lang="en-US" sz="1800" dirty="0"/>
           </a:p>
@@ -3454,70 +3538,7 @@
                 <a:ea typeface="Arial" pitchFamily="34" charset="-122"/>
                 <a:cs typeface="Arial" pitchFamily="34" charset="-120"/>
               </a:rPr>
-              <a:t>Debug loops can dig deeper holes, increasing tech debt</a:t>
-            </a:r>
-            <a:endParaRPr lang="en-US" sz="1800" dirty="0"/>
-          </a:p>
-          <a:p>
-            <a:pPr marL="228600" indent="-228600">
-              <a:spcAft>
-                <a:spcPts val="600"/>
-              </a:spcAft>
-              <a:buSzPct val="100000"/>
-              <a:buChar char="•"/>
-            </a:pPr>
-            <a:r>
-              <a:rPr lang="en-US" sz="1800" dirty="0">
-                <a:solidFill>
-                  <a:srgbClr val="0C0C0C"/>
-                </a:solidFill>
-                <a:latin typeface="Arial" pitchFamily="34" charset="0"/>
-                <a:ea typeface="Arial" pitchFamily="34" charset="-122"/>
-                <a:cs typeface="Arial" pitchFamily="34" charset="-120"/>
-              </a:rPr>
-              <a:t>Secrets scanning + linting</a:t>
-            </a:r>
-            <a:endParaRPr lang="en-US" sz="1800" dirty="0"/>
-          </a:p>
-          <a:p>
-            <a:pPr marL="228600" indent="-228600">
-              <a:spcAft>
-                <a:spcPts val="600"/>
-              </a:spcAft>
-              <a:buSzPct val="100000"/>
-              <a:buChar char="•"/>
-            </a:pPr>
-            <a:r>
-              <a:rPr lang="en-US" sz="1800" dirty="0">
-                <a:solidFill>
-                  <a:srgbClr val="0C0C0C"/>
-                </a:solidFill>
-                <a:latin typeface="Arial" pitchFamily="34" charset="0"/>
-                <a:ea typeface="Arial" pitchFamily="34" charset="-122"/>
-                <a:cs typeface="Arial" pitchFamily="34" charset="-120"/>
-              </a:rPr>
-              <a:t>Minimal architecture review up front</a:t>
-            </a:r>
-            <a:endParaRPr lang="en-US" sz="1800" dirty="0"/>
-          </a:p>
-          <a:p>
-            <a:pPr marL="228600" indent="-228600">
-              <a:spcAft>
-                <a:spcPts val="600"/>
-              </a:spcAft>
-              <a:buSzPct val="100000"/>
-              <a:buChar char="•"/>
-            </a:pPr>
-            <a:r>
-              <a:rPr lang="en-US" sz="1800" dirty="0">
-                <a:solidFill>
-                  <a:srgbClr val="0C0C0C"/>
-                </a:solidFill>
-                <a:latin typeface="Arial" pitchFamily="34" charset="0"/>
-                <a:ea typeface="Arial" pitchFamily="34" charset="-122"/>
-                <a:cs typeface="Arial" pitchFamily="34" charset="-120"/>
-              </a:rPr>
-              <a:t>Explicit acceptance tests before deploy</a:t>
+              <a:t>Working model: free-form for POCs, structured step-by-step for production</a:t>
             </a:r>
             <a:endParaRPr lang="en-US" sz="1800" dirty="0"/>
           </a:p>
@@ -3581,7 +3602,7 @@
                 <a:ea typeface="Arial" pitchFamily="34" charset="-122"/>
                 <a:cs typeface="Arial" pitchFamily="34" charset="-120"/>
               </a:rPr>
-              <a:t>Without guardrails, speed becomes fragility.</a:t>
+              <a:t>Speed scales only when governance scales with it.</a:t>
             </a:r>
             <a:endParaRPr lang="en-US" sz="1400" dirty="0"/>
           </a:p>
@@ -3753,7 +3774,7 @@
                 <a:ea typeface="Georgia" pitchFamily="34" charset="-122"/>
                 <a:cs typeface="Georgia" pitchFamily="34" charset="-120"/>
               </a:rPr>
-              <a:t>Disclaimer: This Deck Was Vibecoded</a:t>
+              <a:t>Implications for PE Tech Strategy Teams</a:t>
             </a:r>
             <a:endParaRPr lang="en-US" sz="3000" dirty="0"/>
           </a:p>
@@ -3821,7 +3842,7 @@
                 <a:ea typeface="Arial" pitchFamily="34" charset="-122"/>
                 <a:cs typeface="Arial" pitchFamily="34" charset="-120"/>
               </a:rPr>
-              <a:t>Built with the same workflow as the app (Codex + light human review)</a:t>
+              <a:t>Evaluate AI code quality explicitly, not just output velocity</a:t>
             </a:r>
             <a:endParaRPr lang="en-US" sz="1800" dirty="0"/>
           </a:p>
@@ -3842,7 +3863,7 @@
                 <a:ea typeface="Arial" pitchFamily="34" charset="-122"/>
                 <a:cs typeface="Arial" pitchFamily="34" charset="-120"/>
               </a:rPr>
-              <a:t>Design iterations were prompted, generated, and refined in minutes</a:t>
+              <a:t>Developer productivity gains are real and should be quantified in value-creation plans</a:t>
             </a:r>
             <a:endParaRPr lang="en-US" sz="1800" dirty="0"/>
           </a:p>
@@ -3863,7 +3884,28 @@
                 <a:ea typeface="Arial" pitchFamily="34" charset="-122"/>
                 <a:cs typeface="Arial" pitchFamily="34" charset="-120"/>
               </a:rPr>
-              <a:t>Final structure, takeaways, and edits are still mine</a:t>
+              <a:t>Agentic workflows can push delivery toward semi-autonomous execution</a:t>
+            </a:r>
+            <a:endParaRPr lang="en-US" sz="1800" dirty="0"/>
+          </a:p>
+          <a:p>
+            <a:pPr marL="228600" indent="-228600">
+              <a:spcAft>
+                <a:spcPts val="600"/>
+              </a:spcAft>
+              <a:buSzPct val="100000"/>
+              <a:buChar char="•"/>
+            </a:pPr>
+            <a:r>
+              <a:rPr lang="en-US" sz="1800" dirty="0">
+                <a:solidFill>
+                  <a:srgbClr val="0C0C0C"/>
+                </a:solidFill>
+                <a:latin typeface="Arial" pitchFamily="34" charset="0"/>
+                <a:ea typeface="Arial" pitchFamily="34" charset="-122"/>
+                <a:cs typeface="Arial" pitchFamily="34" charset="-120"/>
+              </a:rPr>
+              <a:t>In diligence, assess AI velocity and software governance together</a:t>
             </a:r>
             <a:endParaRPr lang="en-US" sz="1800" dirty="0"/>
           </a:p>
@@ -3927,7 +3969,7 @@
                 <a:ea typeface="Arial" pitchFamily="34" charset="-122"/>
                 <a:cs typeface="Arial" pitchFamily="34" charset="-120"/>
               </a:rPr>
-              <a:t>If the deck is good, credit the human review.</a:t>
+              <a:t>The new diligence question is not "Is AI used?" but "Is it governed?"</a:t>
             </a:r>
             <a:endParaRPr lang="en-US" sz="1400" dirty="0"/>
           </a:p>
@@ -4099,7 +4141,7 @@
                 <a:ea typeface="Georgia" pitchFamily="34" charset="-122"/>
                 <a:cs typeface="Georgia" pitchFamily="34" charset="-120"/>
               </a:rPr>
-              <a:t>What I Learned About the Card / Churning Game</a:t>
+              <a:t>Disclaimer and Call to Action</a:t>
             </a:r>
             <a:endParaRPr lang="en-US" sz="3000" dirty="0"/>
           </a:p>
@@ -4167,7 +4209,7 @@
                 <a:ea typeface="Arial" pitchFamily="34" charset="-122"/>
                 <a:cs typeface="Arial" pitchFamily="34" charset="-120"/>
               </a:rPr>
-              <a:t>For NYC‑sized rent, Bilt is hard to beat on pure points value</a:t>
+              <a:t>This deck itself was vibecoded, then edited and quality-controlled by me</a:t>
             </a:r>
             <a:endParaRPr lang="en-US" sz="1800" dirty="0"/>
           </a:p>
@@ -4188,7 +4230,7 @@
                 <a:ea typeface="Arial" pitchFamily="34" charset="-122"/>
                 <a:cs typeface="Arial" pitchFamily="34" charset="-120"/>
               </a:rPr>
-              <a:t>Rent points tend to dominate the portfolio economics</a:t>
+              <a:t>The same pattern applies to delivery: rapid generation plus disciplined review</a:t>
             </a:r>
             <a:endParaRPr lang="en-US" sz="1800" dirty="0"/>
           </a:p>
@@ -4209,7 +4251,28 @@
                 <a:ea typeface="Arial" pitchFamily="34" charset="-122"/>
                 <a:cs typeface="Arial" pitchFamily="34" charset="-120"/>
               </a:rPr>
-              <a:t>The right “everyday” card matters less once rent is optimized</a:t>
+              <a:t>You do not need to be a traditional engineer to start learning this workflow</a:t>
+            </a:r>
+            <a:endParaRPr lang="en-US" sz="1800" dirty="0"/>
+          </a:p>
+          <a:p>
+            <a:pPr marL="228600" indent="-228600">
+              <a:spcAft>
+                <a:spcPts val="600"/>
+              </a:spcAft>
+              <a:buSzPct val="100000"/>
+              <a:buChar char="•"/>
+            </a:pPr>
+            <a:r>
+              <a:rPr lang="en-US" sz="1800" dirty="0">
+                <a:solidFill>
+                  <a:srgbClr val="0C0C0C"/>
+                </a:solidFill>
+                <a:latin typeface="Arial" pitchFamily="34" charset="0"/>
+                <a:ea typeface="Arial" pitchFamily="34" charset="-122"/>
+                <a:cs typeface="Arial" pitchFamily="34" charset="-120"/>
+              </a:rPr>
+              <a:t>Team ask: test Codex, Claude, or GitHub Copilot today and bring one client-relevant insight back</a:t>
             </a:r>
             <a:endParaRPr lang="en-US" sz="1800" dirty="0"/>
           </a:p>
@@ -4273,7 +4336,7 @@
                 <a:ea typeface="Arial" pitchFamily="34" charset="-122"/>
                 <a:cs typeface="Arial" pitchFamily="34" charset="-120"/>
               </a:rPr>
-              <a:t>Maxing Bilt for rent usually wins when rent is large.</a:t>
+              <a:t>Start using it now, but operate it like a professional software team.</a:t>
             </a:r>
             <a:endParaRPr lang="en-US" sz="1400" dirty="0"/>
           </a:p>

--- a/slides/deck.pptx
+++ b/slides/deck.pptx
@@ -4,6 +4,9 @@
   <p:sldMasterIdLst>
     <p:sldMasterId id="2147483648" r:id="rId1"/>
   </p:sldMasterIdLst>
+  <p:notesMasterIdLst>
+    <p:notesMasterId r:id="rId9"/>
+  </p:notesMasterIdLst>
   <p:sldIdLst>
     <p:sldId id="256" r:id="rId2"/>
     <p:sldId id="257" r:id="rId3"/>
@@ -12,11 +15,7 @@
     <p:sldId id="260" r:id="rId6"/>
     <p:sldId id="261" r:id="rId7"/>
     <p:sldId id="262" r:id="rId8"/>
-    <p:sldId id="263" r:id="rId9"/>
   </p:sldIdLst>
-  <p:notesMasterIdLst>
-    <p:notesMasterId r:id="rId10"/>
-  </p:notesMasterIdLst>
   <p:sldSz cx="12192000" cy="6858000"/>
   <p:notesSz cx="6858000" cy="12192000"/>
   <p:defaultTextStyle>
@@ -111,6 +110,11 @@
       </a:defRPr>
     </a:lvl9pPr>
   </p:defaultTextStyle>
+  <p:extLst>
+    <p:ext uri="{EFAFB233-063F-42B5-8137-9DF3F51BA10A}">
+      <p15:sldGuideLst xmlns:p15="http://schemas.microsoft.com/office/powerpoint/2012/main"/>
+    </p:ext>
+  </p:extLst>
 </p:presentation>
 </file>
 
@@ -136,234 +140,10 @@
           <a:chExt cx="0" cy="0"/>
         </a:xfrm>
       </p:grpSpPr>
-      <p:sp>
-        <p:nvSpPr>
-          <p:cNvPr id="2" name="Header Placeholder 1"/>
-          <p:cNvSpPr>
-            <a:spLocks noGrp="1"/>
-          </p:cNvSpPr>
-          <p:nvPr>
-            <p:ph type="hdr" sz="quarter"/>
-          </p:nvPr>
-        </p:nvSpPr>
-        <p:spPr>
-          <a:xfrm>
-            <a:off x="0" y="0"/>
-            <a:ext cx="2971800" cy="458788"/>
-          </a:xfrm>
-          <a:prstGeom prst="rect">
-            <a:avLst/>
-          </a:prstGeom>
-        </p:spPr>
-        <p:txBody>
-          <a:bodyPr vert="horz" lIns="91440" tIns="45720" rIns="91440" bIns="45720" rtlCol="0"/>
-          <a:lstStyle>
-            <a:lvl1pPr algn="l">
-              <a:defRPr sz="1200"/>
-            </a:lvl1pPr>
-          </a:lstStyle>
-          <a:p>
-            <a:endParaRPr lang="en-US"/>
-          </a:p>
-        </p:txBody>
-      </p:sp>
-      <p:sp>
-        <p:nvSpPr>
-          <p:cNvPr id="3" name="Date Placeholder 2"/>
-          <p:cNvSpPr>
-            <a:spLocks noGrp="1"/>
-          </p:cNvSpPr>
-          <p:nvPr>
-            <p:ph type="dt" idx="1"/>
-          </p:nvPr>
-        </p:nvSpPr>
-        <p:spPr>
-          <a:xfrm>
-            <a:off x="3884613" y="0"/>
-            <a:ext cx="2971800" cy="458788"/>
-          </a:xfrm>
-          <a:prstGeom prst="rect">
-            <a:avLst/>
-          </a:prstGeom>
-        </p:spPr>
-        <p:txBody>
-          <a:bodyPr vert="horz" lIns="91440" tIns="45720" rIns="91440" bIns="45720" rtlCol="0"/>
-          <a:lstStyle>
-            <a:lvl1pPr algn="r">
-              <a:defRPr sz="1200"/>
-            </a:lvl1pPr>
-          </a:lstStyle>
-          <a:p>
-            <a:fld id="{5282F153-3F37-0F45-9E97-73ACFA13230C}" type="datetimeFigureOut">
-              <a:rPr lang="en-US"/>
-              <a:t>7/23/19</a:t>
-            </a:fld>
-            <a:endParaRPr lang="en-US"/>
-          </a:p>
-        </p:txBody>
-      </p:sp>
-      <p:sp>
-        <p:nvSpPr>
-          <p:cNvPr id="4" name="Slide Image Placeholder 3"/>
-          <p:cNvSpPr>
-            <a:spLocks noGrp="1" noRot="1" noChangeAspect="1"/>
-          </p:cNvSpPr>
-          <p:nvPr>
-            <p:ph type="sldImg" idx="2"/>
-          </p:nvPr>
-        </p:nvSpPr>
-        <p:spPr>
-          <a:xfrm>
-            <a:off x="685800" y="1143000"/>
-            <a:ext cx="5486400" cy="3086100"/>
-          </a:xfrm>
-          <a:prstGeom prst="rect">
-            <a:avLst/>
-          </a:prstGeom>
-          <a:noFill/>
-          <a:ln w="12700">
-            <a:solidFill>
-              <a:prstClr val="black"/>
-            </a:solidFill>
-          </a:ln>
-        </p:spPr>
-        <p:txBody>
-          <a:bodyPr vert="horz" lIns="91440" tIns="45720" rIns="91440" bIns="45720" rtlCol="0" anchor="ctr"/>
-          <a:lstStyle/>
-          <a:p>
-            <a:endParaRPr lang="en-US"/>
-          </a:p>
-        </p:txBody>
-      </p:sp>
-      <p:sp>
-        <p:nvSpPr>
-          <p:cNvPr id="5" name="Notes Placeholder 4"/>
-          <p:cNvSpPr>
-            <a:spLocks noGrp="1"/>
-          </p:cNvSpPr>
-          <p:nvPr>
-            <p:ph type="body" sz="quarter" idx="3"/>
-          </p:nvPr>
-        </p:nvSpPr>
-        <p:spPr>
-          <a:xfrm>
-            <a:off x="685800" y="4400550"/>
-            <a:ext cx="5486400" cy="3600450"/>
-          </a:xfrm>
-          <a:prstGeom prst="rect">
-            <a:avLst/>
-          </a:prstGeom>
-        </p:spPr>
-        <p:txBody>
-          <a:bodyPr vert="horz" lIns="91440" tIns="45720" rIns="91440" bIns="45720" rtlCol="0"/>
-          <a:lstStyle/>
-          <a:p>
-            <a:pPr lvl="0"/>
-            <a:r>
-              <a:rPr lang="en-US"/>
-              <a:t>Click to edit Master text styles</a:t>
-            </a:r>
-          </a:p>
-          <a:p>
-            <a:pPr lvl="1"/>
-            <a:r>
-              <a:rPr lang="en-US"/>
-              <a:t>Second level</a:t>
-            </a:r>
-          </a:p>
-          <a:p>
-            <a:pPr lvl="2"/>
-            <a:r>
-              <a:rPr lang="en-US"/>
-              <a:t>Third level</a:t>
-            </a:r>
-          </a:p>
-          <a:p>
-            <a:pPr lvl="3"/>
-            <a:r>
-              <a:rPr lang="en-US"/>
-              <a:t>Fourth level</a:t>
-            </a:r>
-          </a:p>
-          <a:p>
-            <a:pPr lvl="4"/>
-            <a:r>
-              <a:rPr lang="en-US"/>
-              <a:t>Fifth level</a:t>
-            </a:r>
-          </a:p>
-        </p:txBody>
-      </p:sp>
-      <p:sp>
-        <p:nvSpPr>
-          <p:cNvPr id="6" name="Footer Placeholder 5"/>
-          <p:cNvSpPr>
-            <a:spLocks noGrp="1"/>
-          </p:cNvSpPr>
-          <p:nvPr>
-            <p:ph type="ftr" sz="quarter" idx="4"/>
-          </p:nvPr>
-        </p:nvSpPr>
-        <p:spPr>
-          <a:xfrm>
-            <a:off x="0" y="8685213"/>
-            <a:ext cx="2971800" cy="458787"/>
-          </a:xfrm>
-          <a:prstGeom prst="rect">
-            <a:avLst/>
-          </a:prstGeom>
-        </p:spPr>
-        <p:txBody>
-          <a:bodyPr vert="horz" lIns="91440" tIns="45720" rIns="91440" bIns="45720" rtlCol="0" anchor="b"/>
-          <a:lstStyle>
-            <a:lvl1pPr algn="l">
-              <a:defRPr sz="1200"/>
-            </a:lvl1pPr>
-          </a:lstStyle>
-          <a:p>
-            <a:endParaRPr lang="en-US"/>
-          </a:p>
-        </p:txBody>
-      </p:sp>
-      <p:sp>
-        <p:nvSpPr>
-          <p:cNvPr id="7" name="Slide Number Placeholder 6"/>
-          <p:cNvSpPr>
-            <a:spLocks noGrp="1"/>
-          </p:cNvSpPr>
-          <p:nvPr>
-            <p:ph type="sldNum" sz="quarter" idx="5"/>
-          </p:nvPr>
-        </p:nvSpPr>
-        <p:spPr>
-          <a:xfrm>
-            <a:off x="3884613" y="8685213"/>
-            <a:ext cx="2971800" cy="458787"/>
-          </a:xfrm>
-          <a:prstGeom prst="rect">
-            <a:avLst/>
-          </a:prstGeom>
-        </p:spPr>
-        <p:txBody>
-          <a:bodyPr vert="horz" lIns="91440" tIns="45720" rIns="91440" bIns="45720" rtlCol="0" anchor="b"/>
-          <a:lstStyle>
-            <a:lvl1pPr algn="r">
-              <a:defRPr sz="1200"/>
-            </a:lvl1pPr>
-          </a:lstStyle>
-          <a:p>
-            <a:fld id="{CE5E9CC1-C706-0F49-92D6-E571CC5EEA8F}" type="slidenum">
-              <a:rPr lang="en-US"/>
-              <a:t>‹#›</a:t>
-            </a:fld>
-            <a:endParaRPr lang="en-US"/>
-          </a:p>
-        </p:txBody>
-      </p:sp>
     </p:spTree>
     <p:extLst>
       <p:ext uri="{BB962C8B-B14F-4D97-AF65-F5344CB8AC3E}">
-        <p14:creationId xmlns:p14="http://schemas.microsoft.com/office/powerpoint/2010/main" val="1024086991"/>
+        <p14:creationId xmlns:p14="http://schemas.microsoft.com/office/powerpoint/2010/main" val="2349973945"/>
       </p:ext>
     </p:extLst>
   </p:cSld>
@@ -507,10 +287,6 @@
           <a:bodyPr/>
           <a:lstStyle/>
           <a:p>
-            <a:r>
-              <a:rPr lang="en-US" dirty="0"/>
-              <a:t/>
-            </a:r>
             <a:endParaRPr lang="en-US" dirty="0"/>
           </a:p>
         </p:txBody>
@@ -595,10 +371,6 @@
           <a:bodyPr/>
           <a:lstStyle/>
           <a:p>
-            <a:r>
-              <a:rPr lang="en-US" dirty="0"/>
-              <a:t/>
-            </a:r>
             <a:endParaRPr lang="en-US" dirty="0"/>
           </a:p>
         </p:txBody>
@@ -683,10 +455,6 @@
           <a:bodyPr/>
           <a:lstStyle/>
           <a:p>
-            <a:r>
-              <a:rPr lang="en-US" dirty="0"/>
-              <a:t/>
-            </a:r>
             <a:endParaRPr lang="en-US" dirty="0"/>
           </a:p>
         </p:txBody>
@@ -771,10 +539,6 @@
           <a:bodyPr/>
           <a:lstStyle/>
           <a:p>
-            <a:r>
-              <a:rPr lang="en-US" dirty="0"/>
-              <a:t/>
-            </a:r>
             <a:endParaRPr lang="en-US" dirty="0"/>
           </a:p>
         </p:txBody>
@@ -859,10 +623,6 @@
           <a:bodyPr/>
           <a:lstStyle/>
           <a:p>
-            <a:r>
-              <a:rPr lang="en-US" dirty="0"/>
-              <a:t/>
-            </a:r>
             <a:endParaRPr lang="en-US" dirty="0"/>
           </a:p>
         </p:txBody>
@@ -947,10 +707,6 @@
           <a:bodyPr/>
           <a:lstStyle/>
           <a:p>
-            <a:r>
-              <a:rPr lang="en-US" dirty="0"/>
-              <a:t/>
-            </a:r>
             <a:endParaRPr lang="en-US" dirty="0"/>
           </a:p>
         </p:txBody>
@@ -1035,10 +791,6 @@
           <a:bodyPr/>
           <a:lstStyle/>
           <a:p>
-            <a:r>
-              <a:rPr lang="en-US" dirty="0"/>
-              <a:t/>
-            </a:r>
             <a:endParaRPr lang="en-US" dirty="0"/>
           </a:p>
         </p:txBody>
@@ -1061,94 +813,6 @@
             <a:fld id="{F7021451-1387-4CA6-816F-3879F97B5CBC}" type="slidenum">
               <a:rPr lang="en-US"/>
               <a:t>7</a:t>
-            </a:fld>
-            <a:endParaRPr lang="en-US"/>
-          </a:p>
-        </p:txBody>
-      </p:sp>
-    </p:spTree>
-    <p:extLst>
-      <p:ext uri="{BB962C8B-B14F-4D97-AF65-F5344CB8AC3E}">
-        <p14:creationId xmlns:p14="http://schemas.microsoft.com/office/powerpoint/2010/main" val="1024086991"/>
-      </p:ext>
-    </p:extLst>
-  </p:cSld>
-  <p:clrMapOvr>
-    <a:masterClrMapping/>
-  </p:clrMapOvr>
-</p:notes>
-</file>
-
-<file path=ppt/notesSlides/notesSlide8.xml><?xml version="1.0" encoding="utf-8"?>
-<p:notes xmlns:a="http://schemas.openxmlformats.org/drawingml/2006/main" xmlns:r="http://schemas.openxmlformats.org/officeDocument/2006/relationships" xmlns:p="http://schemas.openxmlformats.org/presentationml/2006/main">
-  <p:cSld>
-    <p:spTree>
-      <p:nvGrpSpPr>
-        <p:cNvPr id="1" name=""/>
-        <p:cNvGrpSpPr/>
-        <p:nvPr/>
-      </p:nvGrpSpPr>
-      <p:grpSpPr>
-        <a:xfrm>
-          <a:off x="0" y="0"/>
-          <a:ext cx="0" cy="0"/>
-          <a:chOff x="0" y="0"/>
-          <a:chExt cx="0" cy="0"/>
-        </a:xfrm>
-      </p:grpSpPr>
-      <p:sp>
-        <p:nvSpPr>
-          <p:cNvPr id="2" name="Slide Image Placeholder 1"/>
-          <p:cNvSpPr>
-            <a:spLocks noGrp="1" noRot="1" noChangeAspect="1"/>
-          </p:cNvSpPr>
-          <p:nvPr>
-            <p:ph type="sldImg"/>
-          </p:nvPr>
-        </p:nvSpPr>
-        <p:spPr/>
-      </p:sp>
-      <p:sp>
-        <p:nvSpPr>
-          <p:cNvPr id="3" name="Notes Placeholder 2"/>
-          <p:cNvSpPr>
-            <a:spLocks noGrp="1"/>
-          </p:cNvSpPr>
-          <p:nvPr>
-            <p:ph type="body" idx="1"/>
-          </p:nvPr>
-        </p:nvSpPr>
-        <p:spPr/>
-        <p:txBody>
-          <a:bodyPr/>
-          <a:lstStyle/>
-          <a:p>
-            <a:r>
-              <a:rPr lang="en-US" dirty="0"/>
-              <a:t/>
-            </a:r>
-            <a:endParaRPr lang="en-US" dirty="0"/>
-          </a:p>
-        </p:txBody>
-      </p:sp>
-      <p:sp>
-        <p:nvSpPr>
-          <p:cNvPr id="4" name="Slide Number Placeholder 3"/>
-          <p:cNvSpPr>
-            <a:spLocks noGrp="1"/>
-          </p:cNvSpPr>
-          <p:nvPr>
-            <p:ph type="sldNum" sz="quarter" idx="10"/>
-          </p:nvPr>
-        </p:nvSpPr>
-        <p:spPr/>
-        <p:txBody>
-          <a:bodyPr/>
-          <a:lstStyle/>
-          <a:p>
-            <a:fld id="{F7021451-1387-4CA6-816F-3879F97B5CBC}" type="slidenum">
-              <a:rPr lang="en-US"/>
-              <a:t>8</a:t>
             </a:fld>
             <a:endParaRPr lang="en-US"/>
           </a:p>
@@ -1200,6 +864,11 @@
 <file path=ppt/slideMasters/slideMaster1.xml><?xml version="1.0" encoding="utf-8"?>
 <p:sldMaster xmlns:a="http://schemas.openxmlformats.org/drawingml/2006/main" xmlns:r="http://schemas.openxmlformats.org/officeDocument/2006/relationships" xmlns:p="http://schemas.openxmlformats.org/presentationml/2006/main">
   <p:cSld>
+    <p:bg>
+      <p:bgRef idx="1001">
+        <a:schemeClr val="bg1"/>
+      </p:bgRef>
+    </p:bg>
     <p:spTree>
       <p:nvGrpSpPr>
         <p:cNvPr id="1" name=""/>
@@ -1506,15 +1175,22 @@
             <a:avLst/>
           </a:prstGeom>
           <a:solidFill>
-            <a:srgbClr val="F5F5F5"/>
-          </a:solidFill>
-          <a:ln w="12700">
-            <a:solidFill>
-              <a:srgbClr val="F5F5F5"/>
-            </a:solidFill>
-            <a:prstDash val="solid"/>
-          </a:ln>
-        </p:spPr>
+            <a:srgbClr val="F5F7F8"/>
+          </a:solidFill>
+          <a:ln w="12700">
+            <a:solidFill>
+              <a:srgbClr val="F5F7F8"/>
+            </a:solidFill>
+            <a:prstDash val="solid"/>
+          </a:ln>
+        </p:spPr>
+        <p:txBody>
+          <a:bodyPr/>
+          <a:lstStyle/>
+          <a:p>
+            <a:endParaRPr lang="en-US"/>
+          </a:p>
+        </p:txBody>
       </p:sp>
       <p:sp>
         <p:nvSpPr>
@@ -1524,26 +1200,29 @@
         </p:nvSpPr>
         <p:spPr>
           <a:xfrm>
-            <a:off x="8412480" y="-548640"/>
-            <a:ext cx="3840480" cy="3840480"/>
-          </a:xfrm>
-          <a:prstGeom prst="ellipse">
-            <a:avLst/>
-          </a:prstGeom>
-          <a:solidFill>
-            <a:srgbClr val="D06965">
-              <a:alpha val="35000"/>
-            </a:srgbClr>
-          </a:solidFill>
-          <a:ln w="12700">
-            <a:solidFill>
-              <a:srgbClr val="D06965">
-                <a:alpha val="0"/>
-              </a:srgbClr>
-            </a:solidFill>
-            <a:prstDash val="solid"/>
-          </a:ln>
-        </p:spPr>
+            <a:off x="0" y="0"/>
+            <a:ext cx="12191695" cy="146304"/>
+          </a:xfrm>
+          <a:prstGeom prst="rect">
+            <a:avLst/>
+          </a:prstGeom>
+          <a:solidFill>
+            <a:srgbClr val="FD5108"/>
+          </a:solidFill>
+          <a:ln w="12700">
+            <a:solidFill>
+              <a:srgbClr val="FD5108"/>
+            </a:solidFill>
+            <a:prstDash val="solid"/>
+          </a:ln>
+        </p:spPr>
+        <p:txBody>
+          <a:bodyPr/>
+          <a:lstStyle/>
+          <a:p>
+            <a:endParaRPr lang="en-US"/>
+          </a:p>
+        </p:txBody>
       </p:sp>
       <p:sp>
         <p:nvSpPr>
@@ -1553,26 +1232,29 @@
         </p:nvSpPr>
         <p:spPr>
           <a:xfrm>
-            <a:off x="-914400" y="4663440"/>
-            <a:ext cx="4206240" cy="4206240"/>
-          </a:xfrm>
-          <a:prstGeom prst="ellipse">
-            <a:avLst/>
-          </a:prstGeom>
-          <a:solidFill>
-            <a:srgbClr val="962D27">
-              <a:alpha val="22000"/>
-            </a:srgbClr>
-          </a:solidFill>
-          <a:ln w="12700">
-            <a:solidFill>
-              <a:srgbClr val="962D27">
-                <a:alpha val="0"/>
-              </a:srgbClr>
-            </a:solidFill>
-            <a:prstDash val="solid"/>
-          </a:ln>
-        </p:spPr>
+            <a:off x="11567160" y="146304"/>
+            <a:ext cx="621792" cy="6071616"/>
+          </a:xfrm>
+          <a:prstGeom prst="rect">
+            <a:avLst/>
+          </a:prstGeom>
+          <a:solidFill>
+            <a:srgbClr val="EEEFF1"/>
+          </a:solidFill>
+          <a:ln w="12700">
+            <a:solidFill>
+              <a:srgbClr val="EEEFF1"/>
+            </a:solidFill>
+            <a:prstDash val="solid"/>
+          </a:ln>
+        </p:spPr>
+        <p:txBody>
+          <a:bodyPr/>
+          <a:lstStyle/>
+          <a:p>
+            <a:endParaRPr lang="en-US"/>
+          </a:p>
+        </p:txBody>
       </p:sp>
       <p:sp>
         <p:nvSpPr>
@@ -1582,22 +1264,29 @@
         </p:nvSpPr>
         <p:spPr>
           <a:xfrm>
-            <a:off x="0" y="0"/>
-            <a:ext cx="12191695" cy="256032"/>
-          </a:xfrm>
-          <a:prstGeom prst="rect">
-            <a:avLst/>
-          </a:prstGeom>
-          <a:solidFill>
-            <a:srgbClr val="70201D"/>
-          </a:solidFill>
-          <a:ln w="12700">
-            <a:solidFill>
-              <a:srgbClr val="70201D"/>
-            </a:solidFill>
-            <a:prstDash val="solid"/>
-          </a:ln>
-        </p:spPr>
+            <a:off x="822960" y="1261872"/>
+            <a:ext cx="73152" cy="457200"/>
+          </a:xfrm>
+          <a:prstGeom prst="rect">
+            <a:avLst/>
+          </a:prstGeom>
+          <a:solidFill>
+            <a:srgbClr val="FD5108"/>
+          </a:solidFill>
+          <a:ln w="12700">
+            <a:solidFill>
+              <a:srgbClr val="FD5108"/>
+            </a:solidFill>
+            <a:prstDash val="solid"/>
+          </a:ln>
+        </p:spPr>
+        <p:txBody>
+          <a:bodyPr/>
+          <a:lstStyle/>
+          <a:p>
+            <a:endParaRPr lang="en-US"/>
+          </a:p>
+        </p:txBody>
       </p:sp>
       <p:sp>
         <p:nvSpPr>
@@ -1607,8 +1296,8 @@
         </p:nvSpPr>
         <p:spPr>
           <a:xfrm>
-            <a:off x="822960" y="868680"/>
-            <a:ext cx="10515600" cy="4663440"/>
+            <a:off x="822960" y="914400"/>
+            <a:ext cx="7863840" cy="4480560"/>
           </a:xfrm>
           <a:prstGeom prst="rect">
             <a:avLst/>
@@ -1618,22 +1307,61 @@
           </a:solidFill>
           <a:ln w="12700">
             <a:solidFill>
-              <a:srgbClr val="E5E5E5"/>
-            </a:solidFill>
-            <a:prstDash val="solid"/>
-          </a:ln>
-        </p:spPr>
-      </p:sp>
-      <p:sp>
-        <p:nvSpPr>
-          <p:cNvPr id="7" name="Text 5"/>
-          <p:cNvSpPr/>
-          <p:nvPr/>
-        </p:nvSpPr>
-        <p:spPr>
-          <a:xfrm>
-            <a:off x="1234440" y="1371600"/>
-            <a:ext cx="9692640" cy="1463040"/>
+              <a:srgbClr val="DFE3E6"/>
+            </a:solidFill>
+            <a:prstDash val="solid"/>
+          </a:ln>
+        </p:spPr>
+        <p:txBody>
+          <a:bodyPr/>
+          <a:lstStyle/>
+          <a:p>
+            <a:endParaRPr lang="en-US"/>
+          </a:p>
+        </p:txBody>
+      </p:sp>
+      <p:sp>
+        <p:nvSpPr>
+          <p:cNvPr id="7" name="Shape 5"/>
+          <p:cNvSpPr/>
+          <p:nvPr/>
+        </p:nvSpPr>
+        <p:spPr>
+          <a:xfrm>
+            <a:off x="8869680" y="914400"/>
+            <a:ext cx="2560320" cy="4480560"/>
+          </a:xfrm>
+          <a:prstGeom prst="rect">
+            <a:avLst/>
+          </a:prstGeom>
+          <a:solidFill>
+            <a:srgbClr val="FE7C39"/>
+          </a:solidFill>
+          <a:ln w="12700">
+            <a:solidFill>
+              <a:srgbClr val="FE7C39"/>
+            </a:solidFill>
+            <a:prstDash val="solid"/>
+          </a:ln>
+        </p:spPr>
+        <p:txBody>
+          <a:bodyPr/>
+          <a:lstStyle/>
+          <a:p>
+            <a:endParaRPr lang="en-US"/>
+          </a:p>
+        </p:txBody>
+      </p:sp>
+      <p:sp>
+        <p:nvSpPr>
+          <p:cNvPr id="8" name="Text 6"/>
+          <p:cNvSpPr/>
+          <p:nvPr/>
+        </p:nvSpPr>
+        <p:spPr>
+          <a:xfrm>
+            <a:off x="1188720" y="1508760"/>
+            <a:ext cx="7223760" cy="1371600"/>
           </a:xfrm>
           <a:prstGeom prst="rect">
             <a:avLst/>
@@ -1645,34 +1373,34 @@
           <a:bodyPr wrap="square" rtlCol="0" anchor="ctr"/>
           <a:lstStyle/>
           <a:p>
-            <a:pPr indent="0" marL="0">
+            <a:pPr marL="0" indent="0">
               <a:buNone/>
             </a:pPr>
             <a:r>
-              <a:rPr lang="en-US" sz="4600" b="1" dirty="0">
+              <a:rPr lang="en-US" sz="4200" b="1" dirty="0">
                 <a:solidFill>
                   <a:srgbClr val="0C0C0C"/>
                 </a:solidFill>
-                <a:latin typeface="DM Serif Display" pitchFamily="34" charset="0"/>
-                <a:ea typeface="DM Serif Display" pitchFamily="34" charset="-122"/>
-                <a:cs typeface="DM Serif Display" pitchFamily="34" charset="-120"/>
+                <a:latin typeface="Georgia" pitchFamily="34" charset="0"/>
+                <a:ea typeface="Georgia" pitchFamily="34" charset="-122"/>
+                <a:cs typeface="Georgia" pitchFamily="34" charset="-120"/>
               </a:rPr>
               <a:t>Vibecoding in Practice</a:t>
             </a:r>
-            <a:endParaRPr lang="en-US" sz="4600" dirty="0"/>
-          </a:p>
-        </p:txBody>
-      </p:sp>
-      <p:sp>
-        <p:nvSpPr>
-          <p:cNvPr id="8" name="Text 6"/>
-          <p:cNvSpPr/>
-          <p:nvPr/>
-        </p:nvSpPr>
-        <p:spPr>
-          <a:xfrm>
-            <a:off x="1234440" y="2926080"/>
-            <a:ext cx="9326880" cy="822960"/>
+            <a:endParaRPr lang="en-US" sz="4200" dirty="0"/>
+          </a:p>
+        </p:txBody>
+      </p:sp>
+      <p:sp>
+        <p:nvSpPr>
+          <p:cNvPr id="9" name="Text 7"/>
+          <p:cNvSpPr/>
+          <p:nvPr/>
+        </p:nvSpPr>
+        <p:spPr>
+          <a:xfrm>
+            <a:off x="1188720" y="3017520"/>
+            <a:ext cx="7040880" cy="731520"/>
           </a:xfrm>
           <a:prstGeom prst="rect">
             <a:avLst/>
@@ -1684,45 +1412,62 @@
           <a:bodyPr wrap="square" rtlCol="0" anchor="ctr"/>
           <a:lstStyle/>
           <a:p>
-            <a:pPr indent="0" marL="0">
+            <a:pPr marL="0" indent="0">
               <a:buNone/>
             </a:pPr>
             <a:r>
-              <a:rPr lang="en-US" sz="2000" dirty="0">
+              <a:rPr lang="en-US" sz="1800" dirty="0">
                 <a:solidFill>
-                  <a:srgbClr val="595959"/>
+                  <a:srgbClr val="434A54"/>
                 </a:solidFill>
+                <a:latin typeface="Arial" pitchFamily="34" charset="0"/>
+                <a:ea typeface="Arial" pitchFamily="34" charset="-122"/>
+                <a:cs typeface="Arial" pitchFamily="34" charset="-120"/>
               </a:rPr>
               <a:t>Faster software creation, higher governance stakes</a:t>
             </a:r>
-            <a:endParaRPr lang="en-US" sz="2000" dirty="0"/>
-          </a:p>
-        </p:txBody>
-      </p:sp>
-      <p:sp>
-        <p:nvSpPr>
-          <p:cNvPr id="9" name="Shape 7"/>
-          <p:cNvSpPr/>
-          <p:nvPr/>
-        </p:nvSpPr>
-        <p:spPr>
-          <a:xfrm>
-            <a:off x="1234440" y="3840480"/>
-            <a:ext cx="2926080" cy="91440"/>
-          </a:xfrm>
-          <a:prstGeom prst="rect">
-            <a:avLst/>
-          </a:prstGeom>
-          <a:solidFill>
-            <a:srgbClr val="70201D"/>
-          </a:solidFill>
-          <a:ln w="12700">
-            <a:solidFill>
-              <a:srgbClr val="70201D"/>
-            </a:solidFill>
-            <a:prstDash val="solid"/>
-          </a:ln>
-        </p:spPr>
+            <a:endParaRPr lang="en-US" sz="1800" dirty="0"/>
+          </a:p>
+        </p:txBody>
+      </p:sp>
+      <p:sp>
+        <p:nvSpPr>
+          <p:cNvPr id="10" name="Text 8"/>
+          <p:cNvSpPr/>
+          <p:nvPr/>
+        </p:nvSpPr>
+        <p:spPr>
+          <a:xfrm>
+            <a:off x="1188720" y="4297680"/>
+            <a:ext cx="7132320" cy="365760"/>
+          </a:xfrm>
+          <a:prstGeom prst="rect">
+            <a:avLst/>
+          </a:prstGeom>
+          <a:noFill/>
+          <a:ln/>
+        </p:spPr>
+        <p:txBody>
+          <a:bodyPr wrap="square" rtlCol="0" anchor="ctr"/>
+          <a:lstStyle/>
+          <a:p>
+            <a:pPr marL="0" indent="0">
+              <a:buNone/>
+            </a:pPr>
+            <a:r>
+              <a:rPr lang="en-US" sz="1300" dirty="0">
+                <a:solidFill>
+                  <a:srgbClr val="6A717C"/>
+                </a:solidFill>
+                <a:latin typeface="Arial" pitchFamily="34" charset="0"/>
+                <a:ea typeface="Arial" pitchFamily="34" charset="-122"/>
+                <a:cs typeface="Arial" pitchFamily="34" charset="-120"/>
+              </a:rPr>
+              <a:t>Presenter: Sanjit Dutta   Date: Feb 2026</a:t>
+            </a:r>
+            <a:endParaRPr lang="en-US" sz="1300" dirty="0"/>
+          </a:p>
+        </p:txBody>
       </p:sp>
     </p:spTree>
   </p:cSld>
@@ -1764,15 +1509,22 @@
             <a:avLst/>
           </a:prstGeom>
           <a:solidFill>
-            <a:srgbClr val="F5F5F5"/>
-          </a:solidFill>
-          <a:ln w="12700">
-            <a:solidFill>
-              <a:srgbClr val="F5F5F5"/>
-            </a:solidFill>
-            <a:prstDash val="solid"/>
-          </a:ln>
-        </p:spPr>
+            <a:srgbClr val="F5F7F8"/>
+          </a:solidFill>
+          <a:ln w="12700">
+            <a:solidFill>
+              <a:srgbClr val="F5F7F8"/>
+            </a:solidFill>
+            <a:prstDash val="solid"/>
+          </a:ln>
+        </p:spPr>
+        <p:txBody>
+          <a:bodyPr/>
+          <a:lstStyle/>
+          <a:p>
+            <a:endParaRPr lang="en-GB"/>
+          </a:p>
+        </p:txBody>
       </p:sp>
       <p:sp>
         <p:nvSpPr>
@@ -1782,26 +1534,29 @@
         </p:nvSpPr>
         <p:spPr>
           <a:xfrm>
-            <a:off x="8412480" y="-548640"/>
-            <a:ext cx="3840480" cy="3840480"/>
-          </a:xfrm>
-          <a:prstGeom prst="ellipse">
-            <a:avLst/>
-          </a:prstGeom>
-          <a:solidFill>
-            <a:srgbClr val="D06965">
-              <a:alpha val="35000"/>
-            </a:srgbClr>
-          </a:solidFill>
-          <a:ln w="12700">
-            <a:solidFill>
-              <a:srgbClr val="D06965">
-                <a:alpha val="0"/>
-              </a:srgbClr>
-            </a:solidFill>
-            <a:prstDash val="solid"/>
-          </a:ln>
-        </p:spPr>
+            <a:off x="0" y="0"/>
+            <a:ext cx="12191695" cy="146304"/>
+          </a:xfrm>
+          <a:prstGeom prst="rect">
+            <a:avLst/>
+          </a:prstGeom>
+          <a:solidFill>
+            <a:srgbClr val="FD5108"/>
+          </a:solidFill>
+          <a:ln w="12700">
+            <a:solidFill>
+              <a:srgbClr val="FD5108"/>
+            </a:solidFill>
+            <a:prstDash val="solid"/>
+          </a:ln>
+        </p:spPr>
+        <p:txBody>
+          <a:bodyPr/>
+          <a:lstStyle/>
+          <a:p>
+            <a:endParaRPr lang="en-GB"/>
+          </a:p>
+        </p:txBody>
       </p:sp>
       <p:sp>
         <p:nvSpPr>
@@ -1811,26 +1566,29 @@
         </p:nvSpPr>
         <p:spPr>
           <a:xfrm>
-            <a:off x="-914400" y="4663440"/>
-            <a:ext cx="4206240" cy="4206240"/>
-          </a:xfrm>
-          <a:prstGeom prst="ellipse">
-            <a:avLst/>
-          </a:prstGeom>
-          <a:solidFill>
-            <a:srgbClr val="962D27">
-              <a:alpha val="22000"/>
-            </a:srgbClr>
-          </a:solidFill>
-          <a:ln w="12700">
-            <a:solidFill>
-              <a:srgbClr val="962D27">
-                <a:alpha val="0"/>
-              </a:srgbClr>
-            </a:solidFill>
-            <a:prstDash val="solid"/>
-          </a:ln>
-        </p:spPr>
+            <a:off x="11567160" y="146304"/>
+            <a:ext cx="621792" cy="6071616"/>
+          </a:xfrm>
+          <a:prstGeom prst="rect">
+            <a:avLst/>
+          </a:prstGeom>
+          <a:solidFill>
+            <a:srgbClr val="EEEFF1"/>
+          </a:solidFill>
+          <a:ln w="12700">
+            <a:solidFill>
+              <a:srgbClr val="EEEFF1"/>
+            </a:solidFill>
+            <a:prstDash val="solid"/>
+          </a:ln>
+        </p:spPr>
+        <p:txBody>
+          <a:bodyPr/>
+          <a:lstStyle/>
+          <a:p>
+            <a:endParaRPr lang="en-GB"/>
+          </a:p>
+        </p:txBody>
       </p:sp>
       <p:sp>
         <p:nvSpPr>
@@ -1840,22 +1598,29 @@
         </p:nvSpPr>
         <p:spPr>
           <a:xfrm>
-            <a:off x="0" y="0"/>
-            <a:ext cx="12191695" cy="256032"/>
-          </a:xfrm>
-          <a:prstGeom prst="rect">
-            <a:avLst/>
-          </a:prstGeom>
-          <a:solidFill>
-            <a:srgbClr val="70201D"/>
-          </a:solidFill>
-          <a:ln w="12700">
-            <a:solidFill>
-              <a:srgbClr val="70201D"/>
-            </a:solidFill>
-            <a:prstDash val="solid"/>
-          </a:ln>
-        </p:spPr>
+            <a:off x="822960" y="1261872"/>
+            <a:ext cx="73152" cy="457200"/>
+          </a:xfrm>
+          <a:prstGeom prst="rect">
+            <a:avLst/>
+          </a:prstGeom>
+          <a:solidFill>
+            <a:srgbClr val="FD5108"/>
+          </a:solidFill>
+          <a:ln w="12700">
+            <a:solidFill>
+              <a:srgbClr val="FD5108"/>
+            </a:solidFill>
+            <a:prstDash val="solid"/>
+          </a:ln>
+        </p:spPr>
+        <p:txBody>
+          <a:bodyPr/>
+          <a:lstStyle/>
+          <a:p>
+            <a:endParaRPr lang="en-GB"/>
+          </a:p>
+        </p:txBody>
       </p:sp>
       <p:sp>
         <p:nvSpPr>
@@ -1865,8 +1630,8 @@
         </p:nvSpPr>
         <p:spPr>
           <a:xfrm>
-            <a:off x="822960" y="548640"/>
-            <a:ext cx="10789920" cy="548640"/>
+            <a:off x="822960" y="438912"/>
+            <a:ext cx="5486400" cy="228600"/>
           </a:xfrm>
           <a:prstGeom prst="rect">
             <a:avLst/>
@@ -1878,7 +1643,46 @@
           <a:bodyPr wrap="square" rtlCol="0" anchor="ctr"/>
           <a:lstStyle/>
           <a:p>
-            <a:pPr indent="0" marL="0">
+            <a:pPr marL="0" indent="0">
+              <a:buNone/>
+            </a:pPr>
+            <a:r>
+              <a:rPr lang="en-US" sz="1000" b="1" dirty="0">
+                <a:solidFill>
+                  <a:srgbClr val="6A717C"/>
+                </a:solidFill>
+                <a:latin typeface="Arial" pitchFamily="34" charset="0"/>
+                <a:ea typeface="Arial" pitchFamily="34" charset="-122"/>
+                <a:cs typeface="Arial" pitchFamily="34" charset="-120"/>
+              </a:rPr>
+              <a:t>CONTEXT</a:t>
+            </a:r>
+            <a:endParaRPr lang="en-US" sz="1000" dirty="0"/>
+          </a:p>
+        </p:txBody>
+      </p:sp>
+      <p:sp>
+        <p:nvSpPr>
+          <p:cNvPr id="7" name="Text 5"/>
+          <p:cNvSpPr/>
+          <p:nvPr/>
+        </p:nvSpPr>
+        <p:spPr>
+          <a:xfrm>
+            <a:off x="822960" y="658368"/>
+            <a:ext cx="10789920" cy="594360"/>
+          </a:xfrm>
+          <a:prstGeom prst="rect">
+            <a:avLst/>
+          </a:prstGeom>
+          <a:noFill/>
+          <a:ln/>
+        </p:spPr>
+        <p:txBody>
+          <a:bodyPr wrap="square" rtlCol="0" anchor="ctr"/>
+          <a:lstStyle/>
+          <a:p>
+            <a:pPr marL="0" indent="0">
               <a:buNone/>
             </a:pPr>
             <a:r>
@@ -1890,7 +1694,7 @@
                 <a:ea typeface="Georgia" pitchFamily="34" charset="-122"/>
                 <a:cs typeface="Georgia" pitchFamily="34" charset="-120"/>
               </a:rPr>
-              <a:t>Vibecoding Changed What I Can Build</a:t>
+              <a:t>The Problem and the Product</a:t>
             </a:r>
             <a:endParaRPr lang="en-US" sz="3000" dirty="0"/>
           </a:p>
@@ -1898,14 +1702,14 @@
       </p:sp>
       <p:sp>
         <p:nvSpPr>
-          <p:cNvPr id="7" name="Shape 5"/>
-          <p:cNvSpPr/>
-          <p:nvPr/>
-        </p:nvSpPr>
-        <p:spPr>
-          <a:xfrm>
-            <a:off x="822960" y="1097280"/>
-            <a:ext cx="6400800" cy="5120640"/>
+          <p:cNvPr id="8" name="Shape 6"/>
+          <p:cNvSpPr/>
+          <p:nvPr/>
+        </p:nvSpPr>
+        <p:spPr>
+          <a:xfrm>
+            <a:off x="822960" y="1234440"/>
+            <a:ext cx="5215129" cy="4800600"/>
           </a:xfrm>
           <a:prstGeom prst="rect">
             <a:avLst/>
@@ -1915,22 +1719,29 @@
           </a:solidFill>
           <a:ln w="12700">
             <a:solidFill>
-              <a:srgbClr val="E5E5E5"/>
-            </a:solidFill>
-            <a:prstDash val="solid"/>
-          </a:ln>
-        </p:spPr>
-      </p:sp>
-      <p:sp>
-        <p:nvSpPr>
-          <p:cNvPr id="8" name="Text 6"/>
-          <p:cNvSpPr/>
-          <p:nvPr/>
-        </p:nvSpPr>
-        <p:spPr>
-          <a:xfrm>
-            <a:off x="1097280" y="1463040"/>
-            <a:ext cx="5669280" cy="4572000"/>
+              <a:srgbClr val="DFE3E6"/>
+            </a:solidFill>
+            <a:prstDash val="solid"/>
+          </a:ln>
+        </p:spPr>
+        <p:txBody>
+          <a:bodyPr/>
+          <a:lstStyle/>
+          <a:p>
+            <a:endParaRPr lang="en-GB"/>
+          </a:p>
+        </p:txBody>
+      </p:sp>
+      <p:sp>
+        <p:nvSpPr>
+          <p:cNvPr id="9" name="Text 7"/>
+          <p:cNvSpPr/>
+          <p:nvPr/>
+        </p:nvSpPr>
+        <p:spPr>
+          <a:xfrm>
+            <a:off x="1051560" y="1600200"/>
+            <a:ext cx="4986529" cy="4206240"/>
           </a:xfrm>
           <a:prstGeom prst="rect">
             <a:avLst/>
@@ -1944,13 +1755,13 @@
           <a:p>
             <a:pPr marL="228600" indent="-228600">
               <a:spcAft>
-                <a:spcPts val="600"/>
+                <a:spcPts val="800"/>
               </a:spcAft>
               <a:buSzPct val="100000"/>
               <a:buChar char="•"/>
             </a:pPr>
             <a:r>
-              <a:rPr lang="en-US" sz="1800" dirty="0">
+              <a:rPr lang="en-US" sz="1600" dirty="0">
                 <a:solidFill>
                   <a:srgbClr val="0C0C0C"/>
                 </a:solidFill>
@@ -1958,20 +1769,20 @@
                 <a:ea typeface="Arial" pitchFamily="34" charset="-122"/>
                 <a:cs typeface="Arial" pitchFamily="34" charset="-120"/>
               </a:rPr>
-              <a:t>Vibecoding turned a structured logic problem into working software, fast</a:t>
+              <a:t>Rewards program changes made my wallet strategy obsolete</a:t>
             </a:r>
-            <a:endParaRPr lang="en-US" sz="1800" dirty="0"/>
+            <a:endParaRPr lang="en-US" sz="1600" dirty="0"/>
           </a:p>
           <a:p>
             <a:pPr marL="228600" indent="-228600">
               <a:spcAft>
-                <a:spcPts val="600"/>
+                <a:spcPts val="800"/>
               </a:spcAft>
               <a:buSzPct val="100000"/>
               <a:buChar char="•"/>
             </a:pPr>
             <a:r>
-              <a:rPr lang="en-US" sz="1800" dirty="0">
+              <a:rPr lang="en-US" sz="1600" dirty="0">
                 <a:solidFill>
                   <a:srgbClr val="0C0C0C"/>
                 </a:solidFill>
@@ -1979,20 +1790,20 @@
                 <a:ea typeface="Arial" pitchFamily="34" charset="-122"/>
                 <a:cs typeface="Arial" pitchFamily="34" charset="-120"/>
               </a:rPr>
-              <a:t>This is materially different from brainstorming in ChatGPT</a:t>
+              <a:t>I built a tool to test card portfolio setups and spend-routing scenarios</a:t>
             </a:r>
-            <a:endParaRPr lang="en-US" sz="1800" dirty="0"/>
+            <a:endParaRPr lang="en-US" sz="1600" dirty="0"/>
           </a:p>
           <a:p>
             <a:pPr marL="228600" indent="-228600">
               <a:spcAft>
-                <a:spcPts val="600"/>
+                <a:spcPts val="800"/>
               </a:spcAft>
               <a:buSzPct val="100000"/>
               <a:buChar char="•"/>
             </a:pPr>
             <a:r>
-              <a:rPr lang="en-US" sz="1800" dirty="0">
+              <a:rPr lang="en-US" sz="1600" dirty="0">
                 <a:solidFill>
                   <a:srgbClr val="0C0C0C"/>
                 </a:solidFill>
@@ -2000,47 +1811,152 @@
                 <a:ea typeface="Arial" pitchFamily="34" charset="-122"/>
                 <a:cs typeface="Arial" pitchFamily="34" charset="-120"/>
               </a:rPr>
-              <a:t>Extrapolation: many software ideas that were too slow to build are now viable</a:t>
+              <a:t>The app stores inputs locally so users can iterate and compare over time</a:t>
             </a:r>
-            <a:endParaRPr lang="en-US" sz="1800" dirty="0"/>
-          </a:p>
-        </p:txBody>
-      </p:sp>
-      <p:sp>
-        <p:nvSpPr>
-          <p:cNvPr id="9" name="Shape 7"/>
-          <p:cNvSpPr/>
-          <p:nvPr/>
-        </p:nvSpPr>
-        <p:spPr>
-          <a:xfrm>
-            <a:off x="0" y="6217920"/>
-            <a:ext cx="12191695" cy="640080"/>
-          </a:xfrm>
-          <a:prstGeom prst="rect">
-            <a:avLst/>
-          </a:prstGeom>
-          <a:solidFill>
-            <a:srgbClr val="70201D"/>
-          </a:solidFill>
-          <a:ln w="12700">
-            <a:solidFill>
-              <a:srgbClr val="70201D"/>
-            </a:solidFill>
-            <a:prstDash val="solid"/>
-          </a:ln>
-        </p:spPr>
-      </p:sp>
-      <p:sp>
-        <p:nvSpPr>
-          <p:cNvPr id="10" name="Text 8"/>
-          <p:cNvSpPr/>
-          <p:nvPr/>
-        </p:nvSpPr>
-        <p:spPr>
-          <a:xfrm>
-            <a:off x="731520" y="6327648"/>
-            <a:ext cx="10789920" cy="365760"/>
+            <a:endParaRPr lang="en-US" sz="1600" dirty="0"/>
+          </a:p>
+          <a:p>
+            <a:pPr marL="228600" indent="-228600">
+              <a:spcAft>
+                <a:spcPts val="800"/>
+              </a:spcAft>
+              <a:buSzPct val="100000"/>
+              <a:buChar char="•"/>
+            </a:pPr>
+            <a:r>
+              <a:rPr lang="en-US" sz="1600" dirty="0">
+                <a:solidFill>
+                  <a:srgbClr val="0C0C0C"/>
+                </a:solidFill>
+                <a:latin typeface="Arial" pitchFamily="34" charset="0"/>
+                <a:ea typeface="Arial" pitchFamily="34" charset="-122"/>
+                <a:cs typeface="Arial" pitchFamily="34" charset="-120"/>
+              </a:rPr>
+              <a:t>Demo link: https://lnkd.in/ew2dtgms</a:t>
+            </a:r>
+            <a:endParaRPr lang="en-US" sz="1600" dirty="0"/>
+          </a:p>
+          <a:p>
+            <a:pPr marL="228600" indent="-228600">
+              <a:spcAft>
+                <a:spcPts val="800"/>
+              </a:spcAft>
+              <a:buSzPct val="100000"/>
+              <a:buChar char="•"/>
+            </a:pPr>
+            <a:r>
+              <a:rPr lang="en-US" sz="1600" dirty="0">
+                <a:solidFill>
+                  <a:srgbClr val="0C0C0C"/>
+                </a:solidFill>
+                <a:latin typeface="Arial" pitchFamily="34" charset="0"/>
+                <a:ea typeface="Arial" pitchFamily="34" charset="-122"/>
+                <a:cs typeface="Arial" pitchFamily="34" charset="-120"/>
+              </a:rPr>
+              <a:t>Repo for bugs: https://lnkd.in/ejAyzACp</a:t>
+            </a:r>
+            <a:endParaRPr lang="en-US" sz="1600" dirty="0"/>
+          </a:p>
+        </p:txBody>
+      </p:sp>
+      <p:sp>
+        <p:nvSpPr>
+          <p:cNvPr id="10" name="Shape 8"/>
+          <p:cNvSpPr/>
+          <p:nvPr/>
+        </p:nvSpPr>
+        <p:spPr>
+          <a:xfrm>
+            <a:off x="6153912" y="1234440"/>
+            <a:ext cx="5184648" cy="4800600"/>
+          </a:xfrm>
+          <a:prstGeom prst="rect">
+            <a:avLst/>
+          </a:prstGeom>
+          <a:solidFill>
+            <a:srgbClr val="FFFFFF"/>
+          </a:solidFill>
+          <a:ln w="12700">
+            <a:solidFill>
+              <a:srgbClr val="DFE3E6"/>
+            </a:solidFill>
+            <a:prstDash val="solid"/>
+          </a:ln>
+        </p:spPr>
+        <p:txBody>
+          <a:bodyPr/>
+          <a:lstStyle/>
+          <a:p>
+            <a:endParaRPr lang="en-GB"/>
+          </a:p>
+        </p:txBody>
+      </p:sp>
+      <p:pic>
+        <p:nvPicPr>
+          <p:cNvPr id="11" name="Image 0" descr="/Users/sdutta406/Repositories/whats-in-your-wallet/slides/assets/demo-screenshot.png"/>
+          <p:cNvPicPr>
+            <a:picLocks noChangeAspect="1"/>
+          </p:cNvPicPr>
+          <p:nvPr/>
+        </p:nvPicPr>
+        <p:blipFill>
+          <a:blip r:embed="rId3"/>
+          <a:stretch>
+            <a:fillRect/>
+          </a:stretch>
+        </p:blipFill>
+        <p:spPr>
+          <a:xfrm>
+            <a:off x="6153912" y="1481328"/>
+            <a:ext cx="5001768" cy="4343400"/>
+          </a:xfrm>
+          <a:prstGeom prst="rect">
+            <a:avLst/>
+          </a:prstGeom>
+        </p:spPr>
+      </p:pic>
+      <p:sp>
+        <p:nvSpPr>
+          <p:cNvPr id="12" name="Shape 9"/>
+          <p:cNvSpPr/>
+          <p:nvPr/>
+        </p:nvSpPr>
+        <p:spPr>
+          <a:xfrm>
+            <a:off x="822960" y="6217920"/>
+            <a:ext cx="10515600" cy="566928"/>
+          </a:xfrm>
+          <a:prstGeom prst="rect">
+            <a:avLst/>
+          </a:prstGeom>
+          <a:solidFill>
+            <a:srgbClr val="FD5108"/>
+          </a:solidFill>
+          <a:ln w="12700">
+            <a:solidFill>
+              <a:srgbClr val="FD5108"/>
+            </a:solidFill>
+            <a:prstDash val="solid"/>
+          </a:ln>
+        </p:spPr>
+        <p:txBody>
+          <a:bodyPr/>
+          <a:lstStyle/>
+          <a:p>
+            <a:endParaRPr lang="en-GB"/>
+          </a:p>
+        </p:txBody>
+      </p:sp>
+      <p:sp>
+        <p:nvSpPr>
+          <p:cNvPr id="13" name="Text 10"/>
+          <p:cNvSpPr/>
+          <p:nvPr/>
+        </p:nvSpPr>
+        <p:spPr>
+          <a:xfrm>
+            <a:off x="1051560" y="6373368"/>
+            <a:ext cx="10058400" cy="320040"/>
           </a:xfrm>
           <a:prstGeom prst="rect">
             <a:avLst/>
@@ -2052,11 +1968,11 @@
           <a:bodyPr wrap="square" rtlCol="0" anchor="ctr"/>
           <a:lstStyle/>
           <a:p>
-            <a:pPr indent="0" marL="0">
+            <a:pPr marL="0" indent="0">
               <a:buNone/>
             </a:pPr>
             <a:r>
-              <a:rPr lang="en-US" sz="1400" b="1" dirty="0">
+              <a:rPr lang="en-US" sz="1300" b="1" dirty="0">
                 <a:solidFill>
                   <a:srgbClr val="FFFFFF"/>
                 </a:solidFill>
@@ -2064,9 +1980,9 @@
                 <a:ea typeface="Arial" pitchFamily="34" charset="-122"/>
                 <a:cs typeface="Arial" pitchFamily="34" charset="-120"/>
               </a:rPr>
-              <a:t>Vibecoding lowers the activation energy of software creation.</a:t>
+              <a:t>Real user pain can now be translated into software in a single session.</a:t>
             </a:r>
-            <a:endParaRPr lang="en-US" sz="1400" dirty="0"/>
+            <a:endParaRPr lang="en-US" sz="1300" dirty="0"/>
           </a:p>
         </p:txBody>
       </p:sp>
@@ -2110,15 +2026,22 @@
             <a:avLst/>
           </a:prstGeom>
           <a:solidFill>
-            <a:srgbClr val="F5F5F5"/>
-          </a:solidFill>
-          <a:ln w="12700">
-            <a:solidFill>
-              <a:srgbClr val="F5F5F5"/>
-            </a:solidFill>
-            <a:prstDash val="solid"/>
-          </a:ln>
-        </p:spPr>
+            <a:srgbClr val="F5F7F8"/>
+          </a:solidFill>
+          <a:ln w="12700">
+            <a:solidFill>
+              <a:srgbClr val="F5F7F8"/>
+            </a:solidFill>
+            <a:prstDash val="solid"/>
+          </a:ln>
+        </p:spPr>
+        <p:txBody>
+          <a:bodyPr/>
+          <a:lstStyle/>
+          <a:p>
+            <a:endParaRPr lang="en-GB"/>
+          </a:p>
+        </p:txBody>
       </p:sp>
       <p:sp>
         <p:nvSpPr>
@@ -2128,26 +2051,29 @@
         </p:nvSpPr>
         <p:spPr>
           <a:xfrm>
-            <a:off x="8412480" y="-548640"/>
-            <a:ext cx="3840480" cy="3840480"/>
-          </a:xfrm>
-          <a:prstGeom prst="ellipse">
-            <a:avLst/>
-          </a:prstGeom>
-          <a:solidFill>
-            <a:srgbClr val="D06965">
-              <a:alpha val="35000"/>
-            </a:srgbClr>
-          </a:solidFill>
-          <a:ln w="12700">
-            <a:solidFill>
-              <a:srgbClr val="D06965">
-                <a:alpha val="0"/>
-              </a:srgbClr>
-            </a:solidFill>
-            <a:prstDash val="solid"/>
-          </a:ln>
-        </p:spPr>
+            <a:off x="0" y="0"/>
+            <a:ext cx="12191695" cy="146304"/>
+          </a:xfrm>
+          <a:prstGeom prst="rect">
+            <a:avLst/>
+          </a:prstGeom>
+          <a:solidFill>
+            <a:srgbClr val="FD5108"/>
+          </a:solidFill>
+          <a:ln w="12700">
+            <a:solidFill>
+              <a:srgbClr val="FD5108"/>
+            </a:solidFill>
+            <a:prstDash val="solid"/>
+          </a:ln>
+        </p:spPr>
+        <p:txBody>
+          <a:bodyPr/>
+          <a:lstStyle/>
+          <a:p>
+            <a:endParaRPr lang="en-GB"/>
+          </a:p>
+        </p:txBody>
       </p:sp>
       <p:sp>
         <p:nvSpPr>
@@ -2157,26 +2083,29 @@
         </p:nvSpPr>
         <p:spPr>
           <a:xfrm>
-            <a:off x="-914400" y="4663440"/>
-            <a:ext cx="4206240" cy="4206240"/>
-          </a:xfrm>
-          <a:prstGeom prst="ellipse">
-            <a:avLst/>
-          </a:prstGeom>
-          <a:solidFill>
-            <a:srgbClr val="962D27">
-              <a:alpha val="22000"/>
-            </a:srgbClr>
-          </a:solidFill>
-          <a:ln w="12700">
-            <a:solidFill>
-              <a:srgbClr val="962D27">
-                <a:alpha val="0"/>
-              </a:srgbClr>
-            </a:solidFill>
-            <a:prstDash val="solid"/>
-          </a:ln>
-        </p:spPr>
+            <a:off x="11567160" y="146304"/>
+            <a:ext cx="621792" cy="6071616"/>
+          </a:xfrm>
+          <a:prstGeom prst="rect">
+            <a:avLst/>
+          </a:prstGeom>
+          <a:solidFill>
+            <a:srgbClr val="EEEFF1"/>
+          </a:solidFill>
+          <a:ln w="12700">
+            <a:solidFill>
+              <a:srgbClr val="EEEFF1"/>
+            </a:solidFill>
+            <a:prstDash val="solid"/>
+          </a:ln>
+        </p:spPr>
+        <p:txBody>
+          <a:bodyPr/>
+          <a:lstStyle/>
+          <a:p>
+            <a:endParaRPr lang="en-GB"/>
+          </a:p>
+        </p:txBody>
       </p:sp>
       <p:sp>
         <p:nvSpPr>
@@ -2186,22 +2115,29 @@
         </p:nvSpPr>
         <p:spPr>
           <a:xfrm>
-            <a:off x="0" y="0"/>
-            <a:ext cx="12191695" cy="256032"/>
-          </a:xfrm>
-          <a:prstGeom prst="rect">
-            <a:avLst/>
-          </a:prstGeom>
-          <a:solidFill>
-            <a:srgbClr val="70201D"/>
-          </a:solidFill>
-          <a:ln w="12700">
-            <a:solidFill>
-              <a:srgbClr val="70201D"/>
-            </a:solidFill>
-            <a:prstDash val="solid"/>
-          </a:ln>
-        </p:spPr>
+            <a:off x="822960" y="1261872"/>
+            <a:ext cx="73152" cy="457200"/>
+          </a:xfrm>
+          <a:prstGeom prst="rect">
+            <a:avLst/>
+          </a:prstGeom>
+          <a:solidFill>
+            <a:srgbClr val="FD5108"/>
+          </a:solidFill>
+          <a:ln w="12700">
+            <a:solidFill>
+              <a:srgbClr val="FD5108"/>
+            </a:solidFill>
+            <a:prstDash val="solid"/>
+          </a:ln>
+        </p:spPr>
+        <p:txBody>
+          <a:bodyPr/>
+          <a:lstStyle/>
+          <a:p>
+            <a:endParaRPr lang="en-GB"/>
+          </a:p>
+        </p:txBody>
       </p:sp>
       <p:sp>
         <p:nvSpPr>
@@ -2211,8 +2147,8 @@
         </p:nvSpPr>
         <p:spPr>
           <a:xfrm>
-            <a:off x="822960" y="548640"/>
-            <a:ext cx="10789920" cy="548640"/>
+            <a:off x="822960" y="438912"/>
+            <a:ext cx="5486400" cy="228600"/>
           </a:xfrm>
           <a:prstGeom prst="rect">
             <a:avLst/>
@@ -2224,7 +2160,46 @@
           <a:bodyPr wrap="square" rtlCol="0" anchor="ctr"/>
           <a:lstStyle/>
           <a:p>
-            <a:pPr indent="0" marL="0">
+            <a:pPr marL="0" indent="0">
+              <a:buNone/>
+            </a:pPr>
+            <a:r>
+              <a:rPr lang="en-US" sz="1000" b="1" dirty="0">
+                <a:solidFill>
+                  <a:srgbClr val="6A717C"/>
+                </a:solidFill>
+                <a:latin typeface="Arial" pitchFamily="34" charset="0"/>
+                <a:ea typeface="Arial" pitchFamily="34" charset="-122"/>
+                <a:cs typeface="Arial" pitchFamily="34" charset="-120"/>
+              </a:rPr>
+              <a:t>PROOF POINTS</a:t>
+            </a:r>
+            <a:endParaRPr lang="en-US" sz="1000" dirty="0"/>
+          </a:p>
+        </p:txBody>
+      </p:sp>
+      <p:sp>
+        <p:nvSpPr>
+          <p:cNvPr id="7" name="Text 5"/>
+          <p:cNvSpPr/>
+          <p:nvPr/>
+        </p:nvSpPr>
+        <p:spPr>
+          <a:xfrm>
+            <a:off x="822960" y="658368"/>
+            <a:ext cx="10789920" cy="594360"/>
+          </a:xfrm>
+          <a:prstGeom prst="rect">
+            <a:avLst/>
+          </a:prstGeom>
+          <a:noFill/>
+          <a:ln/>
+        </p:spPr>
+        <p:txBody>
+          <a:bodyPr wrap="square" rtlCol="0" anchor="ctr"/>
+          <a:lstStyle/>
+          <a:p>
+            <a:pPr marL="0" indent="0">
               <a:buNone/>
             </a:pPr>
             <a:r>
@@ -2236,7 +2211,7 @@
                 <a:ea typeface="Georgia" pitchFamily="34" charset="-122"/>
                 <a:cs typeface="Georgia" pitchFamily="34" charset="-120"/>
               </a:rPr>
-              <a:t>The Problem and the Product</a:t>
+              <a:t>Proof That This Is Real</a:t>
             </a:r>
             <a:endParaRPr lang="en-US" sz="3000" dirty="0"/>
           </a:p>
@@ -2244,39 +2219,80 @@
       </p:sp>
       <p:sp>
         <p:nvSpPr>
-          <p:cNvPr id="7" name="Shape 5"/>
-          <p:cNvSpPr/>
-          <p:nvPr/>
-        </p:nvSpPr>
-        <p:spPr>
-          <a:xfrm>
-            <a:off x="822960" y="1097280"/>
-            <a:ext cx="6400800" cy="5120640"/>
-          </a:xfrm>
-          <a:prstGeom prst="rect">
-            <a:avLst/>
+          <p:cNvPr id="8" name="Shape 6"/>
+          <p:cNvSpPr/>
+          <p:nvPr/>
+        </p:nvSpPr>
+        <p:spPr>
+          <a:xfrm>
+            <a:off x="868680" y="1417320"/>
+            <a:ext cx="5212080" cy="1965960"/>
+          </a:xfrm>
+          <a:prstGeom prst="roundRect">
+            <a:avLst>
+              <a:gd name="adj" fmla="val 2791"/>
+            </a:avLst>
           </a:prstGeom>
           <a:solidFill>
             <a:srgbClr val="FFFFFF"/>
           </a:solidFill>
           <a:ln w="12700">
             <a:solidFill>
-              <a:srgbClr val="E5E5E5"/>
-            </a:solidFill>
-            <a:prstDash val="solid"/>
-          </a:ln>
-        </p:spPr>
-      </p:sp>
-      <p:sp>
-        <p:nvSpPr>
-          <p:cNvPr id="8" name="Text 6"/>
-          <p:cNvSpPr/>
-          <p:nvPr/>
-        </p:nvSpPr>
-        <p:spPr>
-          <a:xfrm>
-            <a:off x="1097280" y="1463040"/>
-            <a:ext cx="5669280" cy="4572000"/>
+              <a:srgbClr val="DFE3E6"/>
+            </a:solidFill>
+            <a:prstDash val="solid"/>
+          </a:ln>
+        </p:spPr>
+        <p:txBody>
+          <a:bodyPr/>
+          <a:lstStyle/>
+          <a:p>
+            <a:endParaRPr lang="en-GB"/>
+          </a:p>
+        </p:txBody>
+      </p:sp>
+      <p:sp>
+        <p:nvSpPr>
+          <p:cNvPr id="9" name="Shape 7"/>
+          <p:cNvSpPr/>
+          <p:nvPr/>
+        </p:nvSpPr>
+        <p:spPr>
+          <a:xfrm>
+            <a:off x="1033272" y="1563624"/>
+            <a:ext cx="54864" cy="1673352"/>
+          </a:xfrm>
+          <a:prstGeom prst="rect">
+            <a:avLst/>
+          </a:prstGeom>
+          <a:solidFill>
+            <a:srgbClr val="FD5108"/>
+          </a:solidFill>
+          <a:ln w="12700">
+            <a:solidFill>
+              <a:srgbClr val="FD5108"/>
+            </a:solidFill>
+            <a:prstDash val="solid"/>
+          </a:ln>
+        </p:spPr>
+        <p:txBody>
+          <a:bodyPr/>
+          <a:lstStyle/>
+          <a:p>
+            <a:endParaRPr lang="en-GB"/>
+          </a:p>
+        </p:txBody>
+      </p:sp>
+      <p:sp>
+        <p:nvSpPr>
+          <p:cNvPr id="10" name="Text 8"/>
+          <p:cNvSpPr/>
+          <p:nvPr/>
+        </p:nvSpPr>
+        <p:spPr>
+          <a:xfrm>
+            <a:off x="1188720" y="1856232"/>
+            <a:ext cx="4709160" cy="658368"/>
           </a:xfrm>
           <a:prstGeom prst="rect">
             <a:avLst/>
@@ -2285,199 +2301,540 @@
           <a:ln/>
         </p:spPr>
         <p:txBody>
-          <a:bodyPr wrap="square" rtlCol="0" anchor="t"/>
-          <a:lstStyle/>
-          <a:p>
-            <a:pPr marL="228600" indent="-228600">
-              <a:spcAft>
-                <a:spcPts val="600"/>
-              </a:spcAft>
-              <a:buSzPct val="100000"/>
-              <a:buChar char="•"/>
+          <a:bodyPr wrap="square" rtlCol="0" anchor="ctr"/>
+          <a:lstStyle/>
+          <a:p>
+            <a:pPr marL="0" indent="0">
+              <a:buNone/>
             </a:pPr>
             <a:r>
-              <a:rPr lang="en-US" sz="1800" dirty="0">
+              <a:rPr lang="en-US" sz="2800" b="1" dirty="0">
                 <a:solidFill>
                   <a:srgbClr val="0C0C0C"/>
+                </a:solidFill>
+                <a:latin typeface="Georgia" pitchFamily="34" charset="0"/>
+                <a:ea typeface="Georgia" pitchFamily="34" charset="-122"/>
+                <a:cs typeface="Georgia" pitchFamily="34" charset="-120"/>
+              </a:rPr>
+              <a:t>10 minutes</a:t>
+            </a:r>
+            <a:endParaRPr lang="en-US" sz="2800" dirty="0"/>
+          </a:p>
+        </p:txBody>
+      </p:sp>
+      <p:sp>
+        <p:nvSpPr>
+          <p:cNvPr id="11" name="Text 9"/>
+          <p:cNvSpPr/>
+          <p:nvPr/>
+        </p:nvSpPr>
+        <p:spPr>
+          <a:xfrm>
+            <a:off x="1188720" y="2642616"/>
+            <a:ext cx="4709160" cy="457200"/>
+          </a:xfrm>
+          <a:prstGeom prst="rect">
+            <a:avLst/>
+          </a:prstGeom>
+          <a:noFill/>
+          <a:ln/>
+        </p:spPr>
+        <p:txBody>
+          <a:bodyPr wrap="square" rtlCol="0" anchor="ctr"/>
+          <a:lstStyle/>
+          <a:p>
+            <a:pPr marL="0" indent="0">
+              <a:buNone/>
+            </a:pPr>
+            <a:r>
+              <a:rPr lang="en-US" sz="1300" dirty="0">
+                <a:solidFill>
+                  <a:srgbClr val="6A717C"/>
                 </a:solidFill>
                 <a:latin typeface="Arial" pitchFamily="34" charset="0"/>
                 <a:ea typeface="Arial" pitchFamily="34" charset="-122"/>
                 <a:cs typeface="Arial" pitchFamily="34" charset="-120"/>
               </a:rPr>
-              <a:t>Rewards program changes made my wallet strategy obsolete</a:t>
+              <a:t>First working application</a:t>
             </a:r>
-            <a:endParaRPr lang="en-US" sz="1800" dirty="0"/>
-          </a:p>
-          <a:p>
-            <a:pPr marL="228600" indent="-228600">
-              <a:spcAft>
-                <a:spcPts val="600"/>
-              </a:spcAft>
-              <a:buSzPct val="100000"/>
-              <a:buChar char="•"/>
+            <a:endParaRPr lang="en-US" sz="1300" dirty="0"/>
+          </a:p>
+        </p:txBody>
+      </p:sp>
+      <p:sp>
+        <p:nvSpPr>
+          <p:cNvPr id="12" name="Shape 10"/>
+          <p:cNvSpPr/>
+          <p:nvPr/>
+        </p:nvSpPr>
+        <p:spPr>
+          <a:xfrm>
+            <a:off x="6675120" y="1417320"/>
+            <a:ext cx="5212080" cy="1965960"/>
+          </a:xfrm>
+          <a:prstGeom prst="roundRect">
+            <a:avLst>
+              <a:gd name="adj" fmla="val 2791"/>
+            </a:avLst>
+          </a:prstGeom>
+          <a:solidFill>
+            <a:srgbClr val="FFFFFF"/>
+          </a:solidFill>
+          <a:ln w="12700">
+            <a:solidFill>
+              <a:srgbClr val="DFE3E6"/>
+            </a:solidFill>
+            <a:prstDash val="solid"/>
+          </a:ln>
+        </p:spPr>
+        <p:txBody>
+          <a:bodyPr/>
+          <a:lstStyle/>
+          <a:p>
+            <a:endParaRPr lang="en-GB"/>
+          </a:p>
+        </p:txBody>
+      </p:sp>
+      <p:sp>
+        <p:nvSpPr>
+          <p:cNvPr id="13" name="Shape 11"/>
+          <p:cNvSpPr/>
+          <p:nvPr/>
+        </p:nvSpPr>
+        <p:spPr>
+          <a:xfrm>
+            <a:off x="6839712" y="1563624"/>
+            <a:ext cx="54864" cy="1673352"/>
+          </a:xfrm>
+          <a:prstGeom prst="rect">
+            <a:avLst/>
+          </a:prstGeom>
+          <a:solidFill>
+            <a:srgbClr val="FD5108"/>
+          </a:solidFill>
+          <a:ln w="12700">
+            <a:solidFill>
+              <a:srgbClr val="FD5108"/>
+            </a:solidFill>
+            <a:prstDash val="solid"/>
+          </a:ln>
+        </p:spPr>
+        <p:txBody>
+          <a:bodyPr/>
+          <a:lstStyle/>
+          <a:p>
+            <a:endParaRPr lang="en-GB"/>
+          </a:p>
+        </p:txBody>
+      </p:sp>
+      <p:sp>
+        <p:nvSpPr>
+          <p:cNvPr id="14" name="Text 12"/>
+          <p:cNvSpPr/>
+          <p:nvPr/>
+        </p:nvSpPr>
+        <p:spPr>
+          <a:xfrm>
+            <a:off x="6995160" y="1856232"/>
+            <a:ext cx="4709160" cy="658368"/>
+          </a:xfrm>
+          <a:prstGeom prst="rect">
+            <a:avLst/>
+          </a:prstGeom>
+          <a:noFill/>
+          <a:ln/>
+        </p:spPr>
+        <p:txBody>
+          <a:bodyPr wrap="square" rtlCol="0" anchor="ctr"/>
+          <a:lstStyle/>
+          <a:p>
+            <a:pPr marL="0" indent="0">
+              <a:buNone/>
             </a:pPr>
             <a:r>
-              <a:rPr lang="en-US" sz="1800" dirty="0">
+              <a:rPr lang="en-US" sz="2800" b="1" dirty="0">
                 <a:solidFill>
                   <a:srgbClr val="0C0C0C"/>
+                </a:solidFill>
+                <a:latin typeface="Georgia" pitchFamily="34" charset="0"/>
+                <a:ea typeface="Georgia" pitchFamily="34" charset="-122"/>
+                <a:cs typeface="Georgia" pitchFamily="34" charset="-120"/>
+              </a:rPr>
+              <a:t>40+ hours</a:t>
+            </a:r>
+            <a:endParaRPr lang="en-US" sz="2800" dirty="0"/>
+          </a:p>
+        </p:txBody>
+      </p:sp>
+      <p:sp>
+        <p:nvSpPr>
+          <p:cNvPr id="15" name="Text 13"/>
+          <p:cNvSpPr/>
+          <p:nvPr/>
+        </p:nvSpPr>
+        <p:spPr>
+          <a:xfrm>
+            <a:off x="6995160" y="2642616"/>
+            <a:ext cx="4709160" cy="457200"/>
+          </a:xfrm>
+          <a:prstGeom prst="rect">
+            <a:avLst/>
+          </a:prstGeom>
+          <a:noFill/>
+          <a:ln/>
+        </p:spPr>
+        <p:txBody>
+          <a:bodyPr wrap="square" rtlCol="0" anchor="ctr"/>
+          <a:lstStyle/>
+          <a:p>
+            <a:pPr marL="0" indent="0">
+              <a:buNone/>
+            </a:pPr>
+            <a:r>
+              <a:rPr lang="en-US" sz="1300" dirty="0">
+                <a:solidFill>
+                  <a:srgbClr val="6A717C"/>
                 </a:solidFill>
                 <a:latin typeface="Arial" pitchFamily="34" charset="0"/>
                 <a:ea typeface="Arial" pitchFamily="34" charset="-122"/>
                 <a:cs typeface="Arial" pitchFamily="34" charset="-120"/>
               </a:rPr>
-              <a:t>I built a tool to test card portfolio setups and spend-routing scenarios</a:t>
+              <a:t>Prior build estimate for similar outcome</a:t>
             </a:r>
-            <a:endParaRPr lang="en-US" sz="1800" dirty="0"/>
-          </a:p>
-          <a:p>
-            <a:pPr marL="228600" indent="-228600">
-              <a:spcAft>
-                <a:spcPts val="600"/>
-              </a:spcAft>
-              <a:buSzPct val="100000"/>
-              <a:buChar char="•"/>
+            <a:endParaRPr lang="en-US" sz="1300" dirty="0"/>
+          </a:p>
+        </p:txBody>
+      </p:sp>
+      <p:sp>
+        <p:nvSpPr>
+          <p:cNvPr id="16" name="Shape 14"/>
+          <p:cNvSpPr/>
+          <p:nvPr/>
+        </p:nvSpPr>
+        <p:spPr>
+          <a:xfrm>
+            <a:off x="868680" y="3794760"/>
+            <a:ext cx="5212080" cy="1965960"/>
+          </a:xfrm>
+          <a:prstGeom prst="roundRect">
+            <a:avLst>
+              <a:gd name="adj" fmla="val 2791"/>
+            </a:avLst>
+          </a:prstGeom>
+          <a:solidFill>
+            <a:srgbClr val="FFFFFF"/>
+          </a:solidFill>
+          <a:ln w="12700">
+            <a:solidFill>
+              <a:srgbClr val="DFE3E6"/>
+            </a:solidFill>
+            <a:prstDash val="solid"/>
+          </a:ln>
+        </p:spPr>
+        <p:txBody>
+          <a:bodyPr/>
+          <a:lstStyle/>
+          <a:p>
+            <a:endParaRPr lang="en-GB"/>
+          </a:p>
+        </p:txBody>
+      </p:sp>
+      <p:sp>
+        <p:nvSpPr>
+          <p:cNvPr id="17" name="Shape 15"/>
+          <p:cNvSpPr/>
+          <p:nvPr/>
+        </p:nvSpPr>
+        <p:spPr>
+          <a:xfrm>
+            <a:off x="1033272" y="3941064"/>
+            <a:ext cx="54864" cy="1673352"/>
+          </a:xfrm>
+          <a:prstGeom prst="rect">
+            <a:avLst/>
+          </a:prstGeom>
+          <a:solidFill>
+            <a:srgbClr val="FD5108"/>
+          </a:solidFill>
+          <a:ln w="12700">
+            <a:solidFill>
+              <a:srgbClr val="FD5108"/>
+            </a:solidFill>
+            <a:prstDash val="solid"/>
+          </a:ln>
+        </p:spPr>
+        <p:txBody>
+          <a:bodyPr/>
+          <a:lstStyle/>
+          <a:p>
+            <a:endParaRPr lang="en-GB"/>
+          </a:p>
+        </p:txBody>
+      </p:sp>
+      <p:sp>
+        <p:nvSpPr>
+          <p:cNvPr id="18" name="Text 16"/>
+          <p:cNvSpPr/>
+          <p:nvPr/>
+        </p:nvSpPr>
+        <p:spPr>
+          <a:xfrm>
+            <a:off x="1188720" y="4233672"/>
+            <a:ext cx="4709160" cy="658368"/>
+          </a:xfrm>
+          <a:prstGeom prst="rect">
+            <a:avLst/>
+          </a:prstGeom>
+          <a:noFill/>
+          <a:ln/>
+        </p:spPr>
+        <p:txBody>
+          <a:bodyPr wrap="square" rtlCol="0" anchor="ctr"/>
+          <a:lstStyle/>
+          <a:p>
+            <a:pPr marL="0" indent="0">
+              <a:buNone/>
             </a:pPr>
             <a:r>
-              <a:rPr lang="en-US" sz="1800" dirty="0">
+              <a:rPr lang="en-US" sz="2800" b="1" dirty="0">
                 <a:solidFill>
                   <a:srgbClr val="0C0C0C"/>
+                </a:solidFill>
+                <a:latin typeface="Georgia" pitchFamily="34" charset="0"/>
+                <a:ea typeface="Georgia" pitchFamily="34" charset="-122"/>
+                <a:cs typeface="Georgia" pitchFamily="34" charset="-120"/>
+              </a:rPr>
+              <a:t>~8 hours with intermittent refinement</a:t>
+            </a:r>
+            <a:endParaRPr lang="en-US" sz="2800" dirty="0"/>
+          </a:p>
+        </p:txBody>
+      </p:sp>
+      <p:sp>
+        <p:nvSpPr>
+          <p:cNvPr id="19" name="Text 17"/>
+          <p:cNvSpPr/>
+          <p:nvPr/>
+        </p:nvSpPr>
+        <p:spPr>
+          <a:xfrm>
+            <a:off x="1188720" y="5020056"/>
+            <a:ext cx="4709160" cy="457200"/>
+          </a:xfrm>
+          <a:prstGeom prst="rect">
+            <a:avLst/>
+          </a:prstGeom>
+          <a:noFill/>
+          <a:ln/>
+        </p:spPr>
+        <p:txBody>
+          <a:bodyPr wrap="square" rtlCol="0" anchor="ctr"/>
+          <a:lstStyle/>
+          <a:p>
+            <a:pPr marL="0" indent="0">
+              <a:buNone/>
+            </a:pPr>
+            <a:r>
+              <a:rPr lang="en-US" sz="1300" dirty="0">
+                <a:solidFill>
+                  <a:srgbClr val="6A717C"/>
                 </a:solidFill>
                 <a:latin typeface="Arial" pitchFamily="34" charset="0"/>
                 <a:ea typeface="Arial" pitchFamily="34" charset="-122"/>
                 <a:cs typeface="Arial" pitchFamily="34" charset="-120"/>
               </a:rPr>
-              <a:t>The app stores inputs locally so users can iterate and compare over time</a:t>
+              <a:t>Actual total to solid state</a:t>
             </a:r>
-            <a:endParaRPr lang="en-US" sz="1800" dirty="0"/>
-          </a:p>
-          <a:p>
-            <a:pPr marL="228600" indent="-228600">
-              <a:spcAft>
-                <a:spcPts val="600"/>
-              </a:spcAft>
-              <a:buSzPct val="100000"/>
-              <a:buChar char="•"/>
+            <a:endParaRPr lang="en-US" sz="1300" dirty="0"/>
+          </a:p>
+        </p:txBody>
+      </p:sp>
+      <p:sp>
+        <p:nvSpPr>
+          <p:cNvPr id="20" name="Shape 18"/>
+          <p:cNvSpPr/>
+          <p:nvPr/>
+        </p:nvSpPr>
+        <p:spPr>
+          <a:xfrm>
+            <a:off x="6675120" y="3794760"/>
+            <a:ext cx="5212080" cy="1965960"/>
+          </a:xfrm>
+          <a:prstGeom prst="roundRect">
+            <a:avLst>
+              <a:gd name="adj" fmla="val 2791"/>
+            </a:avLst>
+          </a:prstGeom>
+          <a:solidFill>
+            <a:srgbClr val="FFFFFF"/>
+          </a:solidFill>
+          <a:ln w="12700">
+            <a:solidFill>
+              <a:srgbClr val="DFE3E6"/>
+            </a:solidFill>
+            <a:prstDash val="solid"/>
+          </a:ln>
+        </p:spPr>
+        <p:txBody>
+          <a:bodyPr/>
+          <a:lstStyle/>
+          <a:p>
+            <a:endParaRPr lang="en-GB"/>
+          </a:p>
+        </p:txBody>
+      </p:sp>
+      <p:sp>
+        <p:nvSpPr>
+          <p:cNvPr id="21" name="Shape 19"/>
+          <p:cNvSpPr/>
+          <p:nvPr/>
+        </p:nvSpPr>
+        <p:spPr>
+          <a:xfrm>
+            <a:off x="6839712" y="3941064"/>
+            <a:ext cx="54864" cy="1673352"/>
+          </a:xfrm>
+          <a:prstGeom prst="rect">
+            <a:avLst/>
+          </a:prstGeom>
+          <a:solidFill>
+            <a:srgbClr val="FD5108"/>
+          </a:solidFill>
+          <a:ln w="12700">
+            <a:solidFill>
+              <a:srgbClr val="FD5108"/>
+            </a:solidFill>
+            <a:prstDash val="solid"/>
+          </a:ln>
+        </p:spPr>
+        <p:txBody>
+          <a:bodyPr/>
+          <a:lstStyle/>
+          <a:p>
+            <a:endParaRPr lang="en-GB"/>
+          </a:p>
+        </p:txBody>
+      </p:sp>
+      <p:sp>
+        <p:nvSpPr>
+          <p:cNvPr id="22" name="Text 20"/>
+          <p:cNvSpPr/>
+          <p:nvPr/>
+        </p:nvSpPr>
+        <p:spPr>
+          <a:xfrm>
+            <a:off x="6995160" y="4233672"/>
+            <a:ext cx="4709160" cy="658368"/>
+          </a:xfrm>
+          <a:prstGeom prst="rect">
+            <a:avLst/>
+          </a:prstGeom>
+          <a:noFill/>
+          <a:ln/>
+        </p:spPr>
+        <p:txBody>
+          <a:bodyPr wrap="square" rtlCol="0" anchor="ctr"/>
+          <a:lstStyle/>
+          <a:p>
+            <a:pPr marL="0" indent="0">
+              <a:buNone/>
             </a:pPr>
             <a:r>
-              <a:rPr lang="en-US" sz="1800" dirty="0">
+              <a:rPr lang="en-US" sz="2800" b="1" dirty="0">
                 <a:solidFill>
                   <a:srgbClr val="0C0C0C"/>
+                </a:solidFill>
+                <a:latin typeface="Georgia" pitchFamily="34" charset="0"/>
+                <a:ea typeface="Georgia" pitchFamily="34" charset="-122"/>
+                <a:cs typeface="Georgia" pitchFamily="34" charset="-120"/>
+              </a:rPr>
+              <a:t>$300+ annual wallet upside</a:t>
+            </a:r>
+            <a:endParaRPr lang="en-US" sz="2800" dirty="0"/>
+          </a:p>
+        </p:txBody>
+      </p:sp>
+      <p:sp>
+        <p:nvSpPr>
+          <p:cNvPr id="23" name="Text 21"/>
+          <p:cNvSpPr/>
+          <p:nvPr/>
+        </p:nvSpPr>
+        <p:spPr>
+          <a:xfrm>
+            <a:off x="6995160" y="5020056"/>
+            <a:ext cx="4709160" cy="457200"/>
+          </a:xfrm>
+          <a:prstGeom prst="rect">
+            <a:avLst/>
+          </a:prstGeom>
+          <a:noFill/>
+          <a:ln/>
+        </p:spPr>
+        <p:txBody>
+          <a:bodyPr wrap="square" rtlCol="0" anchor="ctr"/>
+          <a:lstStyle/>
+          <a:p>
+            <a:pPr marL="0" indent="0">
+              <a:buNone/>
+            </a:pPr>
+            <a:r>
+              <a:rPr lang="en-US" sz="1300" dirty="0">
+                <a:solidFill>
+                  <a:srgbClr val="6A717C"/>
                 </a:solidFill>
                 <a:latin typeface="Arial" pitchFamily="34" charset="0"/>
                 <a:ea typeface="Arial" pitchFamily="34" charset="-122"/>
                 <a:cs typeface="Arial" pitchFamily="34" charset="-120"/>
               </a:rPr>
-              <a:t>Demo link: `https://lnkd.in/ew2dtgms`</a:t>
+              <a:t>Business outcome from using the app</a:t>
             </a:r>
-            <a:endParaRPr lang="en-US" sz="1800" dirty="0"/>
-          </a:p>
-          <a:p>
-            <a:pPr marL="228600" indent="-228600">
-              <a:spcAft>
-                <a:spcPts val="600"/>
-              </a:spcAft>
-              <a:buSzPct val="100000"/>
-              <a:buChar char="•"/>
-            </a:pPr>
-            <a:r>
-              <a:rPr lang="en-US" sz="1800" dirty="0">
-                <a:solidFill>
-                  <a:srgbClr val="0C0C0C"/>
-                </a:solidFill>
-                <a:latin typeface="Arial" pitchFamily="34" charset="0"/>
-                <a:ea typeface="Arial" pitchFamily="34" charset="-122"/>
-                <a:cs typeface="Arial" pitchFamily="34" charset="-120"/>
-              </a:rPr>
-              <a:t>Repo for bugs: `https://lnkd.in/ejAyzACp`</a:t>
-            </a:r>
-            <a:endParaRPr lang="en-US" sz="1800" dirty="0"/>
-          </a:p>
-        </p:txBody>
-      </p:sp>
-      <p:sp>
-        <p:nvSpPr>
-          <p:cNvPr id="9" name="Shape 7"/>
-          <p:cNvSpPr/>
-          <p:nvPr/>
-        </p:nvSpPr>
-        <p:spPr>
-          <a:xfrm>
-            <a:off x="7498080" y="1097280"/>
-            <a:ext cx="4023360" cy="5120640"/>
-          </a:xfrm>
-          <a:prstGeom prst="rect">
-            <a:avLst/>
-          </a:prstGeom>
-          <a:solidFill>
-            <a:srgbClr val="FFFFFF"/>
-          </a:solidFill>
-          <a:ln w="12700">
-            <a:solidFill>
-              <a:srgbClr val="E5E5E5"/>
-            </a:solidFill>
-            <a:prstDash val="solid"/>
-          </a:ln>
-        </p:spPr>
-      </p:sp>
-      <p:pic>
-        <p:nvPicPr>
-          <p:cNvPr id="10" name="Image 0" descr="/Users/sdutta406/Repositories/whats-in-your-wallet/slides/assets/demo-screenshot.png">    </p:cNvPr>
-          <p:cNvPicPr>
-            <a:picLocks noChangeAspect="1"/>
-          </p:cNvPicPr>
-          <p:nvPr/>
-        </p:nvPicPr>
-        <p:blipFill>
-          <a:blip r:embed="rId1"/>
-          <a:stretch>
-            <a:fillRect/>
-          </a:stretch>
-        </p:blipFill>
-        <p:spPr>
-          <a:xfrm>
-            <a:off x="7635240" y="1325880"/>
-            <a:ext cx="3749040" cy="4663440"/>
-          </a:xfrm>
-          <a:prstGeom prst="rect">
-            <a:avLst/>
-          </a:prstGeom>
-        </p:spPr>
-      </p:pic>
-      <p:sp>
-        <p:nvSpPr>
-          <p:cNvPr id="11" name="Shape 8"/>
-          <p:cNvSpPr/>
-          <p:nvPr/>
-        </p:nvSpPr>
-        <p:spPr>
-          <a:xfrm>
-            <a:off x="0" y="6217920"/>
-            <a:ext cx="12191695" cy="640080"/>
-          </a:xfrm>
-          <a:prstGeom prst="rect">
-            <a:avLst/>
-          </a:prstGeom>
-          <a:solidFill>
-            <a:srgbClr val="70201D"/>
-          </a:solidFill>
-          <a:ln w="12700">
-            <a:solidFill>
-              <a:srgbClr val="70201D"/>
-            </a:solidFill>
-            <a:prstDash val="solid"/>
-          </a:ln>
-        </p:spPr>
-      </p:sp>
-      <p:sp>
-        <p:nvSpPr>
-          <p:cNvPr id="12" name="Text 9"/>
-          <p:cNvSpPr/>
-          <p:nvPr/>
-        </p:nvSpPr>
-        <p:spPr>
-          <a:xfrm>
-            <a:off x="731520" y="6327648"/>
-            <a:ext cx="10789920" cy="365760"/>
+            <a:endParaRPr lang="en-US" sz="1300" dirty="0"/>
+          </a:p>
+        </p:txBody>
+      </p:sp>
+      <p:sp>
+        <p:nvSpPr>
+          <p:cNvPr id="24" name="Shape 22"/>
+          <p:cNvSpPr/>
+          <p:nvPr/>
+        </p:nvSpPr>
+        <p:spPr>
+          <a:xfrm>
+            <a:off x="822960" y="6217920"/>
+            <a:ext cx="10515600" cy="566928"/>
+          </a:xfrm>
+          <a:prstGeom prst="rect">
+            <a:avLst/>
+          </a:prstGeom>
+          <a:solidFill>
+            <a:srgbClr val="FD5108"/>
+          </a:solidFill>
+          <a:ln w="12700">
+            <a:solidFill>
+              <a:srgbClr val="FD5108"/>
+            </a:solidFill>
+            <a:prstDash val="solid"/>
+          </a:ln>
+        </p:spPr>
+        <p:txBody>
+          <a:bodyPr/>
+          <a:lstStyle/>
+          <a:p>
+            <a:endParaRPr lang="en-GB"/>
+          </a:p>
+        </p:txBody>
+      </p:sp>
+      <p:sp>
+        <p:nvSpPr>
+          <p:cNvPr id="25" name="Text 23"/>
+          <p:cNvSpPr/>
+          <p:nvPr/>
+        </p:nvSpPr>
+        <p:spPr>
+          <a:xfrm>
+            <a:off x="1051560" y="6373368"/>
+            <a:ext cx="10058400" cy="320040"/>
           </a:xfrm>
           <a:prstGeom prst="rect">
             <a:avLst/>
@@ -2489,11 +2846,11 @@
           <a:bodyPr wrap="square" rtlCol="0" anchor="ctr"/>
           <a:lstStyle/>
           <a:p>
-            <a:pPr indent="0" marL="0">
+            <a:pPr marL="0" indent="0">
               <a:buNone/>
             </a:pPr>
             <a:r>
-              <a:rPr lang="en-US" sz="1400" b="1" dirty="0">
+              <a:rPr lang="en-US" sz="1300" b="1" dirty="0">
                 <a:solidFill>
                   <a:srgbClr val="FFFFFF"/>
                 </a:solidFill>
@@ -2501,9 +2858,9 @@
                 <a:ea typeface="Arial" pitchFamily="34" charset="-122"/>
                 <a:cs typeface="Arial" pitchFamily="34" charset="-120"/>
               </a:rPr>
-              <a:t>Real user pain can now be translated into software in a single session.</a:t>
+              <a:t>Time-to-value compression is real for both builders and end users.</a:t>
             </a:r>
-            <a:endParaRPr lang="en-US" sz="1400" dirty="0"/>
+            <a:endParaRPr lang="en-US" sz="1300" dirty="0"/>
           </a:p>
         </p:txBody>
       </p:sp>
@@ -2547,15 +2904,22 @@
             <a:avLst/>
           </a:prstGeom>
           <a:solidFill>
-            <a:srgbClr val="F5F5F5"/>
-          </a:solidFill>
-          <a:ln w="12700">
-            <a:solidFill>
-              <a:srgbClr val="F5F5F5"/>
-            </a:solidFill>
-            <a:prstDash val="solid"/>
-          </a:ln>
-        </p:spPr>
+            <a:srgbClr val="F5F7F8"/>
+          </a:solidFill>
+          <a:ln w="12700">
+            <a:solidFill>
+              <a:srgbClr val="F5F7F8"/>
+            </a:solidFill>
+            <a:prstDash val="solid"/>
+          </a:ln>
+        </p:spPr>
+        <p:txBody>
+          <a:bodyPr/>
+          <a:lstStyle/>
+          <a:p>
+            <a:endParaRPr lang="en-GB"/>
+          </a:p>
+        </p:txBody>
       </p:sp>
       <p:sp>
         <p:nvSpPr>
@@ -2565,26 +2929,29 @@
         </p:nvSpPr>
         <p:spPr>
           <a:xfrm>
-            <a:off x="8412480" y="-548640"/>
-            <a:ext cx="3840480" cy="3840480"/>
-          </a:xfrm>
-          <a:prstGeom prst="ellipse">
-            <a:avLst/>
-          </a:prstGeom>
-          <a:solidFill>
-            <a:srgbClr val="D06965">
-              <a:alpha val="35000"/>
-            </a:srgbClr>
-          </a:solidFill>
-          <a:ln w="12700">
-            <a:solidFill>
-              <a:srgbClr val="D06965">
-                <a:alpha val="0"/>
-              </a:srgbClr>
-            </a:solidFill>
-            <a:prstDash val="solid"/>
-          </a:ln>
-        </p:spPr>
+            <a:off x="0" y="0"/>
+            <a:ext cx="12191695" cy="146304"/>
+          </a:xfrm>
+          <a:prstGeom prst="rect">
+            <a:avLst/>
+          </a:prstGeom>
+          <a:solidFill>
+            <a:srgbClr val="FD5108"/>
+          </a:solidFill>
+          <a:ln w="12700">
+            <a:solidFill>
+              <a:srgbClr val="FD5108"/>
+            </a:solidFill>
+            <a:prstDash val="solid"/>
+          </a:ln>
+        </p:spPr>
+        <p:txBody>
+          <a:bodyPr/>
+          <a:lstStyle/>
+          <a:p>
+            <a:endParaRPr lang="en-GB"/>
+          </a:p>
+        </p:txBody>
       </p:sp>
       <p:sp>
         <p:nvSpPr>
@@ -2594,26 +2961,29 @@
         </p:nvSpPr>
         <p:spPr>
           <a:xfrm>
-            <a:off x="-914400" y="4663440"/>
-            <a:ext cx="4206240" cy="4206240"/>
-          </a:xfrm>
-          <a:prstGeom prst="ellipse">
-            <a:avLst/>
-          </a:prstGeom>
-          <a:solidFill>
-            <a:srgbClr val="962D27">
-              <a:alpha val="22000"/>
-            </a:srgbClr>
-          </a:solidFill>
-          <a:ln w="12700">
-            <a:solidFill>
-              <a:srgbClr val="962D27">
-                <a:alpha val="0"/>
-              </a:srgbClr>
-            </a:solidFill>
-            <a:prstDash val="solid"/>
-          </a:ln>
-        </p:spPr>
+            <a:off x="11567160" y="146304"/>
+            <a:ext cx="621792" cy="6071616"/>
+          </a:xfrm>
+          <a:prstGeom prst="rect">
+            <a:avLst/>
+          </a:prstGeom>
+          <a:solidFill>
+            <a:srgbClr val="EEEFF1"/>
+          </a:solidFill>
+          <a:ln w="12700">
+            <a:solidFill>
+              <a:srgbClr val="EEEFF1"/>
+            </a:solidFill>
+            <a:prstDash val="solid"/>
+          </a:ln>
+        </p:spPr>
+        <p:txBody>
+          <a:bodyPr/>
+          <a:lstStyle/>
+          <a:p>
+            <a:endParaRPr lang="en-GB"/>
+          </a:p>
+        </p:txBody>
       </p:sp>
       <p:sp>
         <p:nvSpPr>
@@ -2623,22 +2993,29 @@
         </p:nvSpPr>
         <p:spPr>
           <a:xfrm>
-            <a:off x="0" y="0"/>
-            <a:ext cx="12191695" cy="256032"/>
-          </a:xfrm>
-          <a:prstGeom prst="rect">
-            <a:avLst/>
-          </a:prstGeom>
-          <a:solidFill>
-            <a:srgbClr val="70201D"/>
-          </a:solidFill>
-          <a:ln w="12700">
-            <a:solidFill>
-              <a:srgbClr val="70201D"/>
-            </a:solidFill>
-            <a:prstDash val="solid"/>
-          </a:ln>
-        </p:spPr>
+            <a:off x="822960" y="1261872"/>
+            <a:ext cx="73152" cy="457200"/>
+          </a:xfrm>
+          <a:prstGeom prst="rect">
+            <a:avLst/>
+          </a:prstGeom>
+          <a:solidFill>
+            <a:srgbClr val="FD5108"/>
+          </a:solidFill>
+          <a:ln w="12700">
+            <a:solidFill>
+              <a:srgbClr val="FD5108"/>
+            </a:solidFill>
+            <a:prstDash val="solid"/>
+          </a:ln>
+        </p:spPr>
+        <p:txBody>
+          <a:bodyPr/>
+          <a:lstStyle/>
+          <a:p>
+            <a:endParaRPr lang="en-GB"/>
+          </a:p>
+        </p:txBody>
       </p:sp>
       <p:sp>
         <p:nvSpPr>
@@ -2648,8 +3025,8 @@
         </p:nvSpPr>
         <p:spPr>
           <a:xfrm>
-            <a:off x="822960" y="548640"/>
-            <a:ext cx="10789920" cy="548640"/>
+            <a:off x="822960" y="438912"/>
+            <a:ext cx="5486400" cy="228600"/>
           </a:xfrm>
           <a:prstGeom prst="rect">
             <a:avLst/>
@@ -2661,7 +3038,46 @@
           <a:bodyPr wrap="square" rtlCol="0" anchor="ctr"/>
           <a:lstStyle/>
           <a:p>
-            <a:pPr indent="0" marL="0">
+            <a:pPr marL="0" indent="0">
+              <a:buNone/>
+            </a:pPr>
+            <a:r>
+              <a:rPr lang="en-US" sz="1000" b="1" dirty="0">
+                <a:solidFill>
+                  <a:srgbClr val="6A717C"/>
+                </a:solidFill>
+                <a:latin typeface="Arial" pitchFamily="34" charset="0"/>
+                <a:ea typeface="Arial" pitchFamily="34" charset="-122"/>
+                <a:cs typeface="Arial" pitchFamily="34" charset="-120"/>
+              </a:rPr>
+              <a:t>FAILURE MODES</a:t>
+            </a:r>
+            <a:endParaRPr lang="en-US" sz="1000" dirty="0"/>
+          </a:p>
+        </p:txBody>
+      </p:sp>
+      <p:sp>
+        <p:nvSpPr>
+          <p:cNvPr id="7" name="Text 5"/>
+          <p:cNvSpPr/>
+          <p:nvPr/>
+        </p:nvSpPr>
+        <p:spPr>
+          <a:xfrm>
+            <a:off x="822960" y="658368"/>
+            <a:ext cx="10789920" cy="594360"/>
+          </a:xfrm>
+          <a:prstGeom prst="rect">
+            <a:avLst/>
+          </a:prstGeom>
+          <a:noFill/>
+          <a:ln/>
+        </p:spPr>
+        <p:txBody>
+          <a:bodyPr wrap="square" rtlCol="0" anchor="ctr"/>
+          <a:lstStyle/>
+          <a:p>
+            <a:pPr marL="0" indent="0">
               <a:buNone/>
             </a:pPr>
             <a:r>
@@ -2673,7 +3089,7 @@
                 <a:ea typeface="Georgia" pitchFamily="34" charset="-122"/>
                 <a:cs typeface="Georgia" pitchFamily="34" charset="-120"/>
               </a:rPr>
-              <a:t>Proof That This Is Real</a:t>
+              <a:t>Where Vibecoding Breaks Down</a:t>
             </a:r>
             <a:endParaRPr lang="en-US" sz="3000" dirty="0"/>
           </a:p>
@@ -2681,39 +3097,82 @@
       </p:sp>
       <p:sp>
         <p:nvSpPr>
-          <p:cNvPr id="7" name="Shape 5"/>
-          <p:cNvSpPr/>
-          <p:nvPr/>
-        </p:nvSpPr>
-        <p:spPr>
-          <a:xfrm>
-            <a:off x="822960" y="1097280"/>
-            <a:ext cx="6400800" cy="5120640"/>
-          </a:xfrm>
-          <a:prstGeom prst="rect">
-            <a:avLst/>
+          <p:cNvPr id="8" name="Shape 6"/>
+          <p:cNvSpPr/>
+          <p:nvPr/>
+        </p:nvSpPr>
+        <p:spPr>
+          <a:xfrm>
+            <a:off x="868680" y="1417320"/>
+            <a:ext cx="5230368" cy="2011680"/>
+          </a:xfrm>
+          <a:prstGeom prst="roundRect">
+            <a:avLst>
+              <a:gd name="adj" fmla="val 1818"/>
+            </a:avLst>
           </a:prstGeom>
           <a:solidFill>
             <a:srgbClr val="FFFFFF"/>
           </a:solidFill>
           <a:ln w="12700">
             <a:solidFill>
-              <a:srgbClr val="E5E5E5"/>
-            </a:solidFill>
-            <a:prstDash val="solid"/>
-          </a:ln>
-        </p:spPr>
-      </p:sp>
-      <p:sp>
-        <p:nvSpPr>
-          <p:cNvPr id="8" name="Text 6"/>
-          <p:cNvSpPr/>
-          <p:nvPr/>
-        </p:nvSpPr>
-        <p:spPr>
-          <a:xfrm>
-            <a:off x="1097280" y="1463040"/>
-            <a:ext cx="5669280" cy="4572000"/>
+              <a:srgbClr val="DFE3E6"/>
+            </a:solidFill>
+            <a:prstDash val="solid"/>
+          </a:ln>
+        </p:spPr>
+        <p:txBody>
+          <a:bodyPr/>
+          <a:lstStyle/>
+          <a:p>
+            <a:endParaRPr lang="en-GB"/>
+          </a:p>
+        </p:txBody>
+      </p:sp>
+      <p:sp>
+        <p:nvSpPr>
+          <p:cNvPr id="9" name="Shape 7"/>
+          <p:cNvSpPr/>
+          <p:nvPr/>
+        </p:nvSpPr>
+        <p:spPr>
+          <a:xfrm>
+            <a:off x="1097280" y="1737360"/>
+            <a:ext cx="502920" cy="502920"/>
+          </a:xfrm>
+          <a:prstGeom prst="roundRect">
+            <a:avLst>
+              <a:gd name="adj" fmla="val 14545"/>
+            </a:avLst>
+          </a:prstGeom>
+          <a:solidFill>
+            <a:srgbClr val="FFE8D4"/>
+          </a:solidFill>
+          <a:ln w="12700">
+            <a:solidFill>
+              <a:srgbClr val="FFE8D4"/>
+            </a:solidFill>
+            <a:prstDash val="solid"/>
+          </a:ln>
+        </p:spPr>
+        <p:txBody>
+          <a:bodyPr/>
+          <a:lstStyle/>
+          <a:p>
+            <a:endParaRPr lang="en-GB"/>
+          </a:p>
+        </p:txBody>
+      </p:sp>
+      <p:sp>
+        <p:nvSpPr>
+          <p:cNvPr id="10" name="Text 8"/>
+          <p:cNvSpPr/>
+          <p:nvPr/>
+        </p:nvSpPr>
+        <p:spPr>
+          <a:xfrm>
+            <a:off x="1280160" y="1764792"/>
+            <a:ext cx="182880" cy="228600"/>
           </a:xfrm>
           <a:prstGeom prst="rect">
             <a:avLst/>
@@ -2722,18 +3181,53 @@
           <a:ln/>
         </p:spPr>
         <p:txBody>
-          <a:bodyPr wrap="square" rtlCol="0" anchor="t"/>
-          <a:lstStyle/>
-          <a:p>
-            <a:pPr marL="228600" indent="-228600">
-              <a:spcAft>
-                <a:spcPts val="600"/>
-              </a:spcAft>
-              <a:buSzPct val="100000"/>
-              <a:buChar char="•"/>
+          <a:bodyPr wrap="square" rtlCol="0" anchor="ctr"/>
+          <a:lstStyle/>
+          <a:p>
+            <a:pPr marL="0" indent="0" algn="ctr">
+              <a:buNone/>
             </a:pPr>
             <a:r>
-              <a:rPr lang="en-US" sz="1800" dirty="0">
+              <a:rPr lang="en-US" sz="1600" b="1" dirty="0">
+                <a:solidFill>
+                  <a:srgbClr val="FE7C39"/>
+                </a:solidFill>
+                <a:latin typeface="Arial" pitchFamily="34" charset="0"/>
+                <a:ea typeface="Arial" pitchFamily="34" charset="-122"/>
+                <a:cs typeface="Arial" pitchFamily="34" charset="-120"/>
+              </a:rPr>
+              <a:t>!</a:t>
+            </a:r>
+            <a:endParaRPr lang="en-US" sz="1600" dirty="0"/>
+          </a:p>
+        </p:txBody>
+      </p:sp>
+      <p:sp>
+        <p:nvSpPr>
+          <p:cNvPr id="11" name="Text 9"/>
+          <p:cNvSpPr/>
+          <p:nvPr/>
+        </p:nvSpPr>
+        <p:spPr>
+          <a:xfrm>
+            <a:off x="1737360" y="1737360"/>
+            <a:ext cx="4133088" cy="1417320"/>
+          </a:xfrm>
+          <a:prstGeom prst="rect">
+            <a:avLst/>
+          </a:prstGeom>
+          <a:noFill/>
+          <a:ln/>
+        </p:spPr>
+        <p:txBody>
+          <a:bodyPr wrap="square" rtlCol="0" anchor="t"/>
+          <a:lstStyle/>
+          <a:p>
+            <a:pPr marL="0" indent="0">
+              <a:buNone/>
+            </a:pPr>
+            <a:r>
+              <a:rPr lang="en-US" sz="1400" dirty="0">
                 <a:solidFill>
                   <a:srgbClr val="0C0C0C"/>
                 </a:solidFill>
@@ -2741,20 +3235,145 @@
                 <a:ea typeface="Arial" pitchFamily="34" charset="-122"/>
                 <a:cs typeface="Arial" pitchFamily="34" charset="-120"/>
               </a:rPr>
-              <a:t>First working application: 10 minutes</a:t>
+              <a:t>Dead code and legacy artifacts accumulate quickly (e.g., vestigial Mongo code)</a:t>
             </a:r>
-            <a:endParaRPr lang="en-US" sz="1800" dirty="0"/>
-          </a:p>
-          <a:p>
-            <a:pPr marL="228600" indent="-228600">
-              <a:spcAft>
-                <a:spcPts val="600"/>
-              </a:spcAft>
-              <a:buSzPct val="100000"/>
-              <a:buChar char="•"/>
+            <a:endParaRPr lang="en-US" sz="1400" dirty="0"/>
+          </a:p>
+        </p:txBody>
+      </p:sp>
+      <p:sp>
+        <p:nvSpPr>
+          <p:cNvPr id="12" name="Shape 10"/>
+          <p:cNvSpPr/>
+          <p:nvPr/>
+        </p:nvSpPr>
+        <p:spPr>
+          <a:xfrm>
+            <a:off x="6601968" y="1417320"/>
+            <a:ext cx="5230368" cy="2011680"/>
+          </a:xfrm>
+          <a:prstGeom prst="roundRect">
+            <a:avLst>
+              <a:gd name="adj" fmla="val 1818"/>
+            </a:avLst>
+          </a:prstGeom>
+          <a:solidFill>
+            <a:srgbClr val="FFFFFF"/>
+          </a:solidFill>
+          <a:ln w="12700">
+            <a:solidFill>
+              <a:srgbClr val="DFE3E6"/>
+            </a:solidFill>
+            <a:prstDash val="solid"/>
+          </a:ln>
+        </p:spPr>
+        <p:txBody>
+          <a:bodyPr/>
+          <a:lstStyle/>
+          <a:p>
+            <a:endParaRPr lang="en-GB"/>
+          </a:p>
+        </p:txBody>
+      </p:sp>
+      <p:sp>
+        <p:nvSpPr>
+          <p:cNvPr id="13" name="Shape 11"/>
+          <p:cNvSpPr/>
+          <p:nvPr/>
+        </p:nvSpPr>
+        <p:spPr>
+          <a:xfrm>
+            <a:off x="6830568" y="1737360"/>
+            <a:ext cx="502920" cy="502920"/>
+          </a:xfrm>
+          <a:prstGeom prst="roundRect">
+            <a:avLst>
+              <a:gd name="adj" fmla="val 14545"/>
+            </a:avLst>
+          </a:prstGeom>
+          <a:solidFill>
+            <a:srgbClr val="FFE8D4"/>
+          </a:solidFill>
+          <a:ln w="12700">
+            <a:solidFill>
+              <a:srgbClr val="FFE8D4"/>
+            </a:solidFill>
+            <a:prstDash val="solid"/>
+          </a:ln>
+        </p:spPr>
+        <p:txBody>
+          <a:bodyPr/>
+          <a:lstStyle/>
+          <a:p>
+            <a:endParaRPr lang="en-GB"/>
+          </a:p>
+        </p:txBody>
+      </p:sp>
+      <p:sp>
+        <p:nvSpPr>
+          <p:cNvPr id="14" name="Text 12"/>
+          <p:cNvSpPr/>
+          <p:nvPr/>
+        </p:nvSpPr>
+        <p:spPr>
+          <a:xfrm>
+            <a:off x="7013448" y="1764792"/>
+            <a:ext cx="182880" cy="228600"/>
+          </a:xfrm>
+          <a:prstGeom prst="rect">
+            <a:avLst/>
+          </a:prstGeom>
+          <a:noFill/>
+          <a:ln/>
+        </p:spPr>
+        <p:txBody>
+          <a:bodyPr wrap="square" rtlCol="0" anchor="ctr"/>
+          <a:lstStyle/>
+          <a:p>
+            <a:pPr marL="0" indent="0" algn="ctr">
+              <a:buNone/>
             </a:pPr>
             <a:r>
-              <a:rPr lang="en-US" sz="1800" dirty="0">
+              <a:rPr lang="en-US" sz="1600" b="1" dirty="0">
+                <a:solidFill>
+                  <a:srgbClr val="FE7C39"/>
+                </a:solidFill>
+                <a:latin typeface="Arial" pitchFamily="34" charset="0"/>
+                <a:ea typeface="Arial" pitchFamily="34" charset="-122"/>
+                <a:cs typeface="Arial" pitchFamily="34" charset="-120"/>
+              </a:rPr>
+              <a:t>!</a:t>
+            </a:r>
+            <a:endParaRPr lang="en-US" sz="1600" dirty="0"/>
+          </a:p>
+        </p:txBody>
+      </p:sp>
+      <p:sp>
+        <p:nvSpPr>
+          <p:cNvPr id="15" name="Text 13"/>
+          <p:cNvSpPr/>
+          <p:nvPr/>
+        </p:nvSpPr>
+        <p:spPr>
+          <a:xfrm>
+            <a:off x="7470648" y="1737360"/>
+            <a:ext cx="4133088" cy="1417320"/>
+          </a:xfrm>
+          <a:prstGeom prst="rect">
+            <a:avLst/>
+          </a:prstGeom>
+          <a:noFill/>
+          <a:ln/>
+        </p:spPr>
+        <p:txBody>
+          <a:bodyPr wrap="square" rtlCol="0" anchor="t"/>
+          <a:lstStyle/>
+          <a:p>
+            <a:pPr marL="0" indent="0">
+              <a:buNone/>
+            </a:pPr>
+            <a:r>
+              <a:rPr lang="en-US" sz="1400" dirty="0">
                 <a:solidFill>
                   <a:srgbClr val="0C0C0C"/>
                 </a:solidFill>
@@ -2762,20 +3381,145 @@
                 <a:ea typeface="Arial" pitchFamily="34" charset="-122"/>
                 <a:cs typeface="Arial" pitchFamily="34" charset="-120"/>
               </a:rPr>
-              <a:t>Prior build estimate for similar outcome: 40+ hours</a:t>
+              <a:t>Complex implementation paths often need to be blocked or rewritten</a:t>
             </a:r>
-            <a:endParaRPr lang="en-US" sz="1800" dirty="0"/>
-          </a:p>
-          <a:p>
-            <a:pPr marL="228600" indent="-228600">
-              <a:spcAft>
-                <a:spcPts val="600"/>
-              </a:spcAft>
-              <a:buSzPct val="100000"/>
-              <a:buChar char="•"/>
+            <a:endParaRPr lang="en-US" sz="1400" dirty="0"/>
+          </a:p>
+        </p:txBody>
+      </p:sp>
+      <p:sp>
+        <p:nvSpPr>
+          <p:cNvPr id="16" name="Shape 14"/>
+          <p:cNvSpPr/>
+          <p:nvPr/>
+        </p:nvSpPr>
+        <p:spPr>
+          <a:xfrm>
+            <a:off x="868680" y="3749040"/>
+            <a:ext cx="5230368" cy="2011680"/>
+          </a:xfrm>
+          <a:prstGeom prst="roundRect">
+            <a:avLst>
+              <a:gd name="adj" fmla="val 1818"/>
+            </a:avLst>
+          </a:prstGeom>
+          <a:solidFill>
+            <a:srgbClr val="FFFFFF"/>
+          </a:solidFill>
+          <a:ln w="12700">
+            <a:solidFill>
+              <a:srgbClr val="DFE3E6"/>
+            </a:solidFill>
+            <a:prstDash val="solid"/>
+          </a:ln>
+        </p:spPr>
+        <p:txBody>
+          <a:bodyPr/>
+          <a:lstStyle/>
+          <a:p>
+            <a:endParaRPr lang="en-GB"/>
+          </a:p>
+        </p:txBody>
+      </p:sp>
+      <p:sp>
+        <p:nvSpPr>
+          <p:cNvPr id="17" name="Shape 15"/>
+          <p:cNvSpPr/>
+          <p:nvPr/>
+        </p:nvSpPr>
+        <p:spPr>
+          <a:xfrm>
+            <a:off x="1097280" y="4069080"/>
+            <a:ext cx="502920" cy="502920"/>
+          </a:xfrm>
+          <a:prstGeom prst="roundRect">
+            <a:avLst>
+              <a:gd name="adj" fmla="val 14545"/>
+            </a:avLst>
+          </a:prstGeom>
+          <a:solidFill>
+            <a:srgbClr val="FFE8D4"/>
+          </a:solidFill>
+          <a:ln w="12700">
+            <a:solidFill>
+              <a:srgbClr val="FFE8D4"/>
+            </a:solidFill>
+            <a:prstDash val="solid"/>
+          </a:ln>
+        </p:spPr>
+        <p:txBody>
+          <a:bodyPr/>
+          <a:lstStyle/>
+          <a:p>
+            <a:endParaRPr lang="en-GB"/>
+          </a:p>
+        </p:txBody>
+      </p:sp>
+      <p:sp>
+        <p:nvSpPr>
+          <p:cNvPr id="18" name="Text 16"/>
+          <p:cNvSpPr/>
+          <p:nvPr/>
+        </p:nvSpPr>
+        <p:spPr>
+          <a:xfrm>
+            <a:off x="1280160" y="4096512"/>
+            <a:ext cx="182880" cy="228600"/>
+          </a:xfrm>
+          <a:prstGeom prst="rect">
+            <a:avLst/>
+          </a:prstGeom>
+          <a:noFill/>
+          <a:ln/>
+        </p:spPr>
+        <p:txBody>
+          <a:bodyPr wrap="square" rtlCol="0" anchor="ctr"/>
+          <a:lstStyle/>
+          <a:p>
+            <a:pPr marL="0" indent="0" algn="ctr">
+              <a:buNone/>
             </a:pPr>
             <a:r>
-              <a:rPr lang="en-US" sz="1800" dirty="0">
+              <a:rPr lang="en-US" sz="1600" b="1" dirty="0">
+                <a:solidFill>
+                  <a:srgbClr val="FE7C39"/>
+                </a:solidFill>
+                <a:latin typeface="Arial" pitchFamily="34" charset="0"/>
+                <a:ea typeface="Arial" pitchFamily="34" charset="-122"/>
+                <a:cs typeface="Arial" pitchFamily="34" charset="-120"/>
+              </a:rPr>
+              <a:t>!</a:t>
+            </a:r>
+            <a:endParaRPr lang="en-US" sz="1600" dirty="0"/>
+          </a:p>
+        </p:txBody>
+      </p:sp>
+      <p:sp>
+        <p:nvSpPr>
+          <p:cNvPr id="19" name="Text 17"/>
+          <p:cNvSpPr/>
+          <p:nvPr/>
+        </p:nvSpPr>
+        <p:spPr>
+          <a:xfrm>
+            <a:off x="1737360" y="4069080"/>
+            <a:ext cx="4133088" cy="1417320"/>
+          </a:xfrm>
+          <a:prstGeom prst="rect">
+            <a:avLst/>
+          </a:prstGeom>
+          <a:noFill/>
+          <a:ln/>
+        </p:spPr>
+        <p:txBody>
+          <a:bodyPr wrap="square" rtlCol="0" anchor="t"/>
+          <a:lstStyle/>
+          <a:p>
+            <a:pPr marL="0" indent="0">
+              <a:buNone/>
+            </a:pPr>
+            <a:r>
+              <a:rPr lang="en-US" sz="1400" dirty="0">
                 <a:solidFill>
                   <a:srgbClr val="0C0C0C"/>
                 </a:solidFill>
@@ -2783,20 +3527,145 @@
                 <a:ea typeface="Arial" pitchFamily="34" charset="-122"/>
                 <a:cs typeface="Arial" pitchFamily="34" charset="-120"/>
               </a:rPr>
-              <a:t>Actual total to solid state: ~8 hours with intermittent refinement</a:t>
+              <a:t>Debug loops can waste time and increase technical debt</a:t>
             </a:r>
-            <a:endParaRPr lang="en-US" sz="1800" dirty="0"/>
-          </a:p>
-          <a:p>
-            <a:pPr marL="228600" indent="-228600">
-              <a:spcAft>
-                <a:spcPts val="600"/>
-              </a:spcAft>
-              <a:buSzPct val="100000"/>
-              <a:buChar char="•"/>
+            <a:endParaRPr lang="en-US" sz="1400" dirty="0"/>
+          </a:p>
+        </p:txBody>
+      </p:sp>
+      <p:sp>
+        <p:nvSpPr>
+          <p:cNvPr id="20" name="Shape 18"/>
+          <p:cNvSpPr/>
+          <p:nvPr/>
+        </p:nvSpPr>
+        <p:spPr>
+          <a:xfrm>
+            <a:off x="6601968" y="3749040"/>
+            <a:ext cx="5230368" cy="2011680"/>
+          </a:xfrm>
+          <a:prstGeom prst="roundRect">
+            <a:avLst>
+              <a:gd name="adj" fmla="val 1818"/>
+            </a:avLst>
+          </a:prstGeom>
+          <a:solidFill>
+            <a:srgbClr val="FFFFFF"/>
+          </a:solidFill>
+          <a:ln w="12700">
+            <a:solidFill>
+              <a:srgbClr val="DFE3E6"/>
+            </a:solidFill>
+            <a:prstDash val="solid"/>
+          </a:ln>
+        </p:spPr>
+        <p:txBody>
+          <a:bodyPr/>
+          <a:lstStyle/>
+          <a:p>
+            <a:endParaRPr lang="en-GB"/>
+          </a:p>
+        </p:txBody>
+      </p:sp>
+      <p:sp>
+        <p:nvSpPr>
+          <p:cNvPr id="21" name="Shape 19"/>
+          <p:cNvSpPr/>
+          <p:nvPr/>
+        </p:nvSpPr>
+        <p:spPr>
+          <a:xfrm>
+            <a:off x="6830568" y="4069080"/>
+            <a:ext cx="502920" cy="502920"/>
+          </a:xfrm>
+          <a:prstGeom prst="roundRect">
+            <a:avLst>
+              <a:gd name="adj" fmla="val 14545"/>
+            </a:avLst>
+          </a:prstGeom>
+          <a:solidFill>
+            <a:srgbClr val="FFE8D4"/>
+          </a:solidFill>
+          <a:ln w="12700">
+            <a:solidFill>
+              <a:srgbClr val="FFE8D4"/>
+            </a:solidFill>
+            <a:prstDash val="solid"/>
+          </a:ln>
+        </p:spPr>
+        <p:txBody>
+          <a:bodyPr/>
+          <a:lstStyle/>
+          <a:p>
+            <a:endParaRPr lang="en-GB"/>
+          </a:p>
+        </p:txBody>
+      </p:sp>
+      <p:sp>
+        <p:nvSpPr>
+          <p:cNvPr id="22" name="Text 20"/>
+          <p:cNvSpPr/>
+          <p:nvPr/>
+        </p:nvSpPr>
+        <p:spPr>
+          <a:xfrm>
+            <a:off x="7013448" y="4096512"/>
+            <a:ext cx="182880" cy="228600"/>
+          </a:xfrm>
+          <a:prstGeom prst="rect">
+            <a:avLst/>
+          </a:prstGeom>
+          <a:noFill/>
+          <a:ln/>
+        </p:spPr>
+        <p:txBody>
+          <a:bodyPr wrap="square" rtlCol="0" anchor="ctr"/>
+          <a:lstStyle/>
+          <a:p>
+            <a:pPr marL="0" indent="0" algn="ctr">
+              <a:buNone/>
             </a:pPr>
             <a:r>
-              <a:rPr lang="en-US" sz="1800" dirty="0">
+              <a:rPr lang="en-US" sz="1600" b="1" dirty="0">
+                <a:solidFill>
+                  <a:srgbClr val="FE7C39"/>
+                </a:solidFill>
+                <a:latin typeface="Arial" pitchFamily="34" charset="0"/>
+                <a:ea typeface="Arial" pitchFamily="34" charset="-122"/>
+                <a:cs typeface="Arial" pitchFamily="34" charset="-120"/>
+              </a:rPr>
+              <a:t>!</a:t>
+            </a:r>
+            <a:endParaRPr lang="en-US" sz="1600" dirty="0"/>
+          </a:p>
+        </p:txBody>
+      </p:sp>
+      <p:sp>
+        <p:nvSpPr>
+          <p:cNvPr id="23" name="Text 21"/>
+          <p:cNvSpPr/>
+          <p:nvPr/>
+        </p:nvSpPr>
+        <p:spPr>
+          <a:xfrm>
+            <a:off x="7470648" y="4069080"/>
+            <a:ext cx="4133088" cy="1417320"/>
+          </a:xfrm>
+          <a:prstGeom prst="rect">
+            <a:avLst/>
+          </a:prstGeom>
+          <a:noFill/>
+          <a:ln/>
+        </p:spPr>
+        <p:txBody>
+          <a:bodyPr wrap="square" rtlCol="0" anchor="t"/>
+          <a:lstStyle/>
+          <a:p>
+            <a:pPr marL="0" indent="0">
+              <a:buNone/>
+            </a:pPr>
+            <a:r>
+              <a:rPr lang="en-US" sz="1400" dirty="0">
                 <a:solidFill>
                   <a:srgbClr val="0C0C0C"/>
                 </a:solidFill>
@@ -2804,47 +3673,54 @@
                 <a:ea typeface="Arial" pitchFamily="34" charset="-122"/>
                 <a:cs typeface="Arial" pitchFamily="34" charset="-120"/>
               </a:rPr>
-              <a:t>Business outcome from using the app: $300+ annual wallet upside</a:t>
+              <a:t>Front-end responsiveness and visualization quality still required manual takeover</a:t>
             </a:r>
-            <a:endParaRPr lang="en-US" sz="1800" dirty="0"/>
-          </a:p>
-        </p:txBody>
-      </p:sp>
-      <p:sp>
-        <p:nvSpPr>
-          <p:cNvPr id="9" name="Shape 7"/>
-          <p:cNvSpPr/>
-          <p:nvPr/>
-        </p:nvSpPr>
-        <p:spPr>
-          <a:xfrm>
-            <a:off x="0" y="6217920"/>
-            <a:ext cx="12191695" cy="640080"/>
-          </a:xfrm>
-          <a:prstGeom prst="rect">
-            <a:avLst/>
-          </a:prstGeom>
-          <a:solidFill>
-            <a:srgbClr val="70201D"/>
-          </a:solidFill>
-          <a:ln w="12700">
-            <a:solidFill>
-              <a:srgbClr val="70201D"/>
-            </a:solidFill>
-            <a:prstDash val="solid"/>
-          </a:ln>
-        </p:spPr>
-      </p:sp>
-      <p:sp>
-        <p:nvSpPr>
-          <p:cNvPr id="10" name="Text 8"/>
-          <p:cNvSpPr/>
-          <p:nvPr/>
-        </p:nvSpPr>
-        <p:spPr>
-          <a:xfrm>
-            <a:off x="731520" y="6327648"/>
-            <a:ext cx="10789920" cy="365760"/>
+            <a:endParaRPr lang="en-US" sz="1400" dirty="0"/>
+          </a:p>
+        </p:txBody>
+      </p:sp>
+      <p:sp>
+        <p:nvSpPr>
+          <p:cNvPr id="24" name="Shape 22"/>
+          <p:cNvSpPr/>
+          <p:nvPr/>
+        </p:nvSpPr>
+        <p:spPr>
+          <a:xfrm>
+            <a:off x="822960" y="6217920"/>
+            <a:ext cx="10515600" cy="566928"/>
+          </a:xfrm>
+          <a:prstGeom prst="rect">
+            <a:avLst/>
+          </a:prstGeom>
+          <a:solidFill>
+            <a:srgbClr val="FD5108"/>
+          </a:solidFill>
+          <a:ln w="12700">
+            <a:solidFill>
+              <a:srgbClr val="FD5108"/>
+            </a:solidFill>
+            <a:prstDash val="solid"/>
+          </a:ln>
+        </p:spPr>
+        <p:txBody>
+          <a:bodyPr/>
+          <a:lstStyle/>
+          <a:p>
+            <a:endParaRPr lang="en-GB"/>
+          </a:p>
+        </p:txBody>
+      </p:sp>
+      <p:sp>
+        <p:nvSpPr>
+          <p:cNvPr id="25" name="Text 23"/>
+          <p:cNvSpPr/>
+          <p:nvPr/>
+        </p:nvSpPr>
+        <p:spPr>
+          <a:xfrm>
+            <a:off x="1051560" y="6373368"/>
+            <a:ext cx="10058400" cy="320040"/>
           </a:xfrm>
           <a:prstGeom prst="rect">
             <a:avLst/>
@@ -2856,11 +3732,11 @@
           <a:bodyPr wrap="square" rtlCol="0" anchor="ctr"/>
           <a:lstStyle/>
           <a:p>
-            <a:pPr indent="0" marL="0">
+            <a:pPr marL="0" indent="0">
               <a:buNone/>
             </a:pPr>
             <a:r>
-              <a:rPr lang="en-US" sz="1400" b="1" dirty="0">
+              <a:rPr lang="en-US" sz="1300" b="1" dirty="0">
                 <a:solidFill>
                   <a:srgbClr val="FFFFFF"/>
                 </a:solidFill>
@@ -2868,9 +3744,9 @@
                 <a:ea typeface="Arial" pitchFamily="34" charset="-122"/>
                 <a:cs typeface="Arial" pitchFamily="34" charset="-120"/>
               </a:rPr>
-              <a:t>Time-to-value compression is real for both builders and end users.</a:t>
+              <a:t>AI-generated code is fast code, not automatically good code.</a:t>
             </a:r>
-            <a:endParaRPr lang="en-US" sz="1400" dirty="0"/>
+            <a:endParaRPr lang="en-US" sz="1300" dirty="0"/>
           </a:p>
         </p:txBody>
       </p:sp>
@@ -2914,15 +3790,22 @@
             <a:avLst/>
           </a:prstGeom>
           <a:solidFill>
-            <a:srgbClr val="F5F5F5"/>
-          </a:solidFill>
-          <a:ln w="12700">
-            <a:solidFill>
-              <a:srgbClr val="F5F5F5"/>
-            </a:solidFill>
-            <a:prstDash val="solid"/>
-          </a:ln>
-        </p:spPr>
+            <a:srgbClr val="F5F7F8"/>
+          </a:solidFill>
+          <a:ln w="12700">
+            <a:solidFill>
+              <a:srgbClr val="F5F7F8"/>
+            </a:solidFill>
+            <a:prstDash val="solid"/>
+          </a:ln>
+        </p:spPr>
+        <p:txBody>
+          <a:bodyPr/>
+          <a:lstStyle/>
+          <a:p>
+            <a:endParaRPr lang="en-GB"/>
+          </a:p>
+        </p:txBody>
       </p:sp>
       <p:sp>
         <p:nvSpPr>
@@ -2932,26 +3815,29 @@
         </p:nvSpPr>
         <p:spPr>
           <a:xfrm>
-            <a:off x="8412480" y="-548640"/>
-            <a:ext cx="3840480" cy="3840480"/>
-          </a:xfrm>
-          <a:prstGeom prst="ellipse">
-            <a:avLst/>
-          </a:prstGeom>
-          <a:solidFill>
-            <a:srgbClr val="D06965">
-              <a:alpha val="35000"/>
-            </a:srgbClr>
-          </a:solidFill>
-          <a:ln w="12700">
-            <a:solidFill>
-              <a:srgbClr val="D06965">
-                <a:alpha val="0"/>
-              </a:srgbClr>
-            </a:solidFill>
-            <a:prstDash val="solid"/>
-          </a:ln>
-        </p:spPr>
+            <a:off x="0" y="0"/>
+            <a:ext cx="12191695" cy="146304"/>
+          </a:xfrm>
+          <a:prstGeom prst="rect">
+            <a:avLst/>
+          </a:prstGeom>
+          <a:solidFill>
+            <a:srgbClr val="FD5108"/>
+          </a:solidFill>
+          <a:ln w="12700">
+            <a:solidFill>
+              <a:srgbClr val="FD5108"/>
+            </a:solidFill>
+            <a:prstDash val="solid"/>
+          </a:ln>
+        </p:spPr>
+        <p:txBody>
+          <a:bodyPr/>
+          <a:lstStyle/>
+          <a:p>
+            <a:endParaRPr lang="en-GB"/>
+          </a:p>
+        </p:txBody>
       </p:sp>
       <p:sp>
         <p:nvSpPr>
@@ -2961,26 +3847,29 @@
         </p:nvSpPr>
         <p:spPr>
           <a:xfrm>
-            <a:off x="-914400" y="4663440"/>
-            <a:ext cx="4206240" cy="4206240"/>
-          </a:xfrm>
-          <a:prstGeom prst="ellipse">
-            <a:avLst/>
-          </a:prstGeom>
-          <a:solidFill>
-            <a:srgbClr val="962D27">
-              <a:alpha val="22000"/>
-            </a:srgbClr>
-          </a:solidFill>
-          <a:ln w="12700">
-            <a:solidFill>
-              <a:srgbClr val="962D27">
-                <a:alpha val="0"/>
-              </a:srgbClr>
-            </a:solidFill>
-            <a:prstDash val="solid"/>
-          </a:ln>
-        </p:spPr>
+            <a:off x="11567160" y="146304"/>
+            <a:ext cx="621792" cy="6071616"/>
+          </a:xfrm>
+          <a:prstGeom prst="rect">
+            <a:avLst/>
+          </a:prstGeom>
+          <a:solidFill>
+            <a:srgbClr val="EEEFF1"/>
+          </a:solidFill>
+          <a:ln w="12700">
+            <a:solidFill>
+              <a:srgbClr val="EEEFF1"/>
+            </a:solidFill>
+            <a:prstDash val="solid"/>
+          </a:ln>
+        </p:spPr>
+        <p:txBody>
+          <a:bodyPr/>
+          <a:lstStyle/>
+          <a:p>
+            <a:endParaRPr lang="en-GB"/>
+          </a:p>
+        </p:txBody>
       </p:sp>
       <p:sp>
         <p:nvSpPr>
@@ -2990,22 +3879,29 @@
         </p:nvSpPr>
         <p:spPr>
           <a:xfrm>
-            <a:off x="0" y="0"/>
-            <a:ext cx="12191695" cy="256032"/>
-          </a:xfrm>
-          <a:prstGeom prst="rect">
-            <a:avLst/>
-          </a:prstGeom>
-          <a:solidFill>
-            <a:srgbClr val="70201D"/>
-          </a:solidFill>
-          <a:ln w="12700">
-            <a:solidFill>
-              <a:srgbClr val="70201D"/>
-            </a:solidFill>
-            <a:prstDash val="solid"/>
-          </a:ln>
-        </p:spPr>
+            <a:off x="822960" y="1261872"/>
+            <a:ext cx="73152" cy="457200"/>
+          </a:xfrm>
+          <a:prstGeom prst="rect">
+            <a:avLst/>
+          </a:prstGeom>
+          <a:solidFill>
+            <a:srgbClr val="FD5108"/>
+          </a:solidFill>
+          <a:ln w="12700">
+            <a:solidFill>
+              <a:srgbClr val="FD5108"/>
+            </a:solidFill>
+            <a:prstDash val="solid"/>
+          </a:ln>
+        </p:spPr>
+        <p:txBody>
+          <a:bodyPr/>
+          <a:lstStyle/>
+          <a:p>
+            <a:endParaRPr lang="en-GB"/>
+          </a:p>
+        </p:txBody>
       </p:sp>
       <p:sp>
         <p:nvSpPr>
@@ -3015,8 +3911,8 @@
         </p:nvSpPr>
         <p:spPr>
           <a:xfrm>
-            <a:off x="822960" y="548640"/>
-            <a:ext cx="10789920" cy="548640"/>
+            <a:off x="822960" y="438912"/>
+            <a:ext cx="5486400" cy="228600"/>
           </a:xfrm>
           <a:prstGeom prst="rect">
             <a:avLst/>
@@ -3028,7 +3924,46 @@
           <a:bodyPr wrap="square" rtlCol="0" anchor="ctr"/>
           <a:lstStyle/>
           <a:p>
-            <a:pPr indent="0" marL="0">
+            <a:pPr marL="0" indent="0">
+              <a:buNone/>
+            </a:pPr>
+            <a:r>
+              <a:rPr lang="en-US" sz="1000" b="1" dirty="0">
+                <a:solidFill>
+                  <a:srgbClr val="6A717C"/>
+                </a:solidFill>
+                <a:latin typeface="Arial" pitchFamily="34" charset="0"/>
+                <a:ea typeface="Arial" pitchFamily="34" charset="-122"/>
+                <a:cs typeface="Arial" pitchFamily="34" charset="-120"/>
+              </a:rPr>
+              <a:t>OPERATING MODEL</a:t>
+            </a:r>
+            <a:endParaRPr lang="en-US" sz="1000" dirty="0"/>
+          </a:p>
+        </p:txBody>
+      </p:sp>
+      <p:sp>
+        <p:nvSpPr>
+          <p:cNvPr id="7" name="Text 5"/>
+          <p:cNvSpPr/>
+          <p:nvPr/>
+        </p:nvSpPr>
+        <p:spPr>
+          <a:xfrm>
+            <a:off x="822960" y="658368"/>
+            <a:ext cx="10789920" cy="594360"/>
+          </a:xfrm>
+          <a:prstGeom prst="rect">
+            <a:avLst/>
+          </a:prstGeom>
+          <a:noFill/>
+          <a:ln/>
+        </p:spPr>
+        <p:txBody>
+          <a:bodyPr wrap="square" rtlCol="0" anchor="ctr"/>
+          <a:lstStyle/>
+          <a:p>
+            <a:pPr marL="0" indent="0">
               <a:buNone/>
             </a:pPr>
             <a:r>
@@ -3040,7 +3975,7 @@
                 <a:ea typeface="Georgia" pitchFamily="34" charset="-122"/>
                 <a:cs typeface="Georgia" pitchFamily="34" charset="-120"/>
               </a:rPr>
-              <a:t>Where Vibecoding Breaks Down</a:t>
+              <a:t>Production Guardrails Are Non-Negotiable</a:t>
             </a:r>
             <a:endParaRPr lang="en-US" sz="3000" dirty="0"/>
           </a:p>
@@ -3048,39 +3983,80 @@
       </p:sp>
       <p:sp>
         <p:nvSpPr>
-          <p:cNvPr id="7" name="Shape 5"/>
-          <p:cNvSpPr/>
-          <p:nvPr/>
-        </p:nvSpPr>
-        <p:spPr>
-          <a:xfrm>
-            <a:off x="822960" y="1097280"/>
-            <a:ext cx="6400800" cy="5120640"/>
-          </a:xfrm>
-          <a:prstGeom prst="rect">
-            <a:avLst/>
+          <p:cNvPr id="8" name="Shape 6"/>
+          <p:cNvSpPr/>
+          <p:nvPr/>
+        </p:nvSpPr>
+        <p:spPr>
+          <a:xfrm>
+            <a:off x="868680" y="1554480"/>
+            <a:ext cx="3566160" cy="4023360"/>
+          </a:xfrm>
+          <a:prstGeom prst="roundRect">
+            <a:avLst>
+              <a:gd name="adj" fmla="val 1282"/>
+            </a:avLst>
           </a:prstGeom>
           <a:solidFill>
             <a:srgbClr val="FFFFFF"/>
           </a:solidFill>
           <a:ln w="12700">
             <a:solidFill>
-              <a:srgbClr val="E5E5E5"/>
-            </a:solidFill>
-            <a:prstDash val="solid"/>
-          </a:ln>
-        </p:spPr>
-      </p:sp>
-      <p:sp>
-        <p:nvSpPr>
-          <p:cNvPr id="8" name="Text 6"/>
-          <p:cNvSpPr/>
-          <p:nvPr/>
-        </p:nvSpPr>
-        <p:spPr>
-          <a:xfrm>
-            <a:off x="1097280" y="1463040"/>
-            <a:ext cx="5669280" cy="4572000"/>
+              <a:srgbClr val="DFE3E6"/>
+            </a:solidFill>
+            <a:prstDash val="solid"/>
+          </a:ln>
+        </p:spPr>
+        <p:txBody>
+          <a:bodyPr/>
+          <a:lstStyle/>
+          <a:p>
+            <a:endParaRPr lang="en-GB"/>
+          </a:p>
+        </p:txBody>
+      </p:sp>
+      <p:sp>
+        <p:nvSpPr>
+          <p:cNvPr id="9" name="Shape 7"/>
+          <p:cNvSpPr/>
+          <p:nvPr/>
+        </p:nvSpPr>
+        <p:spPr>
+          <a:xfrm>
+            <a:off x="868680" y="1554480"/>
+            <a:ext cx="3566160" cy="548640"/>
+          </a:xfrm>
+          <a:prstGeom prst="rect">
+            <a:avLst/>
+          </a:prstGeom>
+          <a:solidFill>
+            <a:srgbClr val="FD5108"/>
+          </a:solidFill>
+          <a:ln w="12700">
+            <a:solidFill>
+              <a:srgbClr val="FD5108"/>
+            </a:solidFill>
+            <a:prstDash val="solid"/>
+          </a:ln>
+        </p:spPr>
+        <p:txBody>
+          <a:bodyPr/>
+          <a:lstStyle/>
+          <a:p>
+            <a:endParaRPr lang="en-GB"/>
+          </a:p>
+        </p:txBody>
+      </p:sp>
+      <p:sp>
+        <p:nvSpPr>
+          <p:cNvPr id="10" name="Text 8"/>
+          <p:cNvSpPr/>
+          <p:nvPr/>
+        </p:nvSpPr>
+        <p:spPr>
+          <a:xfrm>
+            <a:off x="1051560" y="1673352"/>
+            <a:ext cx="502920" cy="228600"/>
           </a:xfrm>
           <a:prstGeom prst="rect">
             <a:avLst/>
@@ -3089,18 +4065,53 @@
           <a:ln/>
         </p:spPr>
         <p:txBody>
-          <a:bodyPr wrap="square" rtlCol="0" anchor="t"/>
-          <a:lstStyle/>
-          <a:p>
-            <a:pPr marL="228600" indent="-228600">
-              <a:spcAft>
-                <a:spcPts val="600"/>
-              </a:spcAft>
-              <a:buSzPct val="100000"/>
-              <a:buChar char="•"/>
+          <a:bodyPr wrap="square" rtlCol="0" anchor="ctr"/>
+          <a:lstStyle/>
+          <a:p>
+            <a:pPr marL="0" indent="0">
+              <a:buNone/>
             </a:pPr>
             <a:r>
-              <a:rPr lang="en-US" sz="1800" dirty="0">
+              <a:rPr lang="en-US" sz="1200" b="1" dirty="0">
+                <a:solidFill>
+                  <a:srgbClr val="FFFFFF"/>
+                </a:solidFill>
+                <a:latin typeface="Arial" pitchFamily="34" charset="0"/>
+                <a:ea typeface="Arial" pitchFamily="34" charset="-122"/>
+                <a:cs typeface="Arial" pitchFamily="34" charset="-120"/>
+              </a:rPr>
+              <a:t>01</a:t>
+            </a:r>
+            <a:endParaRPr lang="en-US" sz="1200" dirty="0"/>
+          </a:p>
+        </p:txBody>
+      </p:sp>
+      <p:sp>
+        <p:nvSpPr>
+          <p:cNvPr id="11" name="Text 9"/>
+          <p:cNvSpPr/>
+          <p:nvPr/>
+        </p:nvSpPr>
+        <p:spPr>
+          <a:xfrm>
+            <a:off x="1097280" y="2331720"/>
+            <a:ext cx="3108960" cy="2560320"/>
+          </a:xfrm>
+          <a:prstGeom prst="rect">
+            <a:avLst/>
+          </a:prstGeom>
+          <a:noFill/>
+          <a:ln/>
+        </p:spPr>
+        <p:txBody>
+          <a:bodyPr wrap="square" rtlCol="0" anchor="ctr"/>
+          <a:lstStyle/>
+          <a:p>
+            <a:pPr marL="0" indent="0" algn="ctr">
+              <a:buNone/>
+            </a:pPr>
+            <a:r>
+              <a:rPr lang="en-US" sz="1500" dirty="0">
                 <a:solidFill>
                   <a:srgbClr val="0C0C0C"/>
                 </a:solidFill>
@@ -3108,20 +4119,143 @@
                 <a:ea typeface="Arial" pitchFamily="34" charset="-122"/>
                 <a:cs typeface="Arial" pitchFamily="34" charset="-120"/>
               </a:rPr>
-              <a:t>Dead code and legacy artifacts accumulate quickly (e.g., vestigial Mongo code)</a:t>
+              <a:t>Secrets and repository hygiene</a:t>
             </a:r>
-            <a:endParaRPr lang="en-US" sz="1800" dirty="0"/>
-          </a:p>
-          <a:p>
-            <a:pPr marL="228600" indent="-228600">
-              <a:spcAft>
-                <a:spcPts val="600"/>
-              </a:spcAft>
-              <a:buSzPct val="100000"/>
-              <a:buChar char="•"/>
+            <a:endParaRPr lang="en-US" sz="1500" dirty="0"/>
+          </a:p>
+        </p:txBody>
+      </p:sp>
+      <p:sp>
+        <p:nvSpPr>
+          <p:cNvPr id="12" name="Shape 10"/>
+          <p:cNvSpPr/>
+          <p:nvPr/>
+        </p:nvSpPr>
+        <p:spPr>
+          <a:xfrm>
+            <a:off x="4754880" y="1554480"/>
+            <a:ext cx="3566160" cy="4023360"/>
+          </a:xfrm>
+          <a:prstGeom prst="roundRect">
+            <a:avLst>
+              <a:gd name="adj" fmla="val 1282"/>
+            </a:avLst>
+          </a:prstGeom>
+          <a:solidFill>
+            <a:srgbClr val="FFFFFF"/>
+          </a:solidFill>
+          <a:ln w="12700">
+            <a:solidFill>
+              <a:srgbClr val="DFE3E6"/>
+            </a:solidFill>
+            <a:prstDash val="solid"/>
+          </a:ln>
+        </p:spPr>
+        <p:txBody>
+          <a:bodyPr/>
+          <a:lstStyle/>
+          <a:p>
+            <a:endParaRPr lang="en-GB"/>
+          </a:p>
+        </p:txBody>
+      </p:sp>
+      <p:sp>
+        <p:nvSpPr>
+          <p:cNvPr id="13" name="Shape 11"/>
+          <p:cNvSpPr/>
+          <p:nvPr/>
+        </p:nvSpPr>
+        <p:spPr>
+          <a:xfrm>
+            <a:off x="4754880" y="1554480"/>
+            <a:ext cx="3566160" cy="548640"/>
+          </a:xfrm>
+          <a:prstGeom prst="rect">
+            <a:avLst/>
+          </a:prstGeom>
+          <a:solidFill>
+            <a:srgbClr val="FE7C39"/>
+          </a:solidFill>
+          <a:ln w="12700">
+            <a:solidFill>
+              <a:srgbClr val="FE7C39"/>
+            </a:solidFill>
+            <a:prstDash val="solid"/>
+          </a:ln>
+        </p:spPr>
+        <p:txBody>
+          <a:bodyPr/>
+          <a:lstStyle/>
+          <a:p>
+            <a:endParaRPr lang="en-GB"/>
+          </a:p>
+        </p:txBody>
+      </p:sp>
+      <p:sp>
+        <p:nvSpPr>
+          <p:cNvPr id="14" name="Text 12"/>
+          <p:cNvSpPr/>
+          <p:nvPr/>
+        </p:nvSpPr>
+        <p:spPr>
+          <a:xfrm>
+            <a:off x="4937760" y="1673352"/>
+            <a:ext cx="502920" cy="228600"/>
+          </a:xfrm>
+          <a:prstGeom prst="rect">
+            <a:avLst/>
+          </a:prstGeom>
+          <a:noFill/>
+          <a:ln/>
+        </p:spPr>
+        <p:txBody>
+          <a:bodyPr wrap="square" rtlCol="0" anchor="ctr"/>
+          <a:lstStyle/>
+          <a:p>
+            <a:pPr marL="0" indent="0">
+              <a:buNone/>
             </a:pPr>
             <a:r>
-              <a:rPr lang="en-US" sz="1800" dirty="0">
+              <a:rPr lang="en-US" sz="1200" b="1" dirty="0">
+                <a:solidFill>
+                  <a:srgbClr val="FFFFFF"/>
+                </a:solidFill>
+                <a:latin typeface="Arial" pitchFamily="34" charset="0"/>
+                <a:ea typeface="Arial" pitchFamily="34" charset="-122"/>
+                <a:cs typeface="Arial" pitchFamily="34" charset="-120"/>
+              </a:rPr>
+              <a:t>02</a:t>
+            </a:r>
+            <a:endParaRPr lang="en-US" sz="1200" dirty="0"/>
+          </a:p>
+        </p:txBody>
+      </p:sp>
+      <p:sp>
+        <p:nvSpPr>
+          <p:cNvPr id="15" name="Text 13"/>
+          <p:cNvSpPr/>
+          <p:nvPr/>
+        </p:nvSpPr>
+        <p:spPr>
+          <a:xfrm>
+            <a:off x="4983480" y="2331720"/>
+            <a:ext cx="3108960" cy="2560320"/>
+          </a:xfrm>
+          <a:prstGeom prst="rect">
+            <a:avLst/>
+          </a:prstGeom>
+          <a:noFill/>
+          <a:ln/>
+        </p:spPr>
+        <p:txBody>
+          <a:bodyPr wrap="square" rtlCol="0" anchor="ctr"/>
+          <a:lstStyle/>
+          <a:p>
+            <a:pPr marL="0" indent="0" algn="ctr">
+              <a:buNone/>
+            </a:pPr>
+            <a:r>
+              <a:rPr lang="en-US" sz="1500" dirty="0">
                 <a:solidFill>
                   <a:srgbClr val="0C0C0C"/>
                 </a:solidFill>
@@ -3129,20 +4263,143 @@
                 <a:ea typeface="Arial" pitchFamily="34" charset="-122"/>
                 <a:cs typeface="Arial" pitchFamily="34" charset="-120"/>
               </a:rPr>
-              <a:t>Complex implementation paths often need to be blocked or rewritten</a:t>
+              <a:t>Security and API hardening</a:t>
             </a:r>
-            <a:endParaRPr lang="en-US" sz="1800" dirty="0"/>
-          </a:p>
-          <a:p>
-            <a:pPr marL="228600" indent="-228600">
-              <a:spcAft>
-                <a:spcPts val="600"/>
-              </a:spcAft>
-              <a:buSzPct val="100000"/>
-              <a:buChar char="•"/>
+            <a:endParaRPr lang="en-US" sz="1500" dirty="0"/>
+          </a:p>
+        </p:txBody>
+      </p:sp>
+      <p:sp>
+        <p:nvSpPr>
+          <p:cNvPr id="16" name="Shape 14"/>
+          <p:cNvSpPr/>
+          <p:nvPr/>
+        </p:nvSpPr>
+        <p:spPr>
+          <a:xfrm>
+            <a:off x="8641080" y="1554480"/>
+            <a:ext cx="3566160" cy="4023360"/>
+          </a:xfrm>
+          <a:prstGeom prst="roundRect">
+            <a:avLst>
+              <a:gd name="adj" fmla="val 1282"/>
+            </a:avLst>
+          </a:prstGeom>
+          <a:solidFill>
+            <a:srgbClr val="FFFFFF"/>
+          </a:solidFill>
+          <a:ln w="12700">
+            <a:solidFill>
+              <a:srgbClr val="DFE3E6"/>
+            </a:solidFill>
+            <a:prstDash val="solid"/>
+          </a:ln>
+        </p:spPr>
+        <p:txBody>
+          <a:bodyPr/>
+          <a:lstStyle/>
+          <a:p>
+            <a:endParaRPr lang="en-GB"/>
+          </a:p>
+        </p:txBody>
+      </p:sp>
+      <p:sp>
+        <p:nvSpPr>
+          <p:cNvPr id="17" name="Shape 15"/>
+          <p:cNvSpPr/>
+          <p:nvPr/>
+        </p:nvSpPr>
+        <p:spPr>
+          <a:xfrm>
+            <a:off x="8641080" y="1554480"/>
+            <a:ext cx="3566160" cy="548640"/>
+          </a:xfrm>
+          <a:prstGeom prst="rect">
+            <a:avLst/>
+          </a:prstGeom>
+          <a:solidFill>
+            <a:srgbClr val="FFAA72"/>
+          </a:solidFill>
+          <a:ln w="12700">
+            <a:solidFill>
+              <a:srgbClr val="FFAA72"/>
+            </a:solidFill>
+            <a:prstDash val="solid"/>
+          </a:ln>
+        </p:spPr>
+        <p:txBody>
+          <a:bodyPr/>
+          <a:lstStyle/>
+          <a:p>
+            <a:endParaRPr lang="en-GB"/>
+          </a:p>
+        </p:txBody>
+      </p:sp>
+      <p:sp>
+        <p:nvSpPr>
+          <p:cNvPr id="18" name="Text 16"/>
+          <p:cNvSpPr/>
+          <p:nvPr/>
+        </p:nvSpPr>
+        <p:spPr>
+          <a:xfrm>
+            <a:off x="8823960" y="1673352"/>
+            <a:ext cx="502920" cy="228600"/>
+          </a:xfrm>
+          <a:prstGeom prst="rect">
+            <a:avLst/>
+          </a:prstGeom>
+          <a:noFill/>
+          <a:ln/>
+        </p:spPr>
+        <p:txBody>
+          <a:bodyPr wrap="square" rtlCol="0" anchor="ctr"/>
+          <a:lstStyle/>
+          <a:p>
+            <a:pPr marL="0" indent="0">
+              <a:buNone/>
             </a:pPr>
             <a:r>
-              <a:rPr lang="en-US" sz="1800" dirty="0">
+              <a:rPr lang="en-US" sz="1200" b="1" dirty="0">
+                <a:solidFill>
+                  <a:srgbClr val="FFFFFF"/>
+                </a:solidFill>
+                <a:latin typeface="Arial" pitchFamily="34" charset="0"/>
+                <a:ea typeface="Arial" pitchFamily="34" charset="-122"/>
+                <a:cs typeface="Arial" pitchFamily="34" charset="-120"/>
+              </a:rPr>
+              <a:t>03</a:t>
+            </a:r>
+            <a:endParaRPr lang="en-US" sz="1200" dirty="0"/>
+          </a:p>
+        </p:txBody>
+      </p:sp>
+      <p:sp>
+        <p:nvSpPr>
+          <p:cNvPr id="19" name="Text 17"/>
+          <p:cNvSpPr/>
+          <p:nvPr/>
+        </p:nvSpPr>
+        <p:spPr>
+          <a:xfrm>
+            <a:off x="8869680" y="2331720"/>
+            <a:ext cx="3108960" cy="2560320"/>
+          </a:xfrm>
+          <a:prstGeom prst="rect">
+            <a:avLst/>
+          </a:prstGeom>
+          <a:noFill/>
+          <a:ln/>
+        </p:spPr>
+        <p:txBody>
+          <a:bodyPr wrap="square" rtlCol="0" anchor="ctr"/>
+          <a:lstStyle/>
+          <a:p>
+            <a:pPr marL="0" indent="0" algn="ctr">
+              <a:buNone/>
+            </a:pPr>
+            <a:r>
+              <a:rPr lang="en-US" sz="1500" dirty="0">
                 <a:solidFill>
                   <a:srgbClr val="0C0C0C"/>
                 </a:solidFill>
@@ -3150,68 +4407,93 @@
                 <a:ea typeface="Arial" pitchFamily="34" charset="-122"/>
                 <a:cs typeface="Arial" pitchFamily="34" charset="-120"/>
               </a:rPr>
-              <a:t>Debug loops can waste time and increase technical debt</a:t>
+              <a:t>High availability and reliability controls</a:t>
             </a:r>
-            <a:endParaRPr lang="en-US" sz="1800" dirty="0"/>
-          </a:p>
-          <a:p>
-            <a:pPr marL="228600" indent="-228600">
-              <a:spcAft>
-                <a:spcPts val="600"/>
-              </a:spcAft>
-              <a:buSzPct val="100000"/>
-              <a:buChar char="•"/>
+            <a:endParaRPr lang="en-US" sz="1500" dirty="0"/>
+          </a:p>
+        </p:txBody>
+      </p:sp>
+      <p:sp>
+        <p:nvSpPr>
+          <p:cNvPr id="20" name="Text 18"/>
+          <p:cNvSpPr/>
+          <p:nvPr/>
+        </p:nvSpPr>
+        <p:spPr>
+          <a:xfrm>
+            <a:off x="914400" y="5715000"/>
+            <a:ext cx="10515600" cy="228600"/>
+          </a:xfrm>
+          <a:prstGeom prst="rect">
+            <a:avLst/>
+          </a:prstGeom>
+          <a:noFill/>
+          <a:ln/>
+        </p:spPr>
+        <p:txBody>
+          <a:bodyPr wrap="square" rtlCol="0" anchor="ctr"/>
+          <a:lstStyle/>
+          <a:p>
+            <a:pPr marL="0" indent="0" algn="ctr">
+              <a:buNone/>
             </a:pPr>
             <a:r>
-              <a:rPr lang="en-US" sz="1800" dirty="0">
+              <a:rPr lang="en-US" sz="1200" dirty="0">
                 <a:solidFill>
-                  <a:srgbClr val="0C0C0C"/>
+                  <a:srgbClr val="6A717C"/>
                 </a:solidFill>
                 <a:latin typeface="Arial" pitchFamily="34" charset="0"/>
                 <a:ea typeface="Arial" pitchFamily="34" charset="-122"/>
                 <a:cs typeface="Arial" pitchFamily="34" charset="-120"/>
               </a:rPr>
-              <a:t>Front-end responsiveness and visualization quality still required manual takeover</a:t>
+              <a:t>Working model: free-form for POCs, structured step-by-step for production</a:t>
             </a:r>
-            <a:endParaRPr lang="en-US" sz="1800" dirty="0"/>
-          </a:p>
-        </p:txBody>
-      </p:sp>
-      <p:sp>
-        <p:nvSpPr>
-          <p:cNvPr id="9" name="Shape 7"/>
-          <p:cNvSpPr/>
-          <p:nvPr/>
-        </p:nvSpPr>
-        <p:spPr>
-          <a:xfrm>
-            <a:off x="0" y="6217920"/>
-            <a:ext cx="12191695" cy="640080"/>
-          </a:xfrm>
-          <a:prstGeom prst="rect">
-            <a:avLst/>
-          </a:prstGeom>
-          <a:solidFill>
-            <a:srgbClr val="70201D"/>
-          </a:solidFill>
-          <a:ln w="12700">
-            <a:solidFill>
-              <a:srgbClr val="70201D"/>
-            </a:solidFill>
-            <a:prstDash val="solid"/>
-          </a:ln>
-        </p:spPr>
-      </p:sp>
-      <p:sp>
-        <p:nvSpPr>
-          <p:cNvPr id="10" name="Text 8"/>
-          <p:cNvSpPr/>
-          <p:nvPr/>
-        </p:nvSpPr>
-        <p:spPr>
-          <a:xfrm>
-            <a:off x="731520" y="6327648"/>
-            <a:ext cx="10789920" cy="365760"/>
+            <a:endParaRPr lang="en-US" sz="1200" dirty="0"/>
+          </a:p>
+        </p:txBody>
+      </p:sp>
+      <p:sp>
+        <p:nvSpPr>
+          <p:cNvPr id="21" name="Shape 19"/>
+          <p:cNvSpPr/>
+          <p:nvPr/>
+        </p:nvSpPr>
+        <p:spPr>
+          <a:xfrm>
+            <a:off x="822960" y="6217920"/>
+            <a:ext cx="10515600" cy="566928"/>
+          </a:xfrm>
+          <a:prstGeom prst="rect">
+            <a:avLst/>
+          </a:prstGeom>
+          <a:solidFill>
+            <a:srgbClr val="FD5108"/>
+          </a:solidFill>
+          <a:ln w="12700">
+            <a:solidFill>
+              <a:srgbClr val="FD5108"/>
+            </a:solidFill>
+            <a:prstDash val="solid"/>
+          </a:ln>
+        </p:spPr>
+        <p:txBody>
+          <a:bodyPr/>
+          <a:lstStyle/>
+          <a:p>
+            <a:endParaRPr lang="en-GB"/>
+          </a:p>
+        </p:txBody>
+      </p:sp>
+      <p:sp>
+        <p:nvSpPr>
+          <p:cNvPr id="22" name="Text 20"/>
+          <p:cNvSpPr/>
+          <p:nvPr/>
+        </p:nvSpPr>
+        <p:spPr>
+          <a:xfrm>
+            <a:off x="1051560" y="6373368"/>
+            <a:ext cx="10058400" cy="320040"/>
           </a:xfrm>
           <a:prstGeom prst="rect">
             <a:avLst/>
@@ -3223,11 +4505,11 @@
           <a:bodyPr wrap="square" rtlCol="0" anchor="ctr"/>
           <a:lstStyle/>
           <a:p>
-            <a:pPr indent="0" marL="0">
+            <a:pPr marL="0" indent="0">
               <a:buNone/>
             </a:pPr>
             <a:r>
-              <a:rPr lang="en-US" sz="1400" b="1" dirty="0">
+              <a:rPr lang="en-US" sz="1300" b="1" dirty="0">
                 <a:solidFill>
                   <a:srgbClr val="FFFFFF"/>
                 </a:solidFill>
@@ -3235,9 +4517,9 @@
                 <a:ea typeface="Arial" pitchFamily="34" charset="-122"/>
                 <a:cs typeface="Arial" pitchFamily="34" charset="-120"/>
               </a:rPr>
-              <a:t>AI-generated code is fast code, not automatically good code.</a:t>
+              <a:t>Speed scales only when governance scales with it.</a:t>
             </a:r>
-            <a:endParaRPr lang="en-US" sz="1400" dirty="0"/>
+            <a:endParaRPr lang="en-US" sz="1300" dirty="0"/>
           </a:p>
         </p:txBody>
       </p:sp>
@@ -3281,15 +4563,22 @@
             <a:avLst/>
           </a:prstGeom>
           <a:solidFill>
-            <a:srgbClr val="F5F5F5"/>
-          </a:solidFill>
-          <a:ln w="12700">
-            <a:solidFill>
-              <a:srgbClr val="F5F5F5"/>
-            </a:solidFill>
-            <a:prstDash val="solid"/>
-          </a:ln>
-        </p:spPr>
+            <a:srgbClr val="F5F7F8"/>
+          </a:solidFill>
+          <a:ln w="12700">
+            <a:solidFill>
+              <a:srgbClr val="F5F7F8"/>
+            </a:solidFill>
+            <a:prstDash val="solid"/>
+          </a:ln>
+        </p:spPr>
+        <p:txBody>
+          <a:bodyPr/>
+          <a:lstStyle/>
+          <a:p>
+            <a:endParaRPr lang="en-GB"/>
+          </a:p>
+        </p:txBody>
       </p:sp>
       <p:sp>
         <p:nvSpPr>
@@ -3299,26 +4588,29 @@
         </p:nvSpPr>
         <p:spPr>
           <a:xfrm>
-            <a:off x="8412480" y="-548640"/>
-            <a:ext cx="3840480" cy="3840480"/>
-          </a:xfrm>
-          <a:prstGeom prst="ellipse">
-            <a:avLst/>
-          </a:prstGeom>
-          <a:solidFill>
-            <a:srgbClr val="D06965">
-              <a:alpha val="35000"/>
-            </a:srgbClr>
-          </a:solidFill>
-          <a:ln w="12700">
-            <a:solidFill>
-              <a:srgbClr val="D06965">
-                <a:alpha val="0"/>
-              </a:srgbClr>
-            </a:solidFill>
-            <a:prstDash val="solid"/>
-          </a:ln>
-        </p:spPr>
+            <a:off x="0" y="0"/>
+            <a:ext cx="12191695" cy="146304"/>
+          </a:xfrm>
+          <a:prstGeom prst="rect">
+            <a:avLst/>
+          </a:prstGeom>
+          <a:solidFill>
+            <a:srgbClr val="FD5108"/>
+          </a:solidFill>
+          <a:ln w="12700">
+            <a:solidFill>
+              <a:srgbClr val="FD5108"/>
+            </a:solidFill>
+            <a:prstDash val="solid"/>
+          </a:ln>
+        </p:spPr>
+        <p:txBody>
+          <a:bodyPr/>
+          <a:lstStyle/>
+          <a:p>
+            <a:endParaRPr lang="en-GB"/>
+          </a:p>
+        </p:txBody>
       </p:sp>
       <p:sp>
         <p:nvSpPr>
@@ -3328,26 +4620,29 @@
         </p:nvSpPr>
         <p:spPr>
           <a:xfrm>
-            <a:off x="-914400" y="4663440"/>
-            <a:ext cx="4206240" cy="4206240"/>
-          </a:xfrm>
-          <a:prstGeom prst="ellipse">
-            <a:avLst/>
-          </a:prstGeom>
-          <a:solidFill>
-            <a:srgbClr val="962D27">
-              <a:alpha val="22000"/>
-            </a:srgbClr>
-          </a:solidFill>
-          <a:ln w="12700">
-            <a:solidFill>
-              <a:srgbClr val="962D27">
-                <a:alpha val="0"/>
-              </a:srgbClr>
-            </a:solidFill>
-            <a:prstDash val="solid"/>
-          </a:ln>
-        </p:spPr>
+            <a:off x="11567160" y="146304"/>
+            <a:ext cx="621792" cy="6071616"/>
+          </a:xfrm>
+          <a:prstGeom prst="rect">
+            <a:avLst/>
+          </a:prstGeom>
+          <a:solidFill>
+            <a:srgbClr val="EEEFF1"/>
+          </a:solidFill>
+          <a:ln w="12700">
+            <a:solidFill>
+              <a:srgbClr val="EEEFF1"/>
+            </a:solidFill>
+            <a:prstDash val="solid"/>
+          </a:ln>
+        </p:spPr>
+        <p:txBody>
+          <a:bodyPr/>
+          <a:lstStyle/>
+          <a:p>
+            <a:endParaRPr lang="en-GB"/>
+          </a:p>
+        </p:txBody>
       </p:sp>
       <p:sp>
         <p:nvSpPr>
@@ -3357,22 +4652,29 @@
         </p:nvSpPr>
         <p:spPr>
           <a:xfrm>
-            <a:off x="0" y="0"/>
-            <a:ext cx="12191695" cy="256032"/>
-          </a:xfrm>
-          <a:prstGeom prst="rect">
-            <a:avLst/>
-          </a:prstGeom>
-          <a:solidFill>
-            <a:srgbClr val="70201D"/>
-          </a:solidFill>
-          <a:ln w="12700">
-            <a:solidFill>
-              <a:srgbClr val="70201D"/>
-            </a:solidFill>
-            <a:prstDash val="solid"/>
-          </a:ln>
-        </p:spPr>
+            <a:off x="822960" y="1261872"/>
+            <a:ext cx="73152" cy="457200"/>
+          </a:xfrm>
+          <a:prstGeom prst="rect">
+            <a:avLst/>
+          </a:prstGeom>
+          <a:solidFill>
+            <a:srgbClr val="FD5108"/>
+          </a:solidFill>
+          <a:ln w="12700">
+            <a:solidFill>
+              <a:srgbClr val="FD5108"/>
+            </a:solidFill>
+            <a:prstDash val="solid"/>
+          </a:ln>
+        </p:spPr>
+        <p:txBody>
+          <a:bodyPr/>
+          <a:lstStyle/>
+          <a:p>
+            <a:endParaRPr lang="en-GB"/>
+          </a:p>
+        </p:txBody>
       </p:sp>
       <p:sp>
         <p:nvSpPr>
@@ -3382,8 +4684,8 @@
         </p:nvSpPr>
         <p:spPr>
           <a:xfrm>
-            <a:off x="822960" y="548640"/>
-            <a:ext cx="10789920" cy="548640"/>
+            <a:off x="822960" y="438912"/>
+            <a:ext cx="5486400" cy="228600"/>
           </a:xfrm>
           <a:prstGeom prst="rect">
             <a:avLst/>
@@ -3395,7 +4697,46 @@
           <a:bodyPr wrap="square" rtlCol="0" anchor="ctr"/>
           <a:lstStyle/>
           <a:p>
-            <a:pPr indent="0" marL="0">
+            <a:pPr marL="0" indent="0">
+              <a:buNone/>
+            </a:pPr>
+            <a:r>
+              <a:rPr lang="en-US" sz="1000" b="1" dirty="0">
+                <a:solidFill>
+                  <a:srgbClr val="6A717C"/>
+                </a:solidFill>
+                <a:latin typeface="Arial" pitchFamily="34" charset="0"/>
+                <a:ea typeface="Arial" pitchFamily="34" charset="-122"/>
+                <a:cs typeface="Arial" pitchFamily="34" charset="-120"/>
+              </a:rPr>
+              <a:t>CLIENT IMPLICATIONS</a:t>
+            </a:r>
+            <a:endParaRPr lang="en-US" sz="1000" dirty="0"/>
+          </a:p>
+        </p:txBody>
+      </p:sp>
+      <p:sp>
+        <p:nvSpPr>
+          <p:cNvPr id="7" name="Text 5"/>
+          <p:cNvSpPr/>
+          <p:nvPr/>
+        </p:nvSpPr>
+        <p:spPr>
+          <a:xfrm>
+            <a:off x="822960" y="658368"/>
+            <a:ext cx="10789920" cy="594360"/>
+          </a:xfrm>
+          <a:prstGeom prst="rect">
+            <a:avLst/>
+          </a:prstGeom>
+          <a:noFill/>
+          <a:ln/>
+        </p:spPr>
+        <p:txBody>
+          <a:bodyPr wrap="square" rtlCol="0" anchor="ctr"/>
+          <a:lstStyle/>
+          <a:p>
+            <a:pPr marL="0" indent="0">
               <a:buNone/>
             </a:pPr>
             <a:r>
@@ -3407,7 +4748,7 @@
                 <a:ea typeface="Georgia" pitchFamily="34" charset="-122"/>
                 <a:cs typeface="Georgia" pitchFamily="34" charset="-120"/>
               </a:rPr>
-              <a:t>Production Guardrails Are Non-Negotiable</a:t>
+              <a:t>Implications for PE Tech Strategy Teams</a:t>
             </a:r>
             <a:endParaRPr lang="en-US" sz="3000" dirty="0"/>
           </a:p>
@@ -3415,14 +4756,14 @@
       </p:sp>
       <p:sp>
         <p:nvSpPr>
-          <p:cNvPr id="7" name="Shape 5"/>
-          <p:cNvSpPr/>
-          <p:nvPr/>
-        </p:nvSpPr>
-        <p:spPr>
-          <a:xfrm>
-            <a:off x="822960" y="1097280"/>
-            <a:ext cx="6400800" cy="5120640"/>
+          <p:cNvPr id="8" name="Shape 6"/>
+          <p:cNvSpPr/>
+          <p:nvPr/>
+        </p:nvSpPr>
+        <p:spPr>
+          <a:xfrm>
+            <a:off x="914400" y="1417320"/>
+            <a:ext cx="10241280" cy="4480560"/>
           </a:xfrm>
           <a:prstGeom prst="rect">
             <a:avLst/>
@@ -3432,22 +4773,89 @@
           </a:solidFill>
           <a:ln w="12700">
             <a:solidFill>
-              <a:srgbClr val="E5E5E5"/>
-            </a:solidFill>
-            <a:prstDash val="solid"/>
-          </a:ln>
-        </p:spPr>
-      </p:sp>
-      <p:sp>
-        <p:nvSpPr>
-          <p:cNvPr id="8" name="Text 6"/>
-          <p:cNvSpPr/>
-          <p:nvPr/>
-        </p:nvSpPr>
-        <p:spPr>
-          <a:xfrm>
-            <a:off x="1097280" y="1463040"/>
-            <a:ext cx="5669280" cy="4572000"/>
+              <a:srgbClr val="DFE3E6"/>
+            </a:solidFill>
+            <a:prstDash val="solid"/>
+          </a:ln>
+        </p:spPr>
+        <p:txBody>
+          <a:bodyPr/>
+          <a:lstStyle/>
+          <a:p>
+            <a:endParaRPr lang="en-GB"/>
+          </a:p>
+        </p:txBody>
+      </p:sp>
+      <p:sp>
+        <p:nvSpPr>
+          <p:cNvPr id="9" name="Shape 7"/>
+          <p:cNvSpPr/>
+          <p:nvPr/>
+        </p:nvSpPr>
+        <p:spPr>
+          <a:xfrm>
+            <a:off x="6035040" y="1417320"/>
+            <a:ext cx="0" cy="4480560"/>
+          </a:xfrm>
+          <a:prstGeom prst="line">
+            <a:avLst/>
+          </a:prstGeom>
+          <a:noFill/>
+          <a:ln w="15240">
+            <a:solidFill>
+              <a:srgbClr val="DFE3E6"/>
+            </a:solidFill>
+            <a:prstDash val="solid"/>
+          </a:ln>
+        </p:spPr>
+        <p:txBody>
+          <a:bodyPr/>
+          <a:lstStyle/>
+          <a:p>
+            <a:endParaRPr lang="en-GB"/>
+          </a:p>
+        </p:txBody>
+      </p:sp>
+      <p:sp>
+        <p:nvSpPr>
+          <p:cNvPr id="10" name="Shape 8"/>
+          <p:cNvSpPr/>
+          <p:nvPr/>
+        </p:nvSpPr>
+        <p:spPr>
+          <a:xfrm>
+            <a:off x="914400" y="3657600"/>
+            <a:ext cx="10241280" cy="0"/>
+          </a:xfrm>
+          <a:prstGeom prst="line">
+            <a:avLst/>
+          </a:prstGeom>
+          <a:noFill/>
+          <a:ln w="15240">
+            <a:solidFill>
+              <a:srgbClr val="DFE3E6"/>
+            </a:solidFill>
+            <a:prstDash val="solid"/>
+          </a:ln>
+        </p:spPr>
+        <p:txBody>
+          <a:bodyPr/>
+          <a:lstStyle/>
+          <a:p>
+            <a:endParaRPr lang="en-GB"/>
+          </a:p>
+        </p:txBody>
+      </p:sp>
+      <p:sp>
+        <p:nvSpPr>
+          <p:cNvPr id="11" name="Text 9"/>
+          <p:cNvSpPr/>
+          <p:nvPr/>
+        </p:nvSpPr>
+        <p:spPr>
+          <a:xfrm>
+            <a:off x="1143000" y="1691640"/>
+            <a:ext cx="4526280" cy="1737360"/>
           </a:xfrm>
           <a:prstGeom prst="rect">
             <a:avLst/>
@@ -3459,15 +4867,11 @@
           <a:bodyPr wrap="square" rtlCol="0" anchor="t"/>
           <a:lstStyle/>
           <a:p>
-            <a:pPr marL="228600" indent="-228600">
-              <a:spcAft>
-                <a:spcPts val="600"/>
-              </a:spcAft>
-              <a:buSzPct val="100000"/>
-              <a:buChar char="•"/>
+            <a:pPr marL="0" indent="0">
+              <a:buNone/>
             </a:pPr>
             <a:r>
-              <a:rPr lang="en-US" sz="1800" dirty="0">
+              <a:rPr lang="en-US" sz="1400" dirty="0">
                 <a:solidFill>
                   <a:srgbClr val="0C0C0C"/>
                 </a:solidFill>
@@ -3475,20 +4879,38 @@
                 <a:ea typeface="Arial" pitchFamily="34" charset="-122"/>
                 <a:cs typeface="Arial" pitchFamily="34" charset="-120"/>
               </a:rPr>
-              <a:t>Secrets and repository hygiene</a:t>
+              <a:t>Evaluate AI code quality explicitly, not just output velocity</a:t>
             </a:r>
-            <a:endParaRPr lang="en-US" sz="1800" dirty="0"/>
-          </a:p>
-          <a:p>
-            <a:pPr marL="228600" indent="-228600">
-              <a:spcAft>
-                <a:spcPts val="600"/>
-              </a:spcAft>
-              <a:buSzPct val="100000"/>
-              <a:buChar char="•"/>
+            <a:endParaRPr lang="en-US" sz="1400" dirty="0"/>
+          </a:p>
+        </p:txBody>
+      </p:sp>
+      <p:sp>
+        <p:nvSpPr>
+          <p:cNvPr id="12" name="Text 10"/>
+          <p:cNvSpPr/>
+          <p:nvPr/>
+        </p:nvSpPr>
+        <p:spPr>
+          <a:xfrm>
+            <a:off x="6263640" y="1691640"/>
+            <a:ext cx="4526280" cy="1737360"/>
+          </a:xfrm>
+          <a:prstGeom prst="rect">
+            <a:avLst/>
+          </a:prstGeom>
+          <a:noFill/>
+          <a:ln/>
+        </p:spPr>
+        <p:txBody>
+          <a:bodyPr wrap="square" rtlCol="0" anchor="t"/>
+          <a:lstStyle/>
+          <a:p>
+            <a:pPr marL="0" indent="0">
+              <a:buNone/>
             </a:pPr>
             <a:r>
-              <a:rPr lang="en-US" sz="1800" dirty="0">
+              <a:rPr lang="en-US" sz="1400" dirty="0">
                 <a:solidFill>
                   <a:srgbClr val="0C0C0C"/>
                 </a:solidFill>
@@ -3496,20 +4918,38 @@
                 <a:ea typeface="Arial" pitchFamily="34" charset="-122"/>
                 <a:cs typeface="Arial" pitchFamily="34" charset="-120"/>
               </a:rPr>
-              <a:t>Security and API hardening</a:t>
+              <a:t>Developer productivity gains are real and should be quantified in value-creation plans</a:t>
             </a:r>
-            <a:endParaRPr lang="en-US" sz="1800" dirty="0"/>
-          </a:p>
-          <a:p>
-            <a:pPr marL="228600" indent="-228600">
-              <a:spcAft>
-                <a:spcPts val="600"/>
-              </a:spcAft>
-              <a:buSzPct val="100000"/>
-              <a:buChar char="•"/>
+            <a:endParaRPr lang="en-US" sz="1400" dirty="0"/>
+          </a:p>
+        </p:txBody>
+      </p:sp>
+      <p:sp>
+        <p:nvSpPr>
+          <p:cNvPr id="13" name="Text 11"/>
+          <p:cNvSpPr/>
+          <p:nvPr/>
+        </p:nvSpPr>
+        <p:spPr>
+          <a:xfrm>
+            <a:off x="1143000" y="3931920"/>
+            <a:ext cx="4526280" cy="1737360"/>
+          </a:xfrm>
+          <a:prstGeom prst="rect">
+            <a:avLst/>
+          </a:prstGeom>
+          <a:noFill/>
+          <a:ln/>
+        </p:spPr>
+        <p:txBody>
+          <a:bodyPr wrap="square" rtlCol="0" anchor="t"/>
+          <a:lstStyle/>
+          <a:p>
+            <a:pPr marL="0" indent="0">
+              <a:buNone/>
             </a:pPr>
             <a:r>
-              <a:rPr lang="en-US" sz="1800" dirty="0">
+              <a:rPr lang="en-US" sz="1400" dirty="0">
                 <a:solidFill>
                   <a:srgbClr val="0C0C0C"/>
                 </a:solidFill>
@@ -3517,20 +4957,38 @@
                 <a:ea typeface="Arial" pitchFamily="34" charset="-122"/>
                 <a:cs typeface="Arial" pitchFamily="34" charset="-120"/>
               </a:rPr>
-              <a:t>High availability and reliability controls</a:t>
+              <a:t>Agentic workflows can push delivery toward semi-autonomous execution</a:t>
             </a:r>
-            <a:endParaRPr lang="en-US" sz="1800" dirty="0"/>
-          </a:p>
-          <a:p>
-            <a:pPr marL="228600" indent="-228600">
-              <a:spcAft>
-                <a:spcPts val="600"/>
-              </a:spcAft>
-              <a:buSzPct val="100000"/>
-              <a:buChar char="•"/>
+            <a:endParaRPr lang="en-US" sz="1400" dirty="0"/>
+          </a:p>
+        </p:txBody>
+      </p:sp>
+      <p:sp>
+        <p:nvSpPr>
+          <p:cNvPr id="14" name="Text 12"/>
+          <p:cNvSpPr/>
+          <p:nvPr/>
+        </p:nvSpPr>
+        <p:spPr>
+          <a:xfrm>
+            <a:off x="6263640" y="3931920"/>
+            <a:ext cx="4526280" cy="1737360"/>
+          </a:xfrm>
+          <a:prstGeom prst="rect">
+            <a:avLst/>
+          </a:prstGeom>
+          <a:noFill/>
+          <a:ln/>
+        </p:spPr>
+        <p:txBody>
+          <a:bodyPr wrap="square" rtlCol="0" anchor="t"/>
+          <a:lstStyle/>
+          <a:p>
+            <a:pPr marL="0" indent="0">
+              <a:buNone/>
             </a:pPr>
             <a:r>
-              <a:rPr lang="en-US" sz="1800" dirty="0">
+              <a:rPr lang="en-US" sz="1400" dirty="0">
                 <a:solidFill>
                   <a:srgbClr val="0C0C0C"/>
                 </a:solidFill>
@@ -3538,47 +4996,54 @@
                 <a:ea typeface="Arial" pitchFamily="34" charset="-122"/>
                 <a:cs typeface="Arial" pitchFamily="34" charset="-120"/>
               </a:rPr>
-              <a:t>Working model: free-form for POCs, structured step-by-step for production</a:t>
+              <a:t>In diligence, assess AI velocity and software governance together</a:t>
             </a:r>
-            <a:endParaRPr lang="en-US" sz="1800" dirty="0"/>
-          </a:p>
-        </p:txBody>
-      </p:sp>
-      <p:sp>
-        <p:nvSpPr>
-          <p:cNvPr id="9" name="Shape 7"/>
-          <p:cNvSpPr/>
-          <p:nvPr/>
-        </p:nvSpPr>
-        <p:spPr>
-          <a:xfrm>
-            <a:off x="0" y="6217920"/>
-            <a:ext cx="12191695" cy="640080"/>
-          </a:xfrm>
-          <a:prstGeom prst="rect">
-            <a:avLst/>
-          </a:prstGeom>
-          <a:solidFill>
-            <a:srgbClr val="70201D"/>
-          </a:solidFill>
-          <a:ln w="12700">
-            <a:solidFill>
-              <a:srgbClr val="70201D"/>
-            </a:solidFill>
-            <a:prstDash val="solid"/>
-          </a:ln>
-        </p:spPr>
-      </p:sp>
-      <p:sp>
-        <p:nvSpPr>
-          <p:cNvPr id="10" name="Text 8"/>
-          <p:cNvSpPr/>
-          <p:nvPr/>
-        </p:nvSpPr>
-        <p:spPr>
-          <a:xfrm>
-            <a:off x="731520" y="6327648"/>
-            <a:ext cx="10789920" cy="365760"/>
+            <a:endParaRPr lang="en-US" sz="1400" dirty="0"/>
+          </a:p>
+        </p:txBody>
+      </p:sp>
+      <p:sp>
+        <p:nvSpPr>
+          <p:cNvPr id="15" name="Shape 13"/>
+          <p:cNvSpPr/>
+          <p:nvPr/>
+        </p:nvSpPr>
+        <p:spPr>
+          <a:xfrm>
+            <a:off x="822960" y="6217920"/>
+            <a:ext cx="10515600" cy="566928"/>
+          </a:xfrm>
+          <a:prstGeom prst="rect">
+            <a:avLst/>
+          </a:prstGeom>
+          <a:solidFill>
+            <a:srgbClr val="FD5108"/>
+          </a:solidFill>
+          <a:ln w="12700">
+            <a:solidFill>
+              <a:srgbClr val="FD5108"/>
+            </a:solidFill>
+            <a:prstDash val="solid"/>
+          </a:ln>
+        </p:spPr>
+        <p:txBody>
+          <a:bodyPr/>
+          <a:lstStyle/>
+          <a:p>
+            <a:endParaRPr lang="en-GB"/>
+          </a:p>
+        </p:txBody>
+      </p:sp>
+      <p:sp>
+        <p:nvSpPr>
+          <p:cNvPr id="16" name="Text 14"/>
+          <p:cNvSpPr/>
+          <p:nvPr/>
+        </p:nvSpPr>
+        <p:spPr>
+          <a:xfrm>
+            <a:off x="1051560" y="6373368"/>
+            <a:ext cx="10058400" cy="320040"/>
           </a:xfrm>
           <a:prstGeom prst="rect">
             <a:avLst/>
@@ -3590,11 +5055,11 @@
           <a:bodyPr wrap="square" rtlCol="0" anchor="ctr"/>
           <a:lstStyle/>
           <a:p>
-            <a:pPr indent="0" marL="0">
+            <a:pPr marL="0" indent="0">
               <a:buNone/>
             </a:pPr>
             <a:r>
-              <a:rPr lang="en-US" sz="1400" b="1" dirty="0">
+              <a:rPr lang="en-US" sz="1300" b="1" dirty="0">
                 <a:solidFill>
                   <a:srgbClr val="FFFFFF"/>
                 </a:solidFill>
@@ -3602,9 +5067,9 @@
                 <a:ea typeface="Arial" pitchFamily="34" charset="-122"/>
                 <a:cs typeface="Arial" pitchFamily="34" charset="-120"/>
               </a:rPr>
-              <a:t>Speed scales only when governance scales with it.</a:t>
+              <a:t>The new diligence question is not "Is AI used?" but "Is it governed?"</a:t>
             </a:r>
-            <a:endParaRPr lang="en-US" sz="1400" dirty="0"/>
+            <a:endParaRPr lang="en-US" sz="1300" dirty="0"/>
           </a:p>
         </p:txBody>
       </p:sp>
@@ -3648,15 +5113,22 @@
             <a:avLst/>
           </a:prstGeom>
           <a:solidFill>
-            <a:srgbClr val="F5F5F5"/>
-          </a:solidFill>
-          <a:ln w="12700">
-            <a:solidFill>
-              <a:srgbClr val="F5F5F5"/>
-            </a:solidFill>
-            <a:prstDash val="solid"/>
-          </a:ln>
-        </p:spPr>
+            <a:srgbClr val="F5F7F8"/>
+          </a:solidFill>
+          <a:ln w="12700">
+            <a:solidFill>
+              <a:srgbClr val="F5F7F8"/>
+            </a:solidFill>
+            <a:prstDash val="solid"/>
+          </a:ln>
+        </p:spPr>
+        <p:txBody>
+          <a:bodyPr/>
+          <a:lstStyle/>
+          <a:p>
+            <a:endParaRPr lang="en-GB"/>
+          </a:p>
+        </p:txBody>
       </p:sp>
       <p:sp>
         <p:nvSpPr>
@@ -3666,26 +5138,29 @@
         </p:nvSpPr>
         <p:spPr>
           <a:xfrm>
-            <a:off x="8412480" y="-548640"/>
-            <a:ext cx="3840480" cy="3840480"/>
-          </a:xfrm>
-          <a:prstGeom prst="ellipse">
-            <a:avLst/>
-          </a:prstGeom>
-          <a:solidFill>
-            <a:srgbClr val="D06965">
-              <a:alpha val="35000"/>
-            </a:srgbClr>
-          </a:solidFill>
-          <a:ln w="12700">
-            <a:solidFill>
-              <a:srgbClr val="D06965">
-                <a:alpha val="0"/>
-              </a:srgbClr>
-            </a:solidFill>
-            <a:prstDash val="solid"/>
-          </a:ln>
-        </p:spPr>
+            <a:off x="0" y="0"/>
+            <a:ext cx="12191695" cy="146304"/>
+          </a:xfrm>
+          <a:prstGeom prst="rect">
+            <a:avLst/>
+          </a:prstGeom>
+          <a:solidFill>
+            <a:srgbClr val="FD5108"/>
+          </a:solidFill>
+          <a:ln w="12700">
+            <a:solidFill>
+              <a:srgbClr val="FD5108"/>
+            </a:solidFill>
+            <a:prstDash val="solid"/>
+          </a:ln>
+        </p:spPr>
+        <p:txBody>
+          <a:bodyPr/>
+          <a:lstStyle/>
+          <a:p>
+            <a:endParaRPr lang="en-GB"/>
+          </a:p>
+        </p:txBody>
       </p:sp>
       <p:sp>
         <p:nvSpPr>
@@ -3695,26 +5170,29 @@
         </p:nvSpPr>
         <p:spPr>
           <a:xfrm>
-            <a:off x="-914400" y="4663440"/>
-            <a:ext cx="4206240" cy="4206240"/>
-          </a:xfrm>
-          <a:prstGeom prst="ellipse">
-            <a:avLst/>
-          </a:prstGeom>
-          <a:solidFill>
-            <a:srgbClr val="962D27">
-              <a:alpha val="22000"/>
-            </a:srgbClr>
-          </a:solidFill>
-          <a:ln w="12700">
-            <a:solidFill>
-              <a:srgbClr val="962D27">
-                <a:alpha val="0"/>
-              </a:srgbClr>
-            </a:solidFill>
-            <a:prstDash val="solid"/>
-          </a:ln>
-        </p:spPr>
+            <a:off x="11567160" y="146304"/>
+            <a:ext cx="621792" cy="6071616"/>
+          </a:xfrm>
+          <a:prstGeom prst="rect">
+            <a:avLst/>
+          </a:prstGeom>
+          <a:solidFill>
+            <a:srgbClr val="EEEFF1"/>
+          </a:solidFill>
+          <a:ln w="12700">
+            <a:solidFill>
+              <a:srgbClr val="EEEFF1"/>
+            </a:solidFill>
+            <a:prstDash val="solid"/>
+          </a:ln>
+        </p:spPr>
+        <p:txBody>
+          <a:bodyPr/>
+          <a:lstStyle/>
+          <a:p>
+            <a:endParaRPr lang="en-GB"/>
+          </a:p>
+        </p:txBody>
       </p:sp>
       <p:sp>
         <p:nvSpPr>
@@ -3724,33 +5202,74 @@
         </p:nvSpPr>
         <p:spPr>
           <a:xfrm>
-            <a:off x="0" y="0"/>
-            <a:ext cx="12191695" cy="256032"/>
-          </a:xfrm>
-          <a:prstGeom prst="rect">
-            <a:avLst/>
-          </a:prstGeom>
-          <a:solidFill>
-            <a:srgbClr val="70201D"/>
-          </a:solidFill>
-          <a:ln w="12700">
-            <a:solidFill>
-              <a:srgbClr val="70201D"/>
-            </a:solidFill>
-            <a:prstDash val="solid"/>
-          </a:ln>
-        </p:spPr>
-      </p:sp>
-      <p:sp>
-        <p:nvSpPr>
-          <p:cNvPr id="6" name="Text 4"/>
-          <p:cNvSpPr/>
-          <p:nvPr/>
-        </p:nvSpPr>
-        <p:spPr>
-          <a:xfrm>
-            <a:off x="822960" y="548640"/>
-            <a:ext cx="10789920" cy="548640"/>
+            <a:off x="822960" y="1261872"/>
+            <a:ext cx="73152" cy="457200"/>
+          </a:xfrm>
+          <a:prstGeom prst="rect">
+            <a:avLst/>
+          </a:prstGeom>
+          <a:solidFill>
+            <a:srgbClr val="FD5108"/>
+          </a:solidFill>
+          <a:ln w="12700">
+            <a:solidFill>
+              <a:srgbClr val="FD5108"/>
+            </a:solidFill>
+            <a:prstDash val="solid"/>
+          </a:ln>
+        </p:spPr>
+        <p:txBody>
+          <a:bodyPr/>
+          <a:lstStyle/>
+          <a:p>
+            <a:endParaRPr lang="en-GB"/>
+          </a:p>
+        </p:txBody>
+      </p:sp>
+      <p:sp>
+        <p:nvSpPr>
+          <p:cNvPr id="6" name="Shape 4"/>
+          <p:cNvSpPr/>
+          <p:nvPr/>
+        </p:nvSpPr>
+        <p:spPr>
+          <a:xfrm>
+            <a:off x="822960" y="960120"/>
+            <a:ext cx="10561320" cy="4983480"/>
+          </a:xfrm>
+          <a:prstGeom prst="roundRect">
+            <a:avLst>
+              <a:gd name="adj" fmla="val 1284"/>
+            </a:avLst>
+          </a:prstGeom>
+          <a:solidFill>
+            <a:srgbClr val="1F232A"/>
+          </a:solidFill>
+          <a:ln w="12700">
+            <a:solidFill>
+              <a:srgbClr val="1F232A"/>
+            </a:solidFill>
+            <a:prstDash val="solid"/>
+          </a:ln>
+        </p:spPr>
+        <p:txBody>
+          <a:bodyPr/>
+          <a:lstStyle/>
+          <a:p>
+            <a:endParaRPr lang="en-GB"/>
+          </a:p>
+        </p:txBody>
+      </p:sp>
+      <p:sp>
+        <p:nvSpPr>
+          <p:cNvPr id="7" name="Text 5"/>
+          <p:cNvSpPr/>
+          <p:nvPr/>
+        </p:nvSpPr>
+        <p:spPr>
+          <a:xfrm>
+            <a:off x="1234440" y="1325880"/>
+            <a:ext cx="9601200" cy="731520"/>
           </a:xfrm>
           <a:prstGeom prst="rect">
             <a:avLst/>
@@ -3762,48 +5281,23 @@
           <a:bodyPr wrap="square" rtlCol="0" anchor="ctr"/>
           <a:lstStyle/>
           <a:p>
-            <a:pPr indent="0" marL="0">
+            <a:pPr marL="0" indent="0" algn="ctr">
               <a:buNone/>
             </a:pPr>
             <a:r>
-              <a:rPr lang="en-US" sz="3000" b="1" dirty="0">
+              <a:rPr lang="en-US" sz="3400" b="1" dirty="0">
                 <a:solidFill>
-                  <a:srgbClr val="0C0C0C"/>
+                  <a:srgbClr val="FFFFFF"/>
                 </a:solidFill>
                 <a:latin typeface="Georgia" pitchFamily="34" charset="0"/>
                 <a:ea typeface="Georgia" pitchFamily="34" charset="-122"/>
                 <a:cs typeface="Georgia" pitchFamily="34" charset="-120"/>
               </a:rPr>
-              <a:t>Implications for PE Tech Strategy Teams</a:t>
+              <a:t>Disclaimer and Call to Action</a:t>
             </a:r>
-            <a:endParaRPr lang="en-US" sz="3000" dirty="0"/>
-          </a:p>
-        </p:txBody>
-      </p:sp>
-      <p:sp>
-        <p:nvSpPr>
-          <p:cNvPr id="7" name="Shape 5"/>
-          <p:cNvSpPr/>
-          <p:nvPr/>
-        </p:nvSpPr>
-        <p:spPr>
-          <a:xfrm>
-            <a:off x="822960" y="1097280"/>
-            <a:ext cx="6400800" cy="5120640"/>
-          </a:xfrm>
-          <a:prstGeom prst="rect">
-            <a:avLst/>
-          </a:prstGeom>
-          <a:solidFill>
-            <a:srgbClr val="FFFFFF"/>
-          </a:solidFill>
-          <a:ln w="12700">
-            <a:solidFill>
-              <a:srgbClr val="E5E5E5"/>
-            </a:solidFill>
-            <a:prstDash val="solid"/>
-          </a:ln>
-        </p:spPr>
+            <a:endParaRPr lang="en-US" sz="3400" dirty="0"/>
+          </a:p>
+        </p:txBody>
       </p:sp>
       <p:sp>
         <p:nvSpPr>
@@ -3813,8 +5307,8 @@
         </p:nvSpPr>
         <p:spPr>
           <a:xfrm>
-            <a:off x="1097280" y="1463040"/>
-            <a:ext cx="5669280" cy="4572000"/>
+            <a:off x="1417320" y="2240280"/>
+            <a:ext cx="4434840" cy="2377440"/>
           </a:xfrm>
           <a:prstGeom prst="rect">
             <a:avLst/>
@@ -3826,126 +5320,131 @@
           <a:bodyPr wrap="square" rtlCol="0" anchor="t"/>
           <a:lstStyle/>
           <a:p>
-            <a:pPr marL="228600" indent="-228600">
-              <a:spcAft>
-                <a:spcPts val="600"/>
-              </a:spcAft>
-              <a:buSzPct val="100000"/>
-              <a:buChar char="•"/>
+            <a:pPr marL="0" indent="0">
+              <a:buNone/>
             </a:pPr>
             <a:r>
-              <a:rPr lang="en-US" sz="1800" dirty="0">
+              <a:rPr lang="en-US" sz="1600" dirty="0">
                 <a:solidFill>
-                  <a:srgbClr val="0C0C0C"/>
+                  <a:srgbClr val="E8EBEF"/>
                 </a:solidFill>
                 <a:latin typeface="Arial" pitchFamily="34" charset="0"/>
                 <a:ea typeface="Arial" pitchFamily="34" charset="-122"/>
                 <a:cs typeface="Arial" pitchFamily="34" charset="-120"/>
               </a:rPr>
-              <a:t>Evaluate AI code quality explicitly, not just output velocity</a:t>
+              <a:t>• This deck itself was 100% </a:t>
             </a:r>
-            <a:endParaRPr lang="en-US" sz="1800" dirty="0"/>
-          </a:p>
-          <a:p>
-            <a:pPr marL="228600" indent="-228600">
-              <a:spcAft>
-                <a:spcPts val="600"/>
-              </a:spcAft>
-              <a:buSzPct val="100000"/>
-              <a:buChar char="•"/>
-            </a:pPr>
             <a:r>
-              <a:rPr lang="en-US" sz="1800" dirty="0">
+              <a:rPr lang="en-US" sz="1600" dirty="0" err="1">
                 <a:solidFill>
-                  <a:srgbClr val="0C0C0C"/>
+                  <a:srgbClr val="E8EBEF"/>
                 </a:solidFill>
                 <a:latin typeface="Arial" pitchFamily="34" charset="0"/>
                 <a:ea typeface="Arial" pitchFamily="34" charset="-122"/>
                 <a:cs typeface="Arial" pitchFamily="34" charset="-120"/>
               </a:rPr>
-              <a:t>Developer productivity gains are real and should be quantified in value-creation plans</a:t>
+              <a:t>vibecoded</a:t>
             </a:r>
-            <a:endParaRPr lang="en-US" sz="1800" dirty="0"/>
-          </a:p>
-          <a:p>
-            <a:pPr marL="228600" indent="-228600">
-              <a:spcAft>
-                <a:spcPts val="600"/>
-              </a:spcAft>
-              <a:buSzPct val="100000"/>
-              <a:buChar char="•"/>
-            </a:pPr>
             <a:r>
-              <a:rPr lang="en-US" sz="1800" dirty="0">
+              <a:rPr lang="en-US" sz="1600" dirty="0">
                 <a:solidFill>
-                  <a:srgbClr val="0C0C0C"/>
+                  <a:srgbClr val="E8EBEF"/>
                 </a:solidFill>
                 <a:latin typeface="Arial" pitchFamily="34" charset="0"/>
                 <a:ea typeface="Arial" pitchFamily="34" charset="-122"/>
                 <a:cs typeface="Arial" pitchFamily="34" charset="-120"/>
               </a:rPr>
-              <a:t>Agentic workflows can push delivery toward semi-autonomous execution</a:t>
+              <a:t>; if I was presenting externally (“production”), I would have edited and quality-controlled further
+• The same pattern applies to delivery: rapid generation plus disciplined review
+</a:t>
             </a:r>
-            <a:endParaRPr lang="en-US" sz="1800" dirty="0"/>
-          </a:p>
-          <a:p>
-            <a:pPr marL="228600" indent="-228600">
-              <a:spcAft>
-                <a:spcPts val="600"/>
-              </a:spcAft>
-              <a:buSzPct val="100000"/>
-              <a:buChar char="•"/>
+            <a:endParaRPr lang="en-US" sz="1600" dirty="0"/>
+          </a:p>
+        </p:txBody>
+      </p:sp>
+      <p:sp>
+        <p:nvSpPr>
+          <p:cNvPr id="9" name="Text 7"/>
+          <p:cNvSpPr/>
+          <p:nvPr/>
+        </p:nvSpPr>
+        <p:spPr>
+          <a:xfrm>
+            <a:off x="6355080" y="2240280"/>
+            <a:ext cx="4434840" cy="2377440"/>
+          </a:xfrm>
+          <a:prstGeom prst="rect">
+            <a:avLst/>
+          </a:prstGeom>
+          <a:noFill/>
+          <a:ln/>
+        </p:spPr>
+        <p:txBody>
+          <a:bodyPr wrap="square" rtlCol="0" anchor="t"/>
+          <a:lstStyle/>
+          <a:p>
+            <a:pPr marL="0" indent="0">
+              <a:buNone/>
             </a:pPr>
             <a:r>
-              <a:rPr lang="en-US" sz="1800" dirty="0">
+              <a:rPr lang="en-US" sz="1600" dirty="0">
                 <a:solidFill>
-                  <a:srgbClr val="0C0C0C"/>
+                  <a:srgbClr val="E8EBEF"/>
                 </a:solidFill>
                 <a:latin typeface="Arial" pitchFamily="34" charset="0"/>
                 <a:ea typeface="Arial" pitchFamily="34" charset="-122"/>
                 <a:cs typeface="Arial" pitchFamily="34" charset="-120"/>
               </a:rPr>
-              <a:t>In diligence, assess AI velocity and software governance together</a:t>
+              <a:t>• You do not need to be a traditional engineer to start learning this workflow
+• Team ask: test Codex, Claude, or GitHub Copilot today and bring one client-relevant insight back
+</a:t>
             </a:r>
-            <a:endParaRPr lang="en-US" sz="1800" dirty="0"/>
-          </a:p>
-        </p:txBody>
-      </p:sp>
-      <p:sp>
-        <p:nvSpPr>
-          <p:cNvPr id="9" name="Shape 7"/>
-          <p:cNvSpPr/>
-          <p:nvPr/>
-        </p:nvSpPr>
-        <p:spPr>
-          <a:xfrm>
-            <a:off x="0" y="6217920"/>
-            <a:ext cx="12191695" cy="640080"/>
-          </a:xfrm>
-          <a:prstGeom prst="rect">
-            <a:avLst/>
-          </a:prstGeom>
-          <a:solidFill>
-            <a:srgbClr val="70201D"/>
-          </a:solidFill>
-          <a:ln w="12700">
-            <a:solidFill>
-              <a:srgbClr val="70201D"/>
-            </a:solidFill>
-            <a:prstDash val="solid"/>
-          </a:ln>
-        </p:spPr>
-      </p:sp>
-      <p:sp>
-        <p:nvSpPr>
-          <p:cNvPr id="10" name="Text 8"/>
-          <p:cNvSpPr/>
-          <p:nvPr/>
-        </p:nvSpPr>
-        <p:spPr>
-          <a:xfrm>
-            <a:off x="731520" y="6327648"/>
-            <a:ext cx="10789920" cy="365760"/>
+            <a:endParaRPr lang="en-US" sz="1600" dirty="0"/>
+          </a:p>
+        </p:txBody>
+      </p:sp>
+      <p:sp>
+        <p:nvSpPr>
+          <p:cNvPr id="10" name="Shape 8"/>
+          <p:cNvSpPr/>
+          <p:nvPr/>
+        </p:nvSpPr>
+        <p:spPr>
+          <a:xfrm>
+            <a:off x="822960" y="6217920"/>
+            <a:ext cx="10515600" cy="566928"/>
+          </a:xfrm>
+          <a:prstGeom prst="rect">
+            <a:avLst/>
+          </a:prstGeom>
+          <a:solidFill>
+            <a:srgbClr val="FD5108"/>
+          </a:solidFill>
+          <a:ln w="12700">
+            <a:solidFill>
+              <a:srgbClr val="FD5108"/>
+            </a:solidFill>
+            <a:prstDash val="solid"/>
+          </a:ln>
+        </p:spPr>
+        <p:txBody>
+          <a:bodyPr/>
+          <a:lstStyle/>
+          <a:p>
+            <a:endParaRPr lang="en-GB"/>
+          </a:p>
+        </p:txBody>
+      </p:sp>
+      <p:sp>
+        <p:nvSpPr>
+          <p:cNvPr id="11" name="Text 9"/>
+          <p:cNvSpPr/>
+          <p:nvPr/>
+        </p:nvSpPr>
+        <p:spPr>
+          <a:xfrm>
+            <a:off x="1051560" y="6373368"/>
+            <a:ext cx="10058400" cy="320040"/>
           </a:xfrm>
           <a:prstGeom prst="rect">
             <a:avLst/>
@@ -3957,11 +5456,11 @@
           <a:bodyPr wrap="square" rtlCol="0" anchor="ctr"/>
           <a:lstStyle/>
           <a:p>
-            <a:pPr indent="0" marL="0">
+            <a:pPr marL="0" indent="0">
               <a:buNone/>
             </a:pPr>
             <a:r>
-              <a:rPr lang="en-US" sz="1400" b="1" dirty="0">
+              <a:rPr lang="en-US" sz="1300" b="1" dirty="0">
                 <a:solidFill>
                   <a:srgbClr val="FFFFFF"/>
                 </a:solidFill>
@@ -3969,376 +5468,9 @@
                 <a:ea typeface="Arial" pitchFamily="34" charset="-122"/>
                 <a:cs typeface="Arial" pitchFamily="34" charset="-120"/>
               </a:rPr>
-              <a:t>The new diligence question is not "Is AI used?" but "Is it governed?"</a:t>
+              <a:t>Start using it now, but operate it like a professional software team if you’re going to sell what you make.</a:t>
             </a:r>
-            <a:endParaRPr lang="en-US" sz="1400" dirty="0"/>
-          </a:p>
-        </p:txBody>
-      </p:sp>
-    </p:spTree>
-  </p:cSld>
-  <p:clrMapOvr>
-    <a:masterClrMapping/>
-  </p:clrMapOvr>
-</p:sld>
-</file>
-
-<file path=ppt/slides/slide8.xml><?xml version="1.0" encoding="utf-8"?>
-<p:sld xmlns:a="http://schemas.openxmlformats.org/drawingml/2006/main" xmlns:r="http://schemas.openxmlformats.org/officeDocument/2006/relationships" xmlns:p="http://schemas.openxmlformats.org/presentationml/2006/main">
-  <p:cSld name="Slide 8">
-    <p:spTree>
-      <p:nvGrpSpPr>
-        <p:cNvPr id="1" name=""/>
-        <p:cNvGrpSpPr/>
-        <p:nvPr/>
-      </p:nvGrpSpPr>
-      <p:grpSpPr>
-        <a:xfrm>
-          <a:off x="0" y="0"/>
-          <a:ext cx="0" cy="0"/>
-          <a:chOff x="0" y="0"/>
-          <a:chExt cx="0" cy="0"/>
-        </a:xfrm>
-      </p:grpSpPr>
-      <p:sp>
-        <p:nvSpPr>
-          <p:cNvPr id="2" name="Shape 0"/>
-          <p:cNvSpPr/>
-          <p:nvPr/>
-        </p:nvSpPr>
-        <p:spPr>
-          <a:xfrm>
-            <a:off x="0" y="0"/>
-            <a:ext cx="12191695" cy="6858000"/>
-          </a:xfrm>
-          <a:prstGeom prst="rect">
-            <a:avLst/>
-          </a:prstGeom>
-          <a:solidFill>
-            <a:srgbClr val="F5F5F5"/>
-          </a:solidFill>
-          <a:ln w="12700">
-            <a:solidFill>
-              <a:srgbClr val="F5F5F5"/>
-            </a:solidFill>
-            <a:prstDash val="solid"/>
-          </a:ln>
-        </p:spPr>
-      </p:sp>
-      <p:sp>
-        <p:nvSpPr>
-          <p:cNvPr id="3" name="Shape 1"/>
-          <p:cNvSpPr/>
-          <p:nvPr/>
-        </p:nvSpPr>
-        <p:spPr>
-          <a:xfrm>
-            <a:off x="8412480" y="-548640"/>
-            <a:ext cx="3840480" cy="3840480"/>
-          </a:xfrm>
-          <a:prstGeom prst="ellipse">
-            <a:avLst/>
-          </a:prstGeom>
-          <a:solidFill>
-            <a:srgbClr val="D06965">
-              <a:alpha val="35000"/>
-            </a:srgbClr>
-          </a:solidFill>
-          <a:ln w="12700">
-            <a:solidFill>
-              <a:srgbClr val="D06965">
-                <a:alpha val="0"/>
-              </a:srgbClr>
-            </a:solidFill>
-            <a:prstDash val="solid"/>
-          </a:ln>
-        </p:spPr>
-      </p:sp>
-      <p:sp>
-        <p:nvSpPr>
-          <p:cNvPr id="4" name="Shape 2"/>
-          <p:cNvSpPr/>
-          <p:nvPr/>
-        </p:nvSpPr>
-        <p:spPr>
-          <a:xfrm>
-            <a:off x="-914400" y="4663440"/>
-            <a:ext cx="4206240" cy="4206240"/>
-          </a:xfrm>
-          <a:prstGeom prst="ellipse">
-            <a:avLst/>
-          </a:prstGeom>
-          <a:solidFill>
-            <a:srgbClr val="962D27">
-              <a:alpha val="22000"/>
-            </a:srgbClr>
-          </a:solidFill>
-          <a:ln w="12700">
-            <a:solidFill>
-              <a:srgbClr val="962D27">
-                <a:alpha val="0"/>
-              </a:srgbClr>
-            </a:solidFill>
-            <a:prstDash val="solid"/>
-          </a:ln>
-        </p:spPr>
-      </p:sp>
-      <p:sp>
-        <p:nvSpPr>
-          <p:cNvPr id="5" name="Shape 3"/>
-          <p:cNvSpPr/>
-          <p:nvPr/>
-        </p:nvSpPr>
-        <p:spPr>
-          <a:xfrm>
-            <a:off x="0" y="0"/>
-            <a:ext cx="12191695" cy="256032"/>
-          </a:xfrm>
-          <a:prstGeom prst="rect">
-            <a:avLst/>
-          </a:prstGeom>
-          <a:solidFill>
-            <a:srgbClr val="70201D"/>
-          </a:solidFill>
-          <a:ln w="12700">
-            <a:solidFill>
-              <a:srgbClr val="70201D"/>
-            </a:solidFill>
-            <a:prstDash val="solid"/>
-          </a:ln>
-        </p:spPr>
-      </p:sp>
-      <p:sp>
-        <p:nvSpPr>
-          <p:cNvPr id="6" name="Text 4"/>
-          <p:cNvSpPr/>
-          <p:nvPr/>
-        </p:nvSpPr>
-        <p:spPr>
-          <a:xfrm>
-            <a:off x="822960" y="548640"/>
-            <a:ext cx="10789920" cy="548640"/>
-          </a:xfrm>
-          <a:prstGeom prst="rect">
-            <a:avLst/>
-          </a:prstGeom>
-          <a:noFill/>
-          <a:ln/>
-        </p:spPr>
-        <p:txBody>
-          <a:bodyPr wrap="square" rtlCol="0" anchor="ctr"/>
-          <a:lstStyle/>
-          <a:p>
-            <a:pPr indent="0" marL="0">
-              <a:buNone/>
-            </a:pPr>
-            <a:r>
-              <a:rPr lang="en-US" sz="3000" b="1" dirty="0">
-                <a:solidFill>
-                  <a:srgbClr val="0C0C0C"/>
-                </a:solidFill>
-                <a:latin typeface="Georgia" pitchFamily="34" charset="0"/>
-                <a:ea typeface="Georgia" pitchFamily="34" charset="-122"/>
-                <a:cs typeface="Georgia" pitchFamily="34" charset="-120"/>
-              </a:rPr>
-              <a:t>Disclaimer and Call to Action</a:t>
-            </a:r>
-            <a:endParaRPr lang="en-US" sz="3000" dirty="0"/>
-          </a:p>
-        </p:txBody>
-      </p:sp>
-      <p:sp>
-        <p:nvSpPr>
-          <p:cNvPr id="7" name="Shape 5"/>
-          <p:cNvSpPr/>
-          <p:nvPr/>
-        </p:nvSpPr>
-        <p:spPr>
-          <a:xfrm>
-            <a:off x="822960" y="1097280"/>
-            <a:ext cx="6400800" cy="5120640"/>
-          </a:xfrm>
-          <a:prstGeom prst="rect">
-            <a:avLst/>
-          </a:prstGeom>
-          <a:solidFill>
-            <a:srgbClr val="FFFFFF"/>
-          </a:solidFill>
-          <a:ln w="12700">
-            <a:solidFill>
-              <a:srgbClr val="E5E5E5"/>
-            </a:solidFill>
-            <a:prstDash val="solid"/>
-          </a:ln>
-        </p:spPr>
-      </p:sp>
-      <p:sp>
-        <p:nvSpPr>
-          <p:cNvPr id="8" name="Text 6"/>
-          <p:cNvSpPr/>
-          <p:nvPr/>
-        </p:nvSpPr>
-        <p:spPr>
-          <a:xfrm>
-            <a:off x="1097280" y="1463040"/>
-            <a:ext cx="5669280" cy="4572000"/>
-          </a:xfrm>
-          <a:prstGeom prst="rect">
-            <a:avLst/>
-          </a:prstGeom>
-          <a:noFill/>
-          <a:ln/>
-        </p:spPr>
-        <p:txBody>
-          <a:bodyPr wrap="square" rtlCol="0" anchor="t"/>
-          <a:lstStyle/>
-          <a:p>
-            <a:pPr marL="228600" indent="-228600">
-              <a:spcAft>
-                <a:spcPts val="600"/>
-              </a:spcAft>
-              <a:buSzPct val="100000"/>
-              <a:buChar char="•"/>
-            </a:pPr>
-            <a:r>
-              <a:rPr lang="en-US" sz="1800" dirty="0">
-                <a:solidFill>
-                  <a:srgbClr val="0C0C0C"/>
-                </a:solidFill>
-                <a:latin typeface="Arial" pitchFamily="34" charset="0"/>
-                <a:ea typeface="Arial" pitchFamily="34" charset="-122"/>
-                <a:cs typeface="Arial" pitchFamily="34" charset="-120"/>
-              </a:rPr>
-              <a:t>This deck itself was vibecoded, then edited and quality-controlled by me</a:t>
-            </a:r>
-            <a:endParaRPr lang="en-US" sz="1800" dirty="0"/>
-          </a:p>
-          <a:p>
-            <a:pPr marL="228600" indent="-228600">
-              <a:spcAft>
-                <a:spcPts val="600"/>
-              </a:spcAft>
-              <a:buSzPct val="100000"/>
-              <a:buChar char="•"/>
-            </a:pPr>
-            <a:r>
-              <a:rPr lang="en-US" sz="1800" dirty="0">
-                <a:solidFill>
-                  <a:srgbClr val="0C0C0C"/>
-                </a:solidFill>
-                <a:latin typeface="Arial" pitchFamily="34" charset="0"/>
-                <a:ea typeface="Arial" pitchFamily="34" charset="-122"/>
-                <a:cs typeface="Arial" pitchFamily="34" charset="-120"/>
-              </a:rPr>
-              <a:t>The same pattern applies to delivery: rapid generation plus disciplined review</a:t>
-            </a:r>
-            <a:endParaRPr lang="en-US" sz="1800" dirty="0"/>
-          </a:p>
-          <a:p>
-            <a:pPr marL="228600" indent="-228600">
-              <a:spcAft>
-                <a:spcPts val="600"/>
-              </a:spcAft>
-              <a:buSzPct val="100000"/>
-              <a:buChar char="•"/>
-            </a:pPr>
-            <a:r>
-              <a:rPr lang="en-US" sz="1800" dirty="0">
-                <a:solidFill>
-                  <a:srgbClr val="0C0C0C"/>
-                </a:solidFill>
-                <a:latin typeface="Arial" pitchFamily="34" charset="0"/>
-                <a:ea typeface="Arial" pitchFamily="34" charset="-122"/>
-                <a:cs typeface="Arial" pitchFamily="34" charset="-120"/>
-              </a:rPr>
-              <a:t>You do not need to be a traditional engineer to start learning this workflow</a:t>
-            </a:r>
-            <a:endParaRPr lang="en-US" sz="1800" dirty="0"/>
-          </a:p>
-          <a:p>
-            <a:pPr marL="228600" indent="-228600">
-              <a:spcAft>
-                <a:spcPts val="600"/>
-              </a:spcAft>
-              <a:buSzPct val="100000"/>
-              <a:buChar char="•"/>
-            </a:pPr>
-            <a:r>
-              <a:rPr lang="en-US" sz="1800" dirty="0">
-                <a:solidFill>
-                  <a:srgbClr val="0C0C0C"/>
-                </a:solidFill>
-                <a:latin typeface="Arial" pitchFamily="34" charset="0"/>
-                <a:ea typeface="Arial" pitchFamily="34" charset="-122"/>
-                <a:cs typeface="Arial" pitchFamily="34" charset="-120"/>
-              </a:rPr>
-              <a:t>Team ask: test Codex, Claude, or GitHub Copilot today and bring one client-relevant insight back</a:t>
-            </a:r>
-            <a:endParaRPr lang="en-US" sz="1800" dirty="0"/>
-          </a:p>
-        </p:txBody>
-      </p:sp>
-      <p:sp>
-        <p:nvSpPr>
-          <p:cNvPr id="9" name="Shape 7"/>
-          <p:cNvSpPr/>
-          <p:nvPr/>
-        </p:nvSpPr>
-        <p:spPr>
-          <a:xfrm>
-            <a:off x="0" y="6217920"/>
-            <a:ext cx="12191695" cy="640080"/>
-          </a:xfrm>
-          <a:prstGeom prst="rect">
-            <a:avLst/>
-          </a:prstGeom>
-          <a:solidFill>
-            <a:srgbClr val="70201D"/>
-          </a:solidFill>
-          <a:ln w="12700">
-            <a:solidFill>
-              <a:srgbClr val="70201D"/>
-            </a:solidFill>
-            <a:prstDash val="solid"/>
-          </a:ln>
-        </p:spPr>
-      </p:sp>
-      <p:sp>
-        <p:nvSpPr>
-          <p:cNvPr id="10" name="Text 8"/>
-          <p:cNvSpPr/>
-          <p:nvPr/>
-        </p:nvSpPr>
-        <p:spPr>
-          <a:xfrm>
-            <a:off x="731520" y="6327648"/>
-            <a:ext cx="10789920" cy="365760"/>
-          </a:xfrm>
-          <a:prstGeom prst="rect">
-            <a:avLst/>
-          </a:prstGeom>
-          <a:noFill/>
-          <a:ln/>
-        </p:spPr>
-        <p:txBody>
-          <a:bodyPr wrap="square" rtlCol="0" anchor="ctr"/>
-          <a:lstStyle/>
-          <a:p>
-            <a:pPr indent="0" marL="0">
-              <a:buNone/>
-            </a:pPr>
-            <a:r>
-              <a:rPr lang="en-US" sz="1400" b="1" dirty="0">
-                <a:solidFill>
-                  <a:srgbClr val="FFFFFF"/>
-                </a:solidFill>
-                <a:latin typeface="Arial" pitchFamily="34" charset="0"/>
-                <a:ea typeface="Arial" pitchFamily="34" charset="-122"/>
-                <a:cs typeface="Arial" pitchFamily="34" charset="-120"/>
-              </a:rPr>
-              <a:t>Start using it now, but operate it like a professional software team.</a:t>
-            </a:r>
-            <a:endParaRPr lang="en-US" sz="1400" dirty="0"/>
+            <a:endParaRPr lang="en-US" sz="1300" dirty="0"/>
           </a:p>
         </p:txBody>
       </p:sp>
@@ -4643,4 +5775,319 @@
     </a:ext>
   </a:extLst>
 </a:theme>
+</file>
+
+<file path=ppt/theme/theme2.xml><?xml version="1.0" encoding="utf-8"?>
+<a:theme xmlns:a="http://schemas.openxmlformats.org/drawingml/2006/main" name="Office Theme">
+  <a:themeElements>
+    <a:clrScheme name="Office">
+      <a:dk1>
+        <a:sysClr val="windowText" lastClr="000000"/>
+      </a:dk1>
+      <a:lt1>
+        <a:sysClr val="window" lastClr="FFFFFF"/>
+      </a:lt1>
+      <a:dk2>
+        <a:srgbClr val="0E2841"/>
+      </a:dk2>
+      <a:lt2>
+        <a:srgbClr val="E8E8E8"/>
+      </a:lt2>
+      <a:accent1>
+        <a:srgbClr val="156082"/>
+      </a:accent1>
+      <a:accent2>
+        <a:srgbClr val="E97132"/>
+      </a:accent2>
+      <a:accent3>
+        <a:srgbClr val="196B24"/>
+      </a:accent3>
+      <a:accent4>
+        <a:srgbClr val="0F9ED5"/>
+      </a:accent4>
+      <a:accent5>
+        <a:srgbClr val="A02B93"/>
+      </a:accent5>
+      <a:accent6>
+        <a:srgbClr val="4EA72E"/>
+      </a:accent6>
+      <a:hlink>
+        <a:srgbClr val="467886"/>
+      </a:hlink>
+      <a:folHlink>
+        <a:srgbClr val="96607D"/>
+      </a:folHlink>
+    </a:clrScheme>
+    <a:fontScheme name="Office">
+      <a:majorFont>
+        <a:latin typeface="Aptos Display" panose="02110004020202020204"/>
+        <a:ea typeface=""/>
+        <a:cs typeface=""/>
+        <a:font script="Jpan" typeface="游ゴシック Light"/>
+        <a:font script="Hang" typeface="맑은 고딕"/>
+        <a:font script="Hans" typeface="等线 Light"/>
+        <a:font script="Hant" typeface="新細明體"/>
+        <a:font script="Arab" typeface="Times New Roman"/>
+        <a:font script="Hebr" typeface="Times New Roman"/>
+        <a:font script="Thai" typeface="Angsana New"/>
+        <a:font script="Ethi" typeface="Nyala"/>
+        <a:font script="Beng" typeface="Vrinda"/>
+        <a:font script="Gujr" typeface="Shruti"/>
+        <a:font script="Khmr" typeface="MoolBoran"/>
+        <a:font script="Knda" typeface="Tunga"/>
+        <a:font script="Guru" typeface="Raavi"/>
+        <a:font script="Cans" typeface="Euphemia"/>
+        <a:font script="Cher" typeface="Plantagenet Cherokee"/>
+        <a:font script="Yiii" typeface="Microsoft Yi Baiti"/>
+        <a:font script="Tibt" typeface="Microsoft Himalaya"/>
+        <a:font script="Thaa" typeface="MV Boli"/>
+        <a:font script="Deva" typeface="Mangal"/>
+        <a:font script="Telu" typeface="Gautami"/>
+        <a:font script="Taml" typeface="Latha"/>
+        <a:font script="Syrc" typeface="Estrangelo Edessa"/>
+        <a:font script="Orya" typeface="Kalinga"/>
+        <a:font script="Mlym" typeface="Kartika"/>
+        <a:font script="Laoo" typeface="DokChampa"/>
+        <a:font script="Sinh" typeface="Iskoola Pota"/>
+        <a:font script="Mong" typeface="Mongolian Baiti"/>
+        <a:font script="Viet" typeface="Times New Roman"/>
+        <a:font script="Uigh" typeface="Microsoft Uighur"/>
+        <a:font script="Geor" typeface="Sylfaen"/>
+        <a:font script="Armn" typeface="Arial"/>
+        <a:font script="Bugi" typeface="Leelawadee UI"/>
+        <a:font script="Bopo" typeface="Microsoft JhengHei"/>
+        <a:font script="Java" typeface="Javanese Text"/>
+        <a:font script="Lisu" typeface="Segoe UI"/>
+        <a:font script="Mymr" typeface="Myanmar Text"/>
+        <a:font script="Nkoo" typeface="Ebrima"/>
+        <a:font script="Olck" typeface="Nirmala UI"/>
+        <a:font script="Osma" typeface="Ebrima"/>
+        <a:font script="Phag" typeface="Phagspa"/>
+        <a:font script="Syrn" typeface="Estrangelo Edessa"/>
+        <a:font script="Syrj" typeface="Estrangelo Edessa"/>
+        <a:font script="Syre" typeface="Estrangelo Edessa"/>
+        <a:font script="Sora" typeface="Nirmala UI"/>
+        <a:font script="Tale" typeface="Microsoft Tai Le"/>
+        <a:font script="Talu" typeface="Microsoft New Tai Lue"/>
+        <a:font script="Tfng" typeface="Ebrima"/>
+      </a:majorFont>
+      <a:minorFont>
+        <a:latin typeface="Aptos" panose="02110004020202020204"/>
+        <a:ea typeface=""/>
+        <a:cs typeface=""/>
+        <a:font script="Jpan" typeface="游ゴシック"/>
+        <a:font script="Hang" typeface="맑은 고딕"/>
+        <a:font script="Hans" typeface="等线"/>
+        <a:font script="Hant" typeface="新細明體"/>
+        <a:font script="Arab" typeface="Arial"/>
+        <a:font script="Hebr" typeface="Arial"/>
+        <a:font script="Thai" typeface="Cordia New"/>
+        <a:font script="Ethi" typeface="Nyala"/>
+        <a:font script="Beng" typeface="Vrinda"/>
+        <a:font script="Gujr" typeface="Shruti"/>
+        <a:font script="Khmr" typeface="DaunPenh"/>
+        <a:font script="Knda" typeface="Tunga"/>
+        <a:font script="Guru" typeface="Raavi"/>
+        <a:font script="Cans" typeface="Euphemia"/>
+        <a:font script="Cher" typeface="Plantagenet Cherokee"/>
+        <a:font script="Yiii" typeface="Microsoft Yi Baiti"/>
+        <a:font script="Tibt" typeface="Microsoft Himalaya"/>
+        <a:font script="Thaa" typeface="MV Boli"/>
+        <a:font script="Deva" typeface="Mangal"/>
+        <a:font script="Telu" typeface="Gautami"/>
+        <a:font script="Taml" typeface="Latha"/>
+        <a:font script="Syrc" typeface="Estrangelo Edessa"/>
+        <a:font script="Orya" typeface="Kalinga"/>
+        <a:font script="Mlym" typeface="Kartika"/>
+        <a:font script="Laoo" typeface="DokChampa"/>
+        <a:font script="Sinh" typeface="Iskoola Pota"/>
+        <a:font script="Mong" typeface="Mongolian Baiti"/>
+        <a:font script="Viet" typeface="Arial"/>
+        <a:font script="Uigh" typeface="Microsoft Uighur"/>
+        <a:font script="Geor" typeface="Sylfaen"/>
+        <a:font script="Armn" typeface="Arial"/>
+        <a:font script="Bugi" typeface="Leelawadee UI"/>
+        <a:font script="Bopo" typeface="Microsoft JhengHei"/>
+        <a:font script="Java" typeface="Javanese Text"/>
+        <a:font script="Lisu" typeface="Segoe UI"/>
+        <a:font script="Mymr" typeface="Myanmar Text"/>
+        <a:font script="Nkoo" typeface="Ebrima"/>
+        <a:font script="Olck" typeface="Nirmala UI"/>
+        <a:font script="Osma" typeface="Ebrima"/>
+        <a:font script="Phag" typeface="Phagspa"/>
+        <a:font script="Syrn" typeface="Estrangelo Edessa"/>
+        <a:font script="Syrj" typeface="Estrangelo Edessa"/>
+        <a:font script="Syre" typeface="Estrangelo Edessa"/>
+        <a:font script="Sora" typeface="Nirmala UI"/>
+        <a:font script="Tale" typeface="Microsoft Tai Le"/>
+        <a:font script="Talu" typeface="Microsoft New Tai Lue"/>
+        <a:font script="Tfng" typeface="Ebrima"/>
+      </a:minorFont>
+    </a:fontScheme>
+    <a:fmtScheme name="Office">
+      <a:fillStyleLst>
+        <a:solidFill>
+          <a:schemeClr val="phClr"/>
+        </a:solidFill>
+        <a:gradFill rotWithShape="1">
+          <a:gsLst>
+            <a:gs pos="0">
+              <a:schemeClr val="phClr">
+                <a:lumMod val="110000"/>
+                <a:satMod val="105000"/>
+                <a:tint val="67000"/>
+              </a:schemeClr>
+            </a:gs>
+            <a:gs pos="50000">
+              <a:schemeClr val="phClr">
+                <a:lumMod val="105000"/>
+                <a:satMod val="103000"/>
+                <a:tint val="73000"/>
+              </a:schemeClr>
+            </a:gs>
+            <a:gs pos="100000">
+              <a:schemeClr val="phClr">
+                <a:lumMod val="105000"/>
+                <a:satMod val="109000"/>
+                <a:tint val="81000"/>
+              </a:schemeClr>
+            </a:gs>
+          </a:gsLst>
+          <a:lin ang="5400000" scaled="0"/>
+        </a:gradFill>
+        <a:gradFill rotWithShape="1">
+          <a:gsLst>
+            <a:gs pos="0">
+              <a:schemeClr val="phClr">
+                <a:satMod val="103000"/>
+                <a:lumMod val="102000"/>
+                <a:tint val="94000"/>
+              </a:schemeClr>
+            </a:gs>
+            <a:gs pos="50000">
+              <a:schemeClr val="phClr">
+                <a:satMod val="110000"/>
+                <a:lumMod val="100000"/>
+                <a:shade val="100000"/>
+              </a:schemeClr>
+            </a:gs>
+            <a:gs pos="100000">
+              <a:schemeClr val="phClr">
+                <a:lumMod val="99000"/>
+                <a:satMod val="120000"/>
+                <a:shade val="78000"/>
+              </a:schemeClr>
+            </a:gs>
+          </a:gsLst>
+          <a:lin ang="5400000" scaled="0"/>
+        </a:gradFill>
+      </a:fillStyleLst>
+      <a:lnStyleLst>
+        <a:ln w="12700" cap="flat" cmpd="sng" algn="ctr">
+          <a:solidFill>
+            <a:schemeClr val="phClr"/>
+          </a:solidFill>
+          <a:prstDash val="solid"/>
+          <a:miter lim="800000"/>
+        </a:ln>
+        <a:ln w="19050" cap="flat" cmpd="sng" algn="ctr">
+          <a:solidFill>
+            <a:schemeClr val="phClr"/>
+          </a:solidFill>
+          <a:prstDash val="solid"/>
+          <a:miter lim="800000"/>
+        </a:ln>
+        <a:ln w="25400" cap="flat" cmpd="sng" algn="ctr">
+          <a:solidFill>
+            <a:schemeClr val="phClr"/>
+          </a:solidFill>
+          <a:prstDash val="solid"/>
+          <a:miter lim="800000"/>
+        </a:ln>
+      </a:lnStyleLst>
+      <a:effectStyleLst>
+        <a:effectStyle>
+          <a:effectLst/>
+        </a:effectStyle>
+        <a:effectStyle>
+          <a:effectLst/>
+        </a:effectStyle>
+        <a:effectStyle>
+          <a:effectLst>
+            <a:outerShdw blurRad="57150" dist="19050" dir="5400000" algn="ctr" rotWithShape="0">
+              <a:srgbClr val="000000">
+                <a:alpha val="63000"/>
+              </a:srgbClr>
+            </a:outerShdw>
+          </a:effectLst>
+        </a:effectStyle>
+      </a:effectStyleLst>
+      <a:bgFillStyleLst>
+        <a:solidFill>
+          <a:schemeClr val="phClr"/>
+        </a:solidFill>
+        <a:solidFill>
+          <a:schemeClr val="phClr">
+            <a:tint val="95000"/>
+            <a:satMod val="170000"/>
+          </a:schemeClr>
+        </a:solidFill>
+        <a:gradFill rotWithShape="1">
+          <a:gsLst>
+            <a:gs pos="0">
+              <a:schemeClr val="phClr">
+                <a:tint val="93000"/>
+                <a:satMod val="150000"/>
+                <a:shade val="98000"/>
+                <a:lumMod val="102000"/>
+              </a:schemeClr>
+            </a:gs>
+            <a:gs pos="50000">
+              <a:schemeClr val="phClr">
+                <a:tint val="98000"/>
+                <a:satMod val="130000"/>
+                <a:shade val="90000"/>
+                <a:lumMod val="103000"/>
+              </a:schemeClr>
+            </a:gs>
+            <a:gs pos="100000">
+              <a:schemeClr val="phClr">
+                <a:shade val="63000"/>
+                <a:satMod val="120000"/>
+              </a:schemeClr>
+            </a:gs>
+          </a:gsLst>
+          <a:lin ang="5400000" scaled="0"/>
+        </a:gradFill>
+      </a:bgFillStyleLst>
+    </a:fmtScheme>
+  </a:themeElements>
+  <a:objectDefaults>
+    <a:lnDef>
+      <a:spPr/>
+      <a:bodyPr/>
+      <a:lstStyle/>
+      <a:style>
+        <a:lnRef idx="2">
+          <a:schemeClr val="accent1"/>
+        </a:lnRef>
+        <a:fillRef idx="0">
+          <a:schemeClr val="accent1"/>
+        </a:fillRef>
+        <a:effectRef idx="1">
+          <a:schemeClr val="accent1"/>
+        </a:effectRef>
+        <a:fontRef idx="minor">
+          <a:schemeClr val="tx1"/>
+        </a:fontRef>
+      </a:style>
+    </a:lnDef>
+  </a:objectDefaults>
+  <a:extraClrSchemeLst/>
+  <a:extLst>
+    <a:ext uri="{05A4C25C-085E-4340-85A3-A5531E510DB2}">
+      <thm15:themeFamily xmlns:thm15="http://schemas.microsoft.com/office/thememl/2012/main" name="Office Theme" id="{2E142A2C-CD16-42D6-873A-C26D2A0506FA}" vid="{1BDDFF52-6CD6-40A5-AB3C-68EB2F1E4D0A}"/>
+    </a:ext>
+  </a:extLst>
+</a:theme>
 </file>